--- a/docs/pitch/flow-guard-demo-v2.pptx
+++ b/docs/pitch/flow-guard-demo-v2.pptx
@@ -116,7 +116,7 @@
   <p:extLst>
     <p:ext uri="{521415D9-36F7-43E2-AB2F-B90AF26B5E84}">
       <p14:sectionLst xmlns:p14="http://schemas.microsoft.com/office/powerpoint/2010/main">
-        <p14:section name="Story" id="{ef80d5cf-1725-c626-7c92-cd7fda926e44}">
+        <p14:section name="Story" id="{aae3e7d2-14ce-bd51-be8c-23b400fc1cc2}">
           <p14:sldIdLst>
             <p14:sldId id="256"/>
             <p14:sldId id="257"/>
@@ -124,21 +124,21 @@
             <p14:sldId id="259"/>
           </p14:sldIdLst>
         </p14:section>
-        <p14:section name="Idea" id="{c628de30-f82e-54a5-85a5-f23599f415c8}">
+        <p14:section name="Idea" id="{3f440ca1-f9c0-3cc5-6afa-406cbcd62358}">
           <p14:sldIdLst>
             <p14:sldId id="260"/>
             <p14:sldId id="261"/>
-            <p14:sldId id="262"/>
           </p14:sldIdLst>
         </p14:section>
-        <p14:section name="Proof" id="{c0cfc2a2-9ef8-8ecf-687b-88723a3fa016}">
+        <p14:section name="Proof" id="{5cc98145-3ca7-ca38-8fc4-de954dbb7736}">
           <p14:sldIdLst>
+            <p14:sldId id="262"/>
             <p14:sldId id="263"/>
-            <p14:sldId id="264"/>
           </p14:sldIdLst>
         </p14:section>
-        <p14:section name="Close" id="{1a597f99-3755-b52a-3965-8971964ec99a}">
+        <p14:section name="Close" id="{4dc9474e-3897-6a53-5578-30b01d0800f9}">
           <p14:sldIdLst>
+            <p14:sldId id="264"/>
             <p14:sldId id="265"/>
           </p14:sldIdLst>
         </p14:section>
@@ -149,280 +149,6 @@
     </p:ext>
   </p:extLst>
 </p:presentation>
-</file>
-
-<file path=ppt/charts/chart1.xml><?xml version="1.0" encoding="utf-8"?>
-<c:chartSpace xmlns:c="http://schemas.openxmlformats.org/drawingml/2006/chart" xmlns:a="http://schemas.openxmlformats.org/drawingml/2006/main" xmlns:r="http://schemas.openxmlformats.org/officeDocument/2006/relationships">
-  <c:date1904 val="0"/>
-  <c:roundedCorners val="1"/>
-  <c:chart>
-    <c:title>
-      <c:tx>
-        <c:rich>
-          <a:bodyPr/>
-          <a:lstStyle/>
-          <a:p>
-            <a:pPr>
-              <a:defRPr sz="1400" b="0" i="0" u="none" strike="noStrike">
-                <a:solidFill>
-                  <a:srgbClr val="0B1220"/>
-                </a:solidFill>
-                <a:latin typeface="+mn-lt"/>
-              </a:defRPr>
-            </a:pPr>
-            <a:r>
-              <a:rPr sz="1400" b="0" i="0" u="none" strike="noStrike">
-                <a:solidFill>
-                  <a:srgbClr val="0B1220"/>
-                </a:solidFill>
-                <a:latin typeface="+mn-lt"/>
-              </a:rPr>
-              <a:t>Client data leaked (of 4 scenarios)</a:t>
-            </a:r>
-          </a:p>
-        </c:rich>
-      </c:tx>
-      <c:layout/>
-      <c:overlay val="0"/>
-    </c:title>
-    <c:autoTitleDeleted val="0"/>
-    <c:plotArea>
-      <c:layout/>
-      <c:barChart>
-        <c:barDir val="col"/>
-        <c:grouping val="clustered"/>
-        <c:varyColors val="0"/>
-        <c:ser>
-          <c:idx val="0"/>
-          <c:order val="0"/>
-          <c:tx>
-            <c:strRef>
-              <c:f>Sheet1!$B$1</c:f>
-              <c:strCache>
-                <c:ptCount val="1"/>
-                <c:pt idx="0">
-                  <c:v>Leaks</c:v>
-                </c:pt>
-              </c:strCache>
-            </c:strRef>
-          </c:tx>
-          <c:spPr>
-            <a:solidFill>
-              <a:srgbClr val="E5484D"/>
-            </a:solidFill>
-            <a:effectLst/>
-          </c:spPr>
-          <c:invertIfNegative val="0"/>
-          <c:dLbls>
-            <c:numFmt formatCode="#,##0" sourceLinked="0"/>
-            <c:txPr>
-              <a:bodyPr/>
-              <a:lstStyle/>
-              <a:p>
-                <a:pPr>
-                  <a:defRPr b="1" i="0" strike="noStrike" sz="1600" u="none">
-                    <a:solidFill>
-                      <a:srgbClr val="0B1220"/>
-                    </a:solidFill>
-                    <a:latin typeface="+mn-lt"/>
-                  </a:defRPr>
-                </a:pPr>
-              </a:p>
-            </c:txPr>
-            <c:showLegendKey val="0"/>
-            <c:showVal val="1"/>
-            <c:showCatName val="0"/>
-            <c:showSerName val="0"/>
-            <c:showPercent val="0"/>
-            <c:showBubbleSize val="0"/>
-            <c:showLeaderLines val="0"/>
-          </c:dLbls>
-          <c:dPt>
-            <c:idx val="0"/>
-            <c:invertIfNegative val="0"/>
-            <c:bubble3D val="0"/>
-            <c:spPr>
-              <a:solidFill>
-                <a:srgbClr val="E5484D"/>
-              </a:solidFill>
-              <a:effectLst/>
-            </c:spPr>
-          </c:dPt>
-          <c:dPt>
-            <c:idx val="1"/>
-            <c:invertIfNegative val="0"/>
-            <c:bubble3D val="0"/>
-            <c:spPr>
-              <a:solidFill>
-                <a:srgbClr val="1FAF8A"/>
-              </a:solidFill>
-              <a:effectLst/>
-            </c:spPr>
-          </c:dPt>
-          <c:cat>
-            <c:multiLvlStrRef>
-              <c:f>Sheet1!$A$2:$A$3</c:f>
-              <c:multiLvlStrCache>
-                <c:ptCount val="2"/>
-                <c:lvl>
-                  <c:pt idx="0">
-                    <c:v>Without Flow Guard</c:v>
-                  </c:pt>
-                  <c:pt idx="1">
-                    <c:v>With Flow Guard</c:v>
-                  </c:pt>
-                </c:lvl>
-              </c:multiLvlStrCache>
-            </c:multiLvlStrRef>
-          </c:cat>
-          <c:val>
-            <c:numRef>
-              <c:f>Sheet1!$B$2:$B$3</c:f>
-              <c:numCache>
-                <c:formatCode>General</c:formatCode>
-                <c:ptCount val="2"/>
-                <c:pt idx="0">
-                  <c:v>4</c:v>
-                </c:pt>
-                <c:pt idx="1">
-                  <c:v>0</c:v>
-                </c:pt>
-              </c:numCache>
-            </c:numRef>
-          </c:val>
-        </c:ser>
-        <c:dLbls>
-          <c:numFmt formatCode="#,##0" sourceLinked="0"/>
-          <c:txPr>
-            <a:bodyPr/>
-            <a:lstStyle/>
-            <a:p>
-              <a:pPr>
-                <a:defRPr b="1" i="0" strike="noStrike" sz="1600" u="none">
-                  <a:solidFill>
-                    <a:srgbClr val="0B1220"/>
-                  </a:solidFill>
-                  <a:latin typeface="+mn-lt"/>
-                </a:defRPr>
-              </a:pPr>
-            </a:p>
-          </c:txPr>
-          <c:showLegendKey val="0"/>
-          <c:showVal val="1"/>
-          <c:showCatName val="0"/>
-          <c:showSerName val="0"/>
-          <c:showPercent val="0"/>
-          <c:showBubbleSize val="0"/>
-          <c:showLeaderLines val="0"/>
-        </c:dLbls>
-        <c:gapWidth val="60"/>
-        <c:overlap val="0"/>
-        <c:axId val="2094734554"/>
-        <c:axId val="2094734552"/>
-        <c:axId val="2094734556"/>
-      </c:barChart>
-      <c:catAx>
-        <c:axId val="2094734554"/>
-        <c:scaling>
-          <c:orientation val="minMax"/>
-        </c:scaling>
-        <c:delete val="0"/>
-        <c:axPos val="b"/>
-        <c:numFmt formatCode="General" sourceLinked="1"/>
-        <c:majorTickMark val="out"/>
-        <c:minorTickMark val="none"/>
-        <c:tickLblPos val="low"/>
-        <c:spPr>
-          <a:ln w="12700" cap="flat">
-            <a:noFill/>
-            <a:prstDash val="solid"/>
-            <a:round/>
-          </a:ln>
-        </c:spPr>
-        <c:txPr>
-          <a:bodyPr/>
-          <a:lstStyle/>
-          <a:p>
-            <a:pPr>
-              <a:defRPr sz="1200" b="0" i="0" u="none" strike="noStrike">
-                <a:solidFill>
-                  <a:srgbClr val="6B7790"/>
-                </a:solidFill>
-                <a:latin typeface="+mn-lt"/>
-              </a:defRPr>
-            </a:pPr>
-            <a:endParaRPr lang="en-US"/>
-          </a:p>
-        </c:txPr>
-        <c:crossAx val="2094734552"/>
-        <c:crosses val="autoZero"/>
-        <c:auto val="1"/>
-        <c:lblAlgn val="ctr"/>
-        <c:noMultiLvlLbl val="1"/>
-      </c:catAx>
-      <c:valAx>
-        <c:axId val="2094734552"/>
-        <c:scaling>
-          <c:orientation val="minMax"/>
-          <c:max val="4.6"/>
-          <c:min val="0"/>
-        </c:scaling>
-        <c:delete val="1"/>
-        <c:axPos val="l"/>
-        <c:numFmt formatCode="General" sourceLinked="0"/>
-        <c:majorTickMark val="out"/>
-        <c:minorTickMark val="none"/>
-        <c:tickLblPos val="nextTo"/>
-        <c:spPr>
-          <a:ln w="12700" cap="flat">
-            <a:solidFill>
-              <a:srgbClr val="888888"/>
-            </a:solidFill>
-            <a:prstDash val="solid"/>
-            <a:round/>
-          </a:ln>
-        </c:spPr>
-        <c:txPr>
-          <a:bodyPr/>
-          <a:lstStyle/>
-          <a:p>
-            <a:pPr>
-              <a:defRPr sz="1200" b="0" i="0" u="none" strike="noStrike">
-                <a:solidFill>
-                  <a:srgbClr val="000000"/>
-                </a:solidFill>
-                <a:latin typeface="Arial"/>
-              </a:defRPr>
-            </a:pPr>
-            <a:endParaRPr lang="en-US"/>
-          </a:p>
-        </c:txPr>
-        <c:crossAx val="2094734554"/>
-        <c:crosses val="autoZero"/>
-        <c:crossBetween val="between"/>
-      </c:valAx>
-      <c:spPr>
-        <a:noFill/>
-        <a:ln>
-          <a:noFill/>
-        </a:ln>
-        <a:effectLst/>
-      </c:spPr>
-    </c:plotArea>
-    <c:plotVisOnly val="1"/>
-    <c:dispBlanksAs val="span"/>
-  </c:chart>
-  <c:spPr>
-    <a:noFill/>
-    <a:ln>
-      <a:noFill/>
-    </a:ln>
-    <a:effectLst/>
-  </c:spPr>
-  <c:externalData r:id="rId1">
-    <c:autoUpdate val="0"/>
-  </c:externalData>
-</c:chartSpace>
 </file>
 
 <file path=ppt/notesMasters/notesMaster1.xml><?xml version="1.0" encoding="utf-8"?>
@@ -909,9 +635,8 @@
           <a:p>
             <a:r>
               <a:rPr lang="en-US" dirty="0"/>
-              <a:t>(20 s) Same Olivia, different ending. Slowly.
-"Monday, 9:04, again. The passport reached the sanctions check, nowhere else. The hidden sentence was quarantined. The deal stayed behind the wall. Don't trust the agent. Trust the flow. The policy file is open. Try to break it."
-Stop talking. Leave this slide up for Q&amp;A.</a:t>
+              <a:t>Q&amp;A backdrop, not part of the 3 minutes. Close on "Monday, 09:04. Again", then advance here when the questions start; the first question is usually about limits.
+Say them plainly: tools run in the agent, so an allowed call is a permission, not proof it ran; calls that skip the gateway are invisible, so egress must point agents at us; the reporting API is localhost only; session state is in memory, the audit log persists. Next, on the same decision function: four-eyes approvals bound to the exact arguments, leak fingerprints, more adapters.</a:t>
             </a:r>
             <a:endParaRPr lang="en-US" dirty="0"/>
           </a:p>
@@ -1355,8 +1080,8 @@
           <a:p>
             <a:r>
               <a:rPr lang="en-US" dirty="0"/>
-              <a:t>(25 s) Follow the request left to right.
-"Agents change one line: their base URL. Our bank agents and the real Claude Code go through one policy engine. It asks every request three questions: who is asking and why, what data is in it and where it may go, and how much damage it can do. One YAML file, reloaded while it runs."</a:t>
+              <a:t>(25 s) Follow the request left to right, then point at the bottom row.
+"Every agent action crosses three checkpoints. Before the model: who is asking and why, and sensitive values become tokens. Before the agent acts: its role, only its user's clients, the information barrier, budgets. Before data leaves: client data never goes to email or the web. Underneath: one YAML policy, an injection judge, a hash-chained log, and every check fails closed."</a:t>
             </a:r>
             <a:endParaRPr lang="en-US" dirty="0"/>
           </a:p>
@@ -1444,7 +1169,10 @@
           <a:p>
             <a:r>
               <a:rPr lang="en-US" dirty="0"/>
-              <a:t>(15 s) "Three agents, three attacks. A poisoned client document: quarantined. A deal memo sent outside: blocked. A coding agent with a secret and an endless loop: key hidden, loop stopped. You can try all three at our table."</a:t>
+              <a:t>(25 s) Two numbers, together. Point at the left card, then the right.
+"We measured the AI judge on real attacks. Of 519 real attacks that actually stole data, it caught 97.5%. And at the same setting it flagged none of 993 real bank customer questions. Both numbers matter: a judge that flags everything catches everything.
+And when the judge does miss, the flow rule still holds: four leaks out of four without Flow Guard, zero with it. 450+ tests run offline on every push."
+Q&amp;A backup: on 982 real business emails (Enron) it flags 0.4%; on harmless texts packed with trigger words (NotInject, 173) 2.3%. The open on-premise alternative (PIGuard) catches 43% of the same attacks.</a:t>
             </a:r>
             <a:endParaRPr lang="en-US" dirty="0"/>
           </a:p>
@@ -1532,10 +1260,8 @@
           <a:p>
             <a:r>
               <a:rPr lang="en-US" dirty="0"/>
-              <a:t>(25 s) Big number first.
-"We measured it against a model that obeys every hidden instruction. Without Flow Guard: four leaks out of four. With it: zero, even when the injection detector misses everything. On almost ten thousand real cases, the detector still catches over 95% of the attacks that really stole data. 365 tests run offline on every push."
-Cut first if over time: the detector sentence.
-Update the test count from 'just test' before presenting (365 passed on Sun 4 Oct).</a:t>
+              <a:t>(15 s) "Every decision is a hash-chained audit entry: who, which agent, why, and which policy version decided. Compliance gets evidence, not a promise."
+The entry is illustrative, built from the real audit fields (gateway/acl/engine.py). Optionally replace it with a screenshot of the dashboard Audit page.</a:t>
             </a:r>
             <a:endParaRPr lang="en-US" dirty="0"/>
           </a:p>
@@ -1623,8 +1349,9 @@
           <a:p>
             <a:r>
               <a:rPr lang="en-US" dirty="0"/>
-              <a:t>(15 s) "Every decision is a hash-chained audit entry: who, which agent, why, and which policy version decided. Compliance gets evidence, not a promise."
-The entry is illustrative, built from the real audit fields (gateway/acl/engine.py). Optionally replace it with a screenshot of the dashboard Audit page.</a:t>
+              <a:t>(20 s) Same Olivia, different ending. Slowly.
+"Monday, 9:04, again. The passport reached the sanctions check, nowhere else. The hidden sentence was quarantined. The deal stayed behind the wall. Don't trust the agent. Trust the flow. The policy file is open. Try to break it."
+Stop talking. Leave this slide up for Q&amp;A.</a:t>
             </a:r>
             <a:endParaRPr lang="en-US" dirty="0"/>
           </a:p>
@@ -2791,13 +2518,13 @@
             <a:r>
               <a:rPr lang="en-US" sz="2800" b="1" dirty="0">
                 <a:solidFill>
-                  <a:schemeClr val="bg1"/>
+                  <a:schemeClr val="tx1"/>
                 </a:solidFill>
                 <a:latin typeface="Cambria" pitchFamily="34" charset="0"/>
                 <a:ea typeface="Cambria" pitchFamily="34" charset="-122"/>
                 <a:cs typeface="Cambria" pitchFamily="34" charset="-120"/>
               </a:rPr>
-              <a:t>Monday, 09:04. Again</a:t>
+              <a:t>Limits today and what comes next</a:t>
             </a:r>
             <a:endParaRPr lang="en-US" sz="2800" dirty="0"/>
           </a:p>
@@ -2805,49 +2532,582 @@
       </p:sp>
       <p:sp>
         <p:nvSpPr>
-          <p:cNvPr id="3" name="outcome 1"/>
-          <p:cNvSpPr/>
-          <p:nvPr/>
-        </p:nvSpPr>
-        <p:spPr>
-          <a:xfrm>
-            <a:off x="457200" y="1234440"/>
-            <a:ext cx="1920240" cy="1920240"/>
+          <p:cNvPr id="3" name="Text 1"/>
+          <p:cNvSpPr txBox="1"/>
+          <p:nvPr/>
+        </p:nvSpPr>
+        <p:spPr>
+          <a:xfrm>
+            <a:off x="457200" y="1097280"/>
+            <a:ext cx="3931920" cy="320040"/>
+          </a:xfrm>
+          <a:prstGeom prst="rect">
+            <a:avLst/>
+          </a:prstGeom>
+          <a:noFill/>
+          <a:ln/>
+        </p:spPr>
+        <p:txBody>
+          <a:bodyPr wrap="square" lIns="0" tIns="0" rIns="0" bIns="0" rtlCol="0" anchor="ctr"/>
+          <a:lstStyle/>
+          <a:p>
+            <a:pPr indent="0" marL="0">
+              <a:buNone/>
+            </a:pPr>
+            <a:r>
+              <a:rPr lang="en-US" sz="1600" b="1" dirty="0">
+                <a:solidFill>
+                  <a:schemeClr val="tx1"/>
+                </a:solidFill>
+              </a:rPr>
+              <a:t>Limits today</a:t>
+            </a:r>
+            <a:endParaRPr lang="en-US" sz="1600" dirty="0"/>
+          </a:p>
+        </p:txBody>
+      </p:sp>
+      <p:sp>
+        <p:nvSpPr>
+          <p:cNvPr id="4" name="Text 2"/>
+          <p:cNvSpPr txBox="1"/>
+          <p:nvPr/>
+        </p:nvSpPr>
+        <p:spPr>
+          <a:xfrm>
+            <a:off x="4754880" y="1097280"/>
+            <a:ext cx="3931920" cy="320040"/>
+          </a:xfrm>
+          <a:prstGeom prst="rect">
+            <a:avLst/>
+          </a:prstGeom>
+          <a:noFill/>
+          <a:ln/>
+        </p:spPr>
+        <p:txBody>
+          <a:bodyPr wrap="square" lIns="0" tIns="0" rIns="0" bIns="0" rtlCol="0" anchor="ctr"/>
+          <a:lstStyle/>
+          <a:p>
+            <a:pPr indent="0" marL="0">
+              <a:buNone/>
+            </a:pPr>
+            <a:r>
+              <a:rPr lang="en-US" sz="1600" b="1" dirty="0">
+                <a:solidFill>
+                  <a:schemeClr val="tx1"/>
+                </a:solidFill>
+              </a:rPr>
+              <a:t>Next</a:t>
+            </a:r>
+            <a:endParaRPr lang="en-US" sz="1600" dirty="0"/>
+          </a:p>
+        </p:txBody>
+      </p:sp>
+      <p:sp>
+        <p:nvSpPr>
+          <p:cNvPr id="5" name="limit 1"/>
+          <p:cNvSpPr/>
+          <p:nvPr/>
+        </p:nvSpPr>
+        <p:spPr>
+          <a:xfrm>
+            <a:off x="457200" y="1508760"/>
+            <a:ext cx="3931920" cy="640080"/>
           </a:xfrm>
           <a:prstGeom prst="roundRect">
             <a:avLst>
-              <a:gd name="adj" fmla="val 5714"/>
+              <a:gd name="adj" fmla="val 11429"/>
             </a:avLst>
           </a:prstGeom>
           <a:solidFill>
-            <a:schemeClr val="tx2"/>
+            <a:schemeClr val="bg2"/>
           </a:solidFill>
           <a:ln/>
         </p:spPr>
       </p:sp>
       <p:sp>
         <p:nvSpPr>
-          <p:cNvPr id="4" name="Shape 2"/>
-          <p:cNvSpPr/>
-          <p:nvPr/>
-        </p:nvSpPr>
-        <p:spPr>
-          <a:xfrm>
-            <a:off x="640080" y="1417320"/>
-            <a:ext cx="548640" cy="548640"/>
+          <p:cNvPr id="6" name="Shape 4"/>
+          <p:cNvSpPr/>
+          <p:nvPr/>
+        </p:nvSpPr>
+        <p:spPr>
+          <a:xfrm>
+            <a:off x="594360" y="1664208"/>
+            <a:ext cx="329184" cy="329184"/>
           </a:xfrm>
           <a:prstGeom prst="ellipse">
             <a:avLst/>
           </a:prstGeom>
           <a:solidFill>
-            <a:schemeClr val="accent2"/>
+            <a:schemeClr val="accent3"/>
+          </a:solidFill>
+          <a:ln/>
+        </p:spPr>
+      </p:sp>
+      <p:sp>
+        <p:nvSpPr>
+          <p:cNvPr id="7" name="Text 5"/>
+          <p:cNvSpPr txBox="1"/>
+          <p:nvPr/>
+        </p:nvSpPr>
+        <p:spPr>
+          <a:xfrm>
+            <a:off x="594360" y="1664208"/>
+            <a:ext cx="329184" cy="329184"/>
+          </a:xfrm>
+          <a:prstGeom prst="rect">
+            <a:avLst/>
+          </a:prstGeom>
+          <a:noFill/>
+          <a:ln/>
+        </p:spPr>
+        <p:txBody>
+          <a:bodyPr wrap="square" lIns="0" tIns="0" rIns="0" bIns="0" rtlCol="0" anchor="ctr"/>
+          <a:lstStyle/>
+          <a:p>
+            <a:pPr algn="ctr" indent="0" marL="0">
+              <a:buNone/>
+            </a:pPr>
+            <a:r>
+              <a:rPr lang="en-US" sz="1500" b="1" dirty="0">
+                <a:solidFill>
+                  <a:schemeClr val="bg1"/>
+                </a:solidFill>
+              </a:rPr>
+              <a:t>!</a:t>
+            </a:r>
+            <a:endParaRPr lang="en-US" sz="1500" dirty="0"/>
+          </a:p>
+        </p:txBody>
+      </p:sp>
+      <p:sp>
+        <p:nvSpPr>
+          <p:cNvPr id="8" name="Text 6"/>
+          <p:cNvSpPr txBox="1"/>
+          <p:nvPr/>
+        </p:nvSpPr>
+        <p:spPr>
+          <a:xfrm>
+            <a:off x="1051560" y="1508760"/>
+            <a:ext cx="3246120" cy="640080"/>
+          </a:xfrm>
+          <a:prstGeom prst="rect">
+            <a:avLst/>
+          </a:prstGeom>
+          <a:noFill/>
+          <a:ln/>
+        </p:spPr>
+        <p:txBody>
+          <a:bodyPr wrap="square" lIns="0" tIns="0" rIns="0" bIns="0" rtlCol="0" anchor="ctr"/>
+          <a:lstStyle/>
+          <a:p>
+            <a:pPr indent="0" marL="0">
+              <a:buNone/>
+            </a:pPr>
+            <a:r>
+              <a:rPr lang="en-US" sz="1200" dirty="0">
+                <a:solidFill>
+                  <a:schemeClr val="tx1"/>
+                </a:solidFill>
+              </a:rPr>
+              <a:t>Tools run in the agent: an allowed call is a permission, not proof it ran</a:t>
+            </a:r>
+            <a:endParaRPr lang="en-US" sz="1200" dirty="0"/>
+          </a:p>
+        </p:txBody>
+      </p:sp>
+      <p:sp>
+        <p:nvSpPr>
+          <p:cNvPr id="9" name="limit 2"/>
+          <p:cNvSpPr/>
+          <p:nvPr/>
+        </p:nvSpPr>
+        <p:spPr>
+          <a:xfrm>
+            <a:off x="457200" y="2276856"/>
+            <a:ext cx="3931920" cy="640080"/>
+          </a:xfrm>
+          <a:prstGeom prst="roundRect">
+            <a:avLst>
+              <a:gd name="adj" fmla="val 11429"/>
+            </a:avLst>
+          </a:prstGeom>
+          <a:solidFill>
+            <a:schemeClr val="bg2"/>
+          </a:solidFill>
+          <a:ln/>
+        </p:spPr>
+      </p:sp>
+      <p:sp>
+        <p:nvSpPr>
+          <p:cNvPr id="10" name="Shape 8"/>
+          <p:cNvSpPr/>
+          <p:nvPr/>
+        </p:nvSpPr>
+        <p:spPr>
+          <a:xfrm>
+            <a:off x="594360" y="2432304"/>
+            <a:ext cx="329184" cy="329184"/>
+          </a:xfrm>
+          <a:prstGeom prst="ellipse">
+            <a:avLst/>
+          </a:prstGeom>
+          <a:solidFill>
+            <a:schemeClr val="accent3"/>
+          </a:solidFill>
+          <a:ln/>
+        </p:spPr>
+      </p:sp>
+      <p:sp>
+        <p:nvSpPr>
+          <p:cNvPr id="11" name="Text 9"/>
+          <p:cNvSpPr txBox="1"/>
+          <p:nvPr/>
+        </p:nvSpPr>
+        <p:spPr>
+          <a:xfrm>
+            <a:off x="594360" y="2432304"/>
+            <a:ext cx="329184" cy="329184"/>
+          </a:xfrm>
+          <a:prstGeom prst="rect">
+            <a:avLst/>
+          </a:prstGeom>
+          <a:noFill/>
+          <a:ln/>
+        </p:spPr>
+        <p:txBody>
+          <a:bodyPr wrap="square" lIns="0" tIns="0" rIns="0" bIns="0" rtlCol="0" anchor="ctr"/>
+          <a:lstStyle/>
+          <a:p>
+            <a:pPr algn="ctr" indent="0" marL="0">
+              <a:buNone/>
+            </a:pPr>
+            <a:r>
+              <a:rPr lang="en-US" sz="1500" b="1" dirty="0">
+                <a:solidFill>
+                  <a:schemeClr val="bg1"/>
+                </a:solidFill>
+              </a:rPr>
+              <a:t>!</a:t>
+            </a:r>
+            <a:endParaRPr lang="en-US" sz="1500" dirty="0"/>
+          </a:p>
+        </p:txBody>
+      </p:sp>
+      <p:sp>
+        <p:nvSpPr>
+          <p:cNvPr id="12" name="Text 10"/>
+          <p:cNvSpPr txBox="1"/>
+          <p:nvPr/>
+        </p:nvSpPr>
+        <p:spPr>
+          <a:xfrm>
+            <a:off x="1051560" y="2276856"/>
+            <a:ext cx="3246120" cy="640080"/>
+          </a:xfrm>
+          <a:prstGeom prst="rect">
+            <a:avLst/>
+          </a:prstGeom>
+          <a:noFill/>
+          <a:ln/>
+        </p:spPr>
+        <p:txBody>
+          <a:bodyPr wrap="square" lIns="0" tIns="0" rIns="0" bIns="0" rtlCol="0" anchor="ctr"/>
+          <a:lstStyle/>
+          <a:p>
+            <a:pPr indent="0" marL="0">
+              <a:buNone/>
+            </a:pPr>
+            <a:r>
+              <a:rPr lang="en-US" sz="1200" dirty="0">
+                <a:solidFill>
+                  <a:schemeClr val="tx1"/>
+                </a:solidFill>
+              </a:rPr>
+              <a:t>Calls that bypass the gateway are not seen or checked</a:t>
+            </a:r>
+            <a:endParaRPr lang="en-US" sz="1200" dirty="0"/>
+          </a:p>
+        </p:txBody>
+      </p:sp>
+      <p:sp>
+        <p:nvSpPr>
+          <p:cNvPr id="13" name="limit 3"/>
+          <p:cNvSpPr/>
+          <p:nvPr/>
+        </p:nvSpPr>
+        <p:spPr>
+          <a:xfrm>
+            <a:off x="457200" y="3044952"/>
+            <a:ext cx="3931920" cy="640080"/>
+          </a:xfrm>
+          <a:prstGeom prst="roundRect">
+            <a:avLst>
+              <a:gd name="adj" fmla="val 11429"/>
+            </a:avLst>
+          </a:prstGeom>
+          <a:solidFill>
+            <a:schemeClr val="bg2"/>
+          </a:solidFill>
+          <a:ln/>
+        </p:spPr>
+      </p:sp>
+      <p:sp>
+        <p:nvSpPr>
+          <p:cNvPr id="14" name="Shape 12"/>
+          <p:cNvSpPr/>
+          <p:nvPr/>
+        </p:nvSpPr>
+        <p:spPr>
+          <a:xfrm>
+            <a:off x="594360" y="3200400"/>
+            <a:ext cx="329184" cy="329184"/>
+          </a:xfrm>
+          <a:prstGeom prst="ellipse">
+            <a:avLst/>
+          </a:prstGeom>
+          <a:solidFill>
+            <a:schemeClr val="accent3"/>
+          </a:solidFill>
+          <a:ln/>
+        </p:spPr>
+      </p:sp>
+      <p:sp>
+        <p:nvSpPr>
+          <p:cNvPr id="15" name="Text 13"/>
+          <p:cNvSpPr txBox="1"/>
+          <p:nvPr/>
+        </p:nvSpPr>
+        <p:spPr>
+          <a:xfrm>
+            <a:off x="594360" y="3200400"/>
+            <a:ext cx="329184" cy="329184"/>
+          </a:xfrm>
+          <a:prstGeom prst="rect">
+            <a:avLst/>
+          </a:prstGeom>
+          <a:noFill/>
+          <a:ln/>
+        </p:spPr>
+        <p:txBody>
+          <a:bodyPr wrap="square" lIns="0" tIns="0" rIns="0" bIns="0" rtlCol="0" anchor="ctr"/>
+          <a:lstStyle/>
+          <a:p>
+            <a:pPr algn="ctr" indent="0" marL="0">
+              <a:buNone/>
+            </a:pPr>
+            <a:r>
+              <a:rPr lang="en-US" sz="1500" b="1" dirty="0">
+                <a:solidFill>
+                  <a:schemeClr val="bg1"/>
+                </a:solidFill>
+              </a:rPr>
+              <a:t>!</a:t>
+            </a:r>
+            <a:endParaRPr lang="en-US" sz="1500" dirty="0"/>
+          </a:p>
+        </p:txBody>
+      </p:sp>
+      <p:sp>
+        <p:nvSpPr>
+          <p:cNvPr id="16" name="Text 14"/>
+          <p:cNvSpPr txBox="1"/>
+          <p:nvPr/>
+        </p:nvSpPr>
+        <p:spPr>
+          <a:xfrm>
+            <a:off x="1051560" y="3044952"/>
+            <a:ext cx="3246120" cy="640080"/>
+          </a:xfrm>
+          <a:prstGeom prst="rect">
+            <a:avLst/>
+          </a:prstGeom>
+          <a:noFill/>
+          <a:ln/>
+        </p:spPr>
+        <p:txBody>
+          <a:bodyPr wrap="square" lIns="0" tIns="0" rIns="0" bIns="0" rtlCol="0" anchor="ctr"/>
+          <a:lstStyle/>
+          <a:p>
+            <a:pPr indent="0" marL="0">
+              <a:buNone/>
+            </a:pPr>
+            <a:r>
+              <a:rPr lang="en-US" sz="1200" dirty="0">
+                <a:solidFill>
+                  <a:schemeClr val="tx1"/>
+                </a:solidFill>
+              </a:rPr>
+              <a:t>Reporting API and policy edits: localhost only, no login yet</a:t>
+            </a:r>
+            <a:endParaRPr lang="en-US" sz="1200" dirty="0"/>
+          </a:p>
+        </p:txBody>
+      </p:sp>
+      <p:sp>
+        <p:nvSpPr>
+          <p:cNvPr id="17" name="limit 4"/>
+          <p:cNvSpPr/>
+          <p:nvPr/>
+        </p:nvSpPr>
+        <p:spPr>
+          <a:xfrm>
+            <a:off x="457200" y="3813048"/>
+            <a:ext cx="3931920" cy="640080"/>
+          </a:xfrm>
+          <a:prstGeom prst="roundRect">
+            <a:avLst>
+              <a:gd name="adj" fmla="val 11429"/>
+            </a:avLst>
+          </a:prstGeom>
+          <a:solidFill>
+            <a:schemeClr val="bg2"/>
+          </a:solidFill>
+          <a:ln/>
+        </p:spPr>
+      </p:sp>
+      <p:sp>
+        <p:nvSpPr>
+          <p:cNvPr id="18" name="Shape 16"/>
+          <p:cNvSpPr/>
+          <p:nvPr/>
+        </p:nvSpPr>
+        <p:spPr>
+          <a:xfrm>
+            <a:off x="594360" y="3968496"/>
+            <a:ext cx="329184" cy="329184"/>
+          </a:xfrm>
+          <a:prstGeom prst="ellipse">
+            <a:avLst/>
+          </a:prstGeom>
+          <a:solidFill>
+            <a:schemeClr val="accent3"/>
+          </a:solidFill>
+          <a:ln/>
+        </p:spPr>
+      </p:sp>
+      <p:sp>
+        <p:nvSpPr>
+          <p:cNvPr id="19" name="Text 17"/>
+          <p:cNvSpPr txBox="1"/>
+          <p:nvPr/>
+        </p:nvSpPr>
+        <p:spPr>
+          <a:xfrm>
+            <a:off x="594360" y="3968496"/>
+            <a:ext cx="329184" cy="329184"/>
+          </a:xfrm>
+          <a:prstGeom prst="rect">
+            <a:avLst/>
+          </a:prstGeom>
+          <a:noFill/>
+          <a:ln/>
+        </p:spPr>
+        <p:txBody>
+          <a:bodyPr wrap="square" lIns="0" tIns="0" rIns="0" bIns="0" rtlCol="0" anchor="ctr"/>
+          <a:lstStyle/>
+          <a:p>
+            <a:pPr algn="ctr" indent="0" marL="0">
+              <a:buNone/>
+            </a:pPr>
+            <a:r>
+              <a:rPr lang="en-US" sz="1500" b="1" dirty="0">
+                <a:solidFill>
+                  <a:schemeClr val="bg1"/>
+                </a:solidFill>
+              </a:rPr>
+              <a:t>!</a:t>
+            </a:r>
+            <a:endParaRPr lang="en-US" sz="1500" dirty="0"/>
+          </a:p>
+        </p:txBody>
+      </p:sp>
+      <p:sp>
+        <p:nvSpPr>
+          <p:cNvPr id="20" name="Text 18"/>
+          <p:cNvSpPr txBox="1"/>
+          <p:nvPr/>
+        </p:nvSpPr>
+        <p:spPr>
+          <a:xfrm>
+            <a:off x="1051560" y="3813048"/>
+            <a:ext cx="3246120" cy="640080"/>
+          </a:xfrm>
+          <a:prstGeom prst="rect">
+            <a:avLst/>
+          </a:prstGeom>
+          <a:noFill/>
+          <a:ln/>
+        </p:spPr>
+        <p:txBody>
+          <a:bodyPr wrap="square" lIns="0" tIns="0" rIns="0" bIns="0" rtlCol="0" anchor="ctr"/>
+          <a:lstStyle/>
+          <a:p>
+            <a:pPr indent="0" marL="0">
+              <a:buNone/>
+            </a:pPr>
+            <a:r>
+              <a:rPr lang="en-US" sz="1200" dirty="0">
+                <a:solidFill>
+                  <a:schemeClr val="tx1"/>
+                </a:solidFill>
+              </a:rPr>
+              <a:t>Token vault and session state reset on restart; the audit log persists</a:t>
+            </a:r>
+            <a:endParaRPr lang="en-US" sz="1200" dirty="0"/>
+          </a:p>
+        </p:txBody>
+      </p:sp>
+      <p:sp>
+        <p:nvSpPr>
+          <p:cNvPr id="21" name="next 1"/>
+          <p:cNvSpPr/>
+          <p:nvPr/>
+        </p:nvSpPr>
+        <p:spPr>
+          <a:xfrm>
+            <a:off x="4754880" y="1508760"/>
+            <a:ext cx="3931920" cy="640080"/>
+          </a:xfrm>
+          <a:prstGeom prst="roundRect">
+            <a:avLst>
+              <a:gd name="adj" fmla="val 11429"/>
+            </a:avLst>
+          </a:prstGeom>
+          <a:solidFill>
+            <a:schemeClr val="bg1"/>
+          </a:solidFill>
+          <a:ln w="15875">
+            <a:solidFill>
+              <a:schemeClr val="accent1"/>
+            </a:solidFill>
+            <a:prstDash val="dash"/>
+          </a:ln>
+        </p:spPr>
+      </p:sp>
+      <p:sp>
+        <p:nvSpPr>
+          <p:cNvPr id="22" name="Shape 20"/>
+          <p:cNvSpPr/>
+          <p:nvPr/>
+        </p:nvSpPr>
+        <p:spPr>
+          <a:xfrm>
+            <a:off x="4892040" y="1664208"/>
+            <a:ext cx="329184" cy="329184"/>
+          </a:xfrm>
+          <a:prstGeom prst="ellipse">
+            <a:avLst/>
+          </a:prstGeom>
+          <a:solidFill>
+            <a:schemeClr val="accent1"/>
           </a:solidFill>
           <a:ln/>
         </p:spPr>
       </p:sp>
       <p:pic>
         <p:nvPicPr>
-          <p:cNvPr id="5" name="Image 0" descr="preencoded.png">    </p:cNvPr>
+          <p:cNvPr id="23" name="Image 0" descr="preencoded.png">    </p:cNvPr>
           <p:cNvPicPr>
             <a:picLocks noChangeAspect="1"/>
           </p:cNvPicPr>
@@ -2861,8 +3121,8 @@
         </p:blipFill>
         <p:spPr>
           <a:xfrm>
-            <a:off x="777240" y="1554480"/>
-            <a:ext cx="274320" cy="274320"/>
+            <a:off x="4974336" y="1746504"/>
+            <a:ext cx="164592" cy="164592"/>
           </a:xfrm>
           <a:prstGeom prst="rect">
             <a:avLst/>
@@ -2871,85 +3131,126 @@
       </p:pic>
       <p:sp>
         <p:nvSpPr>
-          <p:cNvPr id="6" name="Text 3"/>
-          <p:cNvSpPr txBox="1"/>
-          <p:nvPr/>
-        </p:nvSpPr>
-        <p:spPr>
-          <a:xfrm>
-            <a:off x="640080" y="2103120"/>
-            <a:ext cx="1600200" cy="960120"/>
-          </a:xfrm>
-          <a:prstGeom prst="rect">
-            <a:avLst/>
-          </a:prstGeom>
-          <a:noFill/>
-          <a:ln/>
-        </p:spPr>
-        <p:txBody>
-          <a:bodyPr wrap="square" lIns="0" tIns="0" rIns="0" bIns="0" rtlCol="0" anchor="t"/>
+          <p:cNvPr id="24" name="Text 21"/>
+          <p:cNvSpPr txBox="1"/>
+          <p:nvPr/>
+        </p:nvSpPr>
+        <p:spPr>
+          <a:xfrm>
+            <a:off x="5349240" y="1508760"/>
+            <a:ext cx="2286000" cy="640080"/>
+          </a:xfrm>
+          <a:prstGeom prst="rect">
+            <a:avLst/>
+          </a:prstGeom>
+          <a:noFill/>
+          <a:ln/>
+        </p:spPr>
+        <p:txBody>
+          <a:bodyPr wrap="square" lIns="0" tIns="0" rIns="0" bIns="0" rtlCol="0" anchor="ctr"/>
           <a:lstStyle/>
           <a:p>
             <a:pPr indent="0" marL="0">
               <a:buNone/>
             </a:pPr>
             <a:r>
-              <a:rPr lang="en-US" sz="1500" dirty="0">
-                <a:solidFill>
-                  <a:schemeClr val="bg1"/>
-                </a:solidFill>
-              </a:rPr>
-              <a:t>The passport reached the sanctions check. Nowhere else.</a:t>
-            </a:r>
-            <a:endParaRPr lang="en-US" sz="1500" dirty="0"/>
-          </a:p>
-        </p:txBody>
-      </p:sp>
-      <p:sp>
-        <p:nvSpPr>
-          <p:cNvPr id="7" name="outcome 2"/>
-          <p:cNvSpPr/>
-          <p:nvPr/>
-        </p:nvSpPr>
-        <p:spPr>
-          <a:xfrm>
-            <a:off x="2560320" y="1234440"/>
-            <a:ext cx="1920240" cy="1920240"/>
+              <a:rPr lang="en-US" sz="1200" dirty="0">
+                <a:solidFill>
+                  <a:schemeClr val="tx1"/>
+                </a:solidFill>
+              </a:rPr>
+              <a:t>Human approvals bound to the exact arguments (four eyes)</a:t>
+            </a:r>
+            <a:endParaRPr lang="en-US" sz="1200" dirty="0"/>
+          </a:p>
+        </p:txBody>
+      </p:sp>
+      <p:sp>
+        <p:nvSpPr>
+          <p:cNvPr id="25" name="Text 22"/>
+          <p:cNvSpPr txBox="1"/>
+          <p:nvPr/>
+        </p:nvSpPr>
+        <p:spPr>
+          <a:xfrm>
+            <a:off x="7662672" y="1508760"/>
+            <a:ext cx="932688" cy="640080"/>
+          </a:xfrm>
+          <a:prstGeom prst="rect">
+            <a:avLst/>
+          </a:prstGeom>
+          <a:noFill/>
+          <a:ln/>
+        </p:spPr>
+        <p:txBody>
+          <a:bodyPr wrap="square" lIns="0" tIns="0" rIns="0" bIns="0" rtlCol="0" anchor="ctr"/>
+          <a:lstStyle/>
+          <a:p>
+            <a:pPr algn="r" indent="0" marL="0">
+              <a:buNone/>
+            </a:pPr>
+            <a:r>
+              <a:rPr lang="en-US" sz="1000" i="1" dirty="0">
+                <a:solidFill>
+                  <a:schemeClr val="accent5"/>
+                </a:solidFill>
+              </a:rPr>
+              <a:t>planned</a:t>
+            </a:r>
+            <a:endParaRPr lang="en-US" sz="1000" dirty="0"/>
+          </a:p>
+        </p:txBody>
+      </p:sp>
+      <p:sp>
+        <p:nvSpPr>
+          <p:cNvPr id="26" name="next 2"/>
+          <p:cNvSpPr/>
+          <p:nvPr/>
+        </p:nvSpPr>
+        <p:spPr>
+          <a:xfrm>
+            <a:off x="4754880" y="2276856"/>
+            <a:ext cx="3931920" cy="640080"/>
           </a:xfrm>
           <a:prstGeom prst="roundRect">
             <a:avLst>
-              <a:gd name="adj" fmla="val 5714"/>
+              <a:gd name="adj" fmla="val 11429"/>
             </a:avLst>
           </a:prstGeom>
           <a:solidFill>
-            <a:schemeClr val="tx2"/>
+            <a:schemeClr val="bg1"/>
           </a:solidFill>
-          <a:ln/>
-        </p:spPr>
-      </p:sp>
-      <p:sp>
-        <p:nvSpPr>
-          <p:cNvPr id="8" name="Shape 5"/>
-          <p:cNvSpPr/>
-          <p:nvPr/>
-        </p:nvSpPr>
-        <p:spPr>
-          <a:xfrm>
-            <a:off x="2743200" y="1417320"/>
-            <a:ext cx="548640" cy="548640"/>
+          <a:ln w="15875">
+            <a:solidFill>
+              <a:schemeClr val="accent1"/>
+            </a:solidFill>
+            <a:prstDash val="dash"/>
+          </a:ln>
+        </p:spPr>
+      </p:sp>
+      <p:sp>
+        <p:nvSpPr>
+          <p:cNvPr id="27" name="Shape 24"/>
+          <p:cNvSpPr/>
+          <p:nvPr/>
+        </p:nvSpPr>
+        <p:spPr>
+          <a:xfrm>
+            <a:off x="4892040" y="2432304"/>
+            <a:ext cx="329184" cy="329184"/>
           </a:xfrm>
           <a:prstGeom prst="ellipse">
             <a:avLst/>
           </a:prstGeom>
           <a:solidFill>
-            <a:schemeClr val="accent3"/>
+            <a:schemeClr val="accent1"/>
           </a:solidFill>
           <a:ln/>
         </p:spPr>
       </p:sp>
       <p:pic>
         <p:nvPicPr>
-          <p:cNvPr id="9" name="Image 1" descr="preencoded.png">    </p:cNvPr>
+          <p:cNvPr id="28" name="Image 1" descr="preencoded.png">    </p:cNvPr>
           <p:cNvPicPr>
             <a:picLocks noChangeAspect="1"/>
           </p:cNvPicPr>
@@ -2963,8 +3264,8 @@
         </p:blipFill>
         <p:spPr>
           <a:xfrm>
-            <a:off x="2880360" y="1554480"/>
-            <a:ext cx="274320" cy="274320"/>
+            <a:off x="4974336" y="2514600"/>
+            <a:ext cx="164592" cy="164592"/>
           </a:xfrm>
           <a:prstGeom prst="rect">
             <a:avLst/>
@@ -2973,85 +3274,126 @@
       </p:pic>
       <p:sp>
         <p:nvSpPr>
-          <p:cNvPr id="10" name="Text 6"/>
-          <p:cNvSpPr txBox="1"/>
-          <p:nvPr/>
-        </p:nvSpPr>
-        <p:spPr>
-          <a:xfrm>
-            <a:off x="2743200" y="2103120"/>
-            <a:ext cx="1600200" cy="960120"/>
-          </a:xfrm>
-          <a:prstGeom prst="rect">
-            <a:avLst/>
-          </a:prstGeom>
-          <a:noFill/>
-          <a:ln/>
-        </p:spPr>
-        <p:txBody>
-          <a:bodyPr wrap="square" lIns="0" tIns="0" rIns="0" bIns="0" rtlCol="0" anchor="t"/>
+          <p:cNvPr id="29" name="Text 25"/>
+          <p:cNvSpPr txBox="1"/>
+          <p:nvPr/>
+        </p:nvSpPr>
+        <p:spPr>
+          <a:xfrm>
+            <a:off x="5349240" y="2276856"/>
+            <a:ext cx="2286000" cy="640080"/>
+          </a:xfrm>
+          <a:prstGeom prst="rect">
+            <a:avLst/>
+          </a:prstGeom>
+          <a:noFill/>
+          <a:ln/>
+        </p:spPr>
+        <p:txBody>
+          <a:bodyPr wrap="square" lIns="0" tIns="0" rIns="0" bIns="0" rtlCol="0" anchor="ctr"/>
           <a:lstStyle/>
           <a:p>
             <a:pPr indent="0" marL="0">
               <a:buNone/>
             </a:pPr>
             <a:r>
-              <a:rPr lang="en-US" sz="1500" dirty="0">
-                <a:solidFill>
-                  <a:schemeClr val="bg1"/>
-                </a:solidFill>
-              </a:rPr>
-              <a:t>The hidden sentence was quarantined, not obeyed.</a:t>
-            </a:r>
-            <a:endParaRPr lang="en-US" sz="1500" dirty="0"/>
-          </a:p>
-        </p:txBody>
-      </p:sp>
-      <p:sp>
-        <p:nvSpPr>
-          <p:cNvPr id="11" name="outcome 3"/>
-          <p:cNvSpPr/>
-          <p:nvPr/>
-        </p:nvSpPr>
-        <p:spPr>
-          <a:xfrm>
-            <a:off x="4663440" y="1234440"/>
-            <a:ext cx="1920240" cy="1920240"/>
+              <a:rPr lang="en-US" sz="1200" dirty="0">
+                <a:solidFill>
+                  <a:schemeClr val="tx1"/>
+                </a:solidFill>
+              </a:rPr>
+              <a:t>Integrity per source: fewer false quarantines</a:t>
+            </a:r>
+            <a:endParaRPr lang="en-US" sz="1200" dirty="0"/>
+          </a:p>
+        </p:txBody>
+      </p:sp>
+      <p:sp>
+        <p:nvSpPr>
+          <p:cNvPr id="30" name="Text 26"/>
+          <p:cNvSpPr txBox="1"/>
+          <p:nvPr/>
+        </p:nvSpPr>
+        <p:spPr>
+          <a:xfrm>
+            <a:off x="7662672" y="2276856"/>
+            <a:ext cx="932688" cy="640080"/>
+          </a:xfrm>
+          <a:prstGeom prst="rect">
+            <a:avLst/>
+          </a:prstGeom>
+          <a:noFill/>
+          <a:ln/>
+        </p:spPr>
+        <p:txBody>
+          <a:bodyPr wrap="square" lIns="0" tIns="0" rIns="0" bIns="0" rtlCol="0" anchor="ctr"/>
+          <a:lstStyle/>
+          <a:p>
+            <a:pPr algn="r" indent="0" marL="0">
+              <a:buNone/>
+            </a:pPr>
+            <a:r>
+              <a:rPr lang="en-US" sz="1000" i="1" dirty="0">
+                <a:solidFill>
+                  <a:schemeClr val="accent5"/>
+                </a:solidFill>
+              </a:rPr>
+              <a:t>in progress</a:t>
+            </a:r>
+            <a:endParaRPr lang="en-US" sz="1000" dirty="0"/>
+          </a:p>
+        </p:txBody>
+      </p:sp>
+      <p:sp>
+        <p:nvSpPr>
+          <p:cNvPr id="31" name="next 3"/>
+          <p:cNvSpPr/>
+          <p:nvPr/>
+        </p:nvSpPr>
+        <p:spPr>
+          <a:xfrm>
+            <a:off x="4754880" y="3044952"/>
+            <a:ext cx="3931920" cy="640080"/>
           </a:xfrm>
           <a:prstGeom prst="roundRect">
             <a:avLst>
-              <a:gd name="adj" fmla="val 5714"/>
+              <a:gd name="adj" fmla="val 11429"/>
             </a:avLst>
           </a:prstGeom>
           <a:solidFill>
-            <a:schemeClr val="tx2"/>
+            <a:schemeClr val="bg1"/>
           </a:solidFill>
-          <a:ln/>
-        </p:spPr>
-      </p:sp>
-      <p:sp>
-        <p:nvSpPr>
-          <p:cNvPr id="12" name="Shape 8"/>
-          <p:cNvSpPr/>
-          <p:nvPr/>
-        </p:nvSpPr>
-        <p:spPr>
-          <a:xfrm>
-            <a:off x="4846320" y="1417320"/>
-            <a:ext cx="548640" cy="548640"/>
+          <a:ln w="15875">
+            <a:solidFill>
+              <a:schemeClr val="accent1"/>
+            </a:solidFill>
+            <a:prstDash val="dash"/>
+          </a:ln>
+        </p:spPr>
+      </p:sp>
+      <p:sp>
+        <p:nvSpPr>
+          <p:cNvPr id="32" name="Shape 28"/>
+          <p:cNvSpPr/>
+          <p:nvPr/>
+        </p:nvSpPr>
+        <p:spPr>
+          <a:xfrm>
+            <a:off x="4892040" y="3200400"/>
+            <a:ext cx="329184" cy="329184"/>
           </a:xfrm>
           <a:prstGeom prst="ellipse">
             <a:avLst/>
           </a:prstGeom>
           <a:solidFill>
-            <a:schemeClr val="accent2"/>
+            <a:schemeClr val="accent1"/>
           </a:solidFill>
           <a:ln/>
         </p:spPr>
       </p:sp>
       <p:pic>
         <p:nvPicPr>
-          <p:cNvPr id="13" name="Image 2" descr="preencoded.png">    </p:cNvPr>
+          <p:cNvPr id="33" name="Image 2" descr="preencoded.png">    </p:cNvPr>
           <p:cNvPicPr>
             <a:picLocks noChangeAspect="1"/>
           </p:cNvPicPr>
@@ -3065,8 +3407,8 @@
         </p:blipFill>
         <p:spPr>
           <a:xfrm>
-            <a:off x="4983480" y="1554480"/>
-            <a:ext cx="274320" cy="274320"/>
+            <a:off x="4974336" y="3282696"/>
+            <a:ext cx="164592" cy="164592"/>
           </a:xfrm>
           <a:prstGeom prst="rect">
             <a:avLst/>
@@ -3075,85 +3417,126 @@
       </p:pic>
       <p:sp>
         <p:nvSpPr>
-          <p:cNvPr id="14" name="Text 9"/>
-          <p:cNvSpPr txBox="1"/>
-          <p:nvPr/>
-        </p:nvSpPr>
-        <p:spPr>
-          <a:xfrm>
-            <a:off x="4846320" y="2103120"/>
-            <a:ext cx="1600200" cy="960120"/>
-          </a:xfrm>
-          <a:prstGeom prst="rect">
-            <a:avLst/>
-          </a:prstGeom>
-          <a:noFill/>
-          <a:ln/>
-        </p:spPr>
-        <p:txBody>
-          <a:bodyPr wrap="square" lIns="0" tIns="0" rIns="0" bIns="0" rtlCol="0" anchor="t"/>
+          <p:cNvPr id="34" name="Text 29"/>
+          <p:cNvSpPr txBox="1"/>
+          <p:nvPr/>
+        </p:nvSpPr>
+        <p:spPr>
+          <a:xfrm>
+            <a:off x="5349240" y="3044952"/>
+            <a:ext cx="2286000" cy="640080"/>
+          </a:xfrm>
+          <a:prstGeom prst="rect">
+            <a:avLst/>
+          </a:prstGeom>
+          <a:noFill/>
+          <a:ln/>
+        </p:spPr>
+        <p:txBody>
+          <a:bodyPr wrap="square" lIns="0" tIns="0" rIns="0" bIns="0" rtlCol="0" anchor="ctr"/>
           <a:lstStyle/>
           <a:p>
             <a:pPr indent="0" marL="0">
               <a:buNone/>
             </a:pPr>
             <a:r>
-              <a:rPr lang="en-US" sz="1500" dirty="0">
-                <a:solidFill>
-                  <a:schemeClr val="bg1"/>
-                </a:solidFill>
-              </a:rPr>
-              <a:t>Project Falcon stayed behind the wall.</a:t>
-            </a:r>
-            <a:endParaRPr lang="en-US" sz="1500" dirty="0"/>
-          </a:p>
-        </p:txBody>
-      </p:sp>
-      <p:sp>
-        <p:nvSpPr>
-          <p:cNvPr id="15" name="outcome 4"/>
-          <p:cNvSpPr/>
-          <p:nvPr/>
-        </p:nvSpPr>
-        <p:spPr>
-          <a:xfrm>
-            <a:off x="6766560" y="1234440"/>
-            <a:ext cx="1920240" cy="1920240"/>
+              <a:rPr lang="en-US" sz="1200" dirty="0">
+                <a:solidFill>
+                  <a:schemeClr val="tx1"/>
+                </a:solidFill>
+              </a:rPr>
+              <a:t>Leak fingerprints for registered documents</a:t>
+            </a:r>
+            <a:endParaRPr lang="en-US" sz="1200" dirty="0"/>
+          </a:p>
+        </p:txBody>
+      </p:sp>
+      <p:sp>
+        <p:nvSpPr>
+          <p:cNvPr id="35" name="Text 30"/>
+          <p:cNvSpPr txBox="1"/>
+          <p:nvPr/>
+        </p:nvSpPr>
+        <p:spPr>
+          <a:xfrm>
+            <a:off x="7662672" y="3044952"/>
+            <a:ext cx="932688" cy="640080"/>
+          </a:xfrm>
+          <a:prstGeom prst="rect">
+            <a:avLst/>
+          </a:prstGeom>
+          <a:noFill/>
+          <a:ln/>
+        </p:spPr>
+        <p:txBody>
+          <a:bodyPr wrap="square" lIns="0" tIns="0" rIns="0" bIns="0" rtlCol="0" anchor="ctr"/>
+          <a:lstStyle/>
+          <a:p>
+            <a:pPr algn="r" indent="0" marL="0">
+              <a:buNone/>
+            </a:pPr>
+            <a:r>
+              <a:rPr lang="en-US" sz="1000" i="1" dirty="0">
+                <a:solidFill>
+                  <a:schemeClr val="accent5"/>
+                </a:solidFill>
+              </a:rPr>
+              <a:t>experimental</a:t>
+            </a:r>
+            <a:endParaRPr lang="en-US" sz="1000" dirty="0"/>
+          </a:p>
+        </p:txBody>
+      </p:sp>
+      <p:sp>
+        <p:nvSpPr>
+          <p:cNvPr id="36" name="next 4"/>
+          <p:cNvSpPr/>
+          <p:nvPr/>
+        </p:nvSpPr>
+        <p:spPr>
+          <a:xfrm>
+            <a:off x="4754880" y="3813048"/>
+            <a:ext cx="3931920" cy="640080"/>
           </a:xfrm>
           <a:prstGeom prst="roundRect">
             <a:avLst>
-              <a:gd name="adj" fmla="val 5714"/>
+              <a:gd name="adj" fmla="val 11429"/>
             </a:avLst>
           </a:prstGeom>
           <a:solidFill>
-            <a:schemeClr val="tx2"/>
+            <a:schemeClr val="bg1"/>
           </a:solidFill>
-          <a:ln/>
-        </p:spPr>
-      </p:sp>
-      <p:sp>
-        <p:nvSpPr>
-          <p:cNvPr id="16" name="Shape 11"/>
-          <p:cNvSpPr/>
-          <p:nvPr/>
-        </p:nvSpPr>
-        <p:spPr>
-          <a:xfrm>
-            <a:off x="6949440" y="1417320"/>
-            <a:ext cx="548640" cy="548640"/>
+          <a:ln w="15875">
+            <a:solidFill>
+              <a:schemeClr val="accent1"/>
+            </a:solidFill>
+            <a:prstDash val="dash"/>
+          </a:ln>
+        </p:spPr>
+      </p:sp>
+      <p:sp>
+        <p:nvSpPr>
+          <p:cNvPr id="37" name="Shape 32"/>
+          <p:cNvSpPr/>
+          <p:nvPr/>
+        </p:nvSpPr>
+        <p:spPr>
+          <a:xfrm>
+            <a:off x="4892040" y="3968496"/>
+            <a:ext cx="329184" cy="329184"/>
           </a:xfrm>
           <a:prstGeom prst="ellipse">
             <a:avLst/>
           </a:prstGeom>
           <a:solidFill>
-            <a:schemeClr val="accent2"/>
+            <a:schemeClr val="accent1"/>
           </a:solidFill>
           <a:ln/>
         </p:spPr>
       </p:sp>
       <p:pic>
         <p:nvPicPr>
-          <p:cNvPr id="17" name="Image 3" descr="preencoded.png">    </p:cNvPr>
+          <p:cNvPr id="38" name="Image 3" descr="preencoded.png">    </p:cNvPr>
           <p:cNvPicPr>
             <a:picLocks noChangeAspect="1"/>
           </p:cNvPicPr>
@@ -3167,8 +3550,8 @@
         </p:blipFill>
         <p:spPr>
           <a:xfrm>
-            <a:off x="7086600" y="1554480"/>
-            <a:ext cx="274320" cy="274320"/>
+            <a:off x="4974336" y="4050792"/>
+            <a:ext cx="164592" cy="164592"/>
           </a:xfrm>
           <a:prstGeom prst="rect">
             <a:avLst/>
@@ -3177,50 +3560,50 @@
       </p:pic>
       <p:sp>
         <p:nvSpPr>
-          <p:cNvPr id="18" name="Text 12"/>
-          <p:cNvSpPr txBox="1"/>
-          <p:nvPr/>
-        </p:nvSpPr>
-        <p:spPr>
-          <a:xfrm>
-            <a:off x="6949440" y="2103120"/>
-            <a:ext cx="1600200" cy="960120"/>
-          </a:xfrm>
-          <a:prstGeom prst="rect">
-            <a:avLst/>
-          </a:prstGeom>
-          <a:noFill/>
-          <a:ln/>
-        </p:spPr>
-        <p:txBody>
-          <a:bodyPr wrap="square" lIns="0" tIns="0" rIns="0" bIns="0" rtlCol="0" anchor="t"/>
+          <p:cNvPr id="39" name="Text 33"/>
+          <p:cNvSpPr txBox="1"/>
+          <p:nvPr/>
+        </p:nvSpPr>
+        <p:spPr>
+          <a:xfrm>
+            <a:off x="5349240" y="3813048"/>
+            <a:ext cx="2286000" cy="640080"/>
+          </a:xfrm>
+          <a:prstGeom prst="rect">
+            <a:avLst/>
+          </a:prstGeom>
+          <a:noFill/>
+          <a:ln/>
+        </p:spPr>
+        <p:txBody>
+          <a:bodyPr wrap="square" lIns="0" tIns="0" rIns="0" bIns="0" rtlCol="0" anchor="ctr"/>
           <a:lstStyle/>
           <a:p>
             <a:pPr indent="0" marL="0">
               <a:buNone/>
             </a:pPr>
             <a:r>
-              <a:rPr lang="en-US" sz="1500" dirty="0">
-                <a:solidFill>
-                  <a:schemeClr val="bg1"/>
-                </a:solidFill>
-              </a:rPr>
-              <a:t>Every step sits in a tamper-evident log.</a:t>
-            </a:r>
-            <a:endParaRPr lang="en-US" sz="1500" dirty="0"/>
-          </a:p>
-        </p:txBody>
-      </p:sp>
-      <p:sp>
-        <p:nvSpPr>
-          <p:cNvPr id="19" name="Text 13"/>
-          <p:cNvSpPr txBox="1"/>
-          <p:nvPr/>
-        </p:nvSpPr>
-        <p:spPr>
-          <a:xfrm>
-            <a:off x="457200" y="3337560"/>
-            <a:ext cx="8229600" cy="594360"/>
+              <a:rPr lang="en-US" sz="1200" dirty="0">
+                <a:solidFill>
+                  <a:schemeClr val="tx1"/>
+                </a:solidFill>
+              </a:rPr>
+              <a:t>More adapters (Codex) and signed requests</a:t>
+            </a:r>
+            <a:endParaRPr lang="en-US" sz="1200" dirty="0"/>
+          </a:p>
+        </p:txBody>
+      </p:sp>
+      <p:sp>
+        <p:nvSpPr>
+          <p:cNvPr id="40" name="Text 34"/>
+          <p:cNvSpPr txBox="1"/>
+          <p:nvPr/>
+        </p:nvSpPr>
+        <p:spPr>
+          <a:xfrm>
+            <a:off x="7662672" y="3813048"/>
+            <a:ext cx="932688" cy="640080"/>
           </a:xfrm>
           <a:prstGeom prst="rect">
             <a:avLst/>
@@ -3232,57 +3615,18 @@
           <a:bodyPr wrap="square" lIns="0" tIns="0" rIns="0" bIns="0" rtlCol="0" anchor="ctr"/>
           <a:lstStyle/>
           <a:p>
-            <a:pPr algn="ctr" indent="0" marL="0">
-              <a:buNone/>
-            </a:pPr>
-            <a:r>
-              <a:rPr lang="en-US" sz="2800" b="1" dirty="0">
-                <a:solidFill>
-                  <a:schemeClr val="accent1"/>
-                </a:solidFill>
-                <a:latin typeface="Cambria" pitchFamily="34" charset="0"/>
-                <a:ea typeface="Cambria" pitchFamily="34" charset="-122"/>
-                <a:cs typeface="Cambria" pitchFamily="34" charset="-120"/>
-              </a:rPr>
-              <a:t>Don't trust the agent. Trust the flow.</a:t>
-            </a:r>
-            <a:endParaRPr lang="en-US" sz="2800" dirty="0"/>
-          </a:p>
-        </p:txBody>
-      </p:sp>
-      <p:sp>
-        <p:nvSpPr>
-          <p:cNvPr id="20" name="Text 14"/>
-          <p:cNvSpPr txBox="1"/>
-          <p:nvPr/>
-        </p:nvSpPr>
-        <p:spPr>
-          <a:xfrm>
-            <a:off x="457200" y="4023360"/>
-            <a:ext cx="8229600" cy="365760"/>
-          </a:xfrm>
-          <a:prstGeom prst="rect">
-            <a:avLst/>
-          </a:prstGeom>
-          <a:noFill/>
-          <a:ln/>
-        </p:spPr>
-        <p:txBody>
-          <a:bodyPr wrap="square" lIns="0" tIns="0" rIns="0" bIns="0" rtlCol="0" anchor="ctr"/>
-          <a:lstStyle/>
-          <a:p>
-            <a:pPr algn="ctr" indent="0" marL="0">
-              <a:buNone/>
-            </a:pPr>
-            <a:r>
-              <a:rPr lang="en-US" sz="1600" dirty="0">
-                <a:solidFill>
-                  <a:schemeClr val="bg2"/>
-                </a:solidFill>
-              </a:rPr>
-              <a:t>The policy file is open. Try to break it.</a:t>
-            </a:r>
-            <a:endParaRPr lang="en-US" sz="1600" dirty="0"/>
+            <a:pPr algn="r" indent="0" marL="0">
+              <a:buNone/>
+            </a:pPr>
+            <a:r>
+              <a:rPr lang="en-US" sz="1000" i="1" dirty="0">
+                <a:solidFill>
+                  <a:schemeClr val="accent5"/>
+                </a:solidFill>
+              </a:rPr>
+              <a:t>planned</a:t>
+            </a:r>
+            <a:endParaRPr lang="en-US" sz="1000" dirty="0"/>
           </a:p>
         </p:txBody>
       </p:sp>
@@ -6405,7 +6749,7 @@
                 <a:ea typeface="Cambria" pitchFamily="34" charset="-122"/>
                 <a:cs typeface="Cambria" pitchFamily="34" charset="-120"/>
               </a:rPr>
-              <a:t>One engine, every door</a:t>
+              <a:t>Every action crosses three checkpoints</a:t>
             </a:r>
             <a:endParaRPr lang="en-US" sz="2800" dirty="0"/>
           </a:p>
@@ -6419,8 +6763,8 @@
         </p:nvSpPr>
         <p:spPr>
           <a:xfrm>
-            <a:off x="457200" y="1097280"/>
-            <a:ext cx="1645920" cy="228600"/>
+            <a:off x="457200" y="896112"/>
+            <a:ext cx="8229600" cy="228600"/>
           </a:xfrm>
           <a:prstGeom prst="rect">
             <a:avLst/>
@@ -6432,66 +6776,179 @@
           <a:bodyPr wrap="square" lIns="0" tIns="0" rIns="0" bIns="0" rtlCol="0" anchor="ctr"/>
           <a:lstStyle/>
           <a:p>
-            <a:pPr algn="l" indent="0" marL="0">
-              <a:buNone/>
-            </a:pPr>
-            <a:r>
-              <a:rPr lang="en-US" sz="1000" b="1" spc="200" kern="0" dirty="0">
+            <a:pPr indent="0" marL="0">
+              <a:buNone/>
+            </a:pPr>
+            <a:r>
+              <a:rPr lang="en-US" sz="1200" dirty="0">
                 <a:solidFill>
                   <a:schemeClr val="accent5"/>
                 </a:solidFill>
               </a:rPr>
-              <a:t>AGENTS</a:t>
-            </a:r>
-            <a:endParaRPr lang="en-US" sz="1000" dirty="0"/>
-          </a:p>
-        </p:txBody>
-      </p:sp>
-      <p:sp>
-        <p:nvSpPr>
-          <p:cNvPr id="4" name="agent Bank agents"/>
+              <a:t>Don't trust the agent. Trust the flow. One gateway, one policy, every decision on record.</a:t>
+            </a:r>
+            <a:endParaRPr lang="en-US" sz="1200" dirty="0"/>
+          </a:p>
+        </p:txBody>
+      </p:sp>
+      <p:sp>
+        <p:nvSpPr>
+          <p:cNvPr id="4" name="Shape 2"/>
+          <p:cNvSpPr/>
+          <p:nvPr/>
+        </p:nvSpPr>
+        <p:spPr>
+          <a:xfrm>
+            <a:off x="7827264" y="1243584"/>
+            <a:ext cx="914" cy="128016"/>
+          </a:xfrm>
+          <a:prstGeom prst="line">
+            <a:avLst/>
+          </a:prstGeom>
+          <a:noFill/>
+          <a:ln w="15875">
+            <a:solidFill>
+              <a:schemeClr val="accent4"/>
+            </a:solidFill>
+            <a:prstDash val="dash"/>
+          </a:ln>
+        </p:spPr>
+      </p:sp>
+      <p:sp>
+        <p:nvSpPr>
+          <p:cNvPr id="5" name="Shape 3"/>
+          <p:cNvSpPr/>
+          <p:nvPr/>
+        </p:nvSpPr>
+        <p:spPr>
+          <a:xfrm>
+            <a:off x="2770632" y="1243584"/>
+            <a:ext cx="5056632" cy="914"/>
+          </a:xfrm>
+          <a:prstGeom prst="line">
+            <a:avLst/>
+          </a:prstGeom>
+          <a:noFill/>
+          <a:ln w="15875">
+            <a:solidFill>
+              <a:schemeClr val="accent4"/>
+            </a:solidFill>
+            <a:prstDash val="dash"/>
+          </a:ln>
+        </p:spPr>
+      </p:sp>
+      <p:sp>
+        <p:nvSpPr>
+          <p:cNvPr id="6" name="Shape 4"/>
+          <p:cNvSpPr/>
+          <p:nvPr/>
+        </p:nvSpPr>
+        <p:spPr>
+          <a:xfrm>
+            <a:off x="2770632" y="1243584"/>
+            <a:ext cx="914" cy="118872"/>
+          </a:xfrm>
+          <a:prstGeom prst="line">
+            <a:avLst/>
+          </a:prstGeom>
+          <a:noFill/>
+          <a:ln w="15875">
+            <a:solidFill>
+              <a:schemeClr val="accent4"/>
+            </a:solidFill>
+            <a:prstDash val="dash"/>
+            <a:tailEnd type="triangle"/>
+          </a:ln>
+        </p:spPr>
+      </p:sp>
+      <p:sp>
+        <p:nvSpPr>
+          <p:cNvPr id="7" name="Text 5"/>
+          <p:cNvSpPr txBox="1"/>
+          <p:nvPr/>
+        </p:nvSpPr>
+        <p:spPr>
+          <a:xfrm>
+            <a:off x="3063240" y="1152144"/>
+            <a:ext cx="4572000" cy="182880"/>
+          </a:xfrm>
+          <a:prstGeom prst="rect">
+            <a:avLst/>
+          </a:prstGeom>
+          <a:solidFill>
+            <a:schemeClr val="bg1"/>
+          </a:solidFill>
+          <a:ln/>
+        </p:spPr>
+        <p:txBody>
+          <a:bodyPr wrap="square" lIns="0" tIns="0" rIns="0" bIns="0" rtlCol="0" anchor="ctr"/>
+          <a:lstStyle/>
+          <a:p>
+            <a:pPr algn="ctr" indent="0" marL="0">
+              <a:buNone/>
+            </a:pPr>
+            <a:r>
+              <a:rPr lang="en-US" sz="900" dirty="0">
+                <a:solidFill>
+                  <a:schemeClr val="accent4"/>
+                </a:solidFill>
+              </a:rPr>
+              <a:t>Tool results return through checkpoint 1: tokenized, injections quarantined</a:t>
+            </a:r>
+            <a:endParaRPr lang="en-US" sz="900" dirty="0"/>
+          </a:p>
+        </p:txBody>
+      </p:sp>
+      <p:sp>
+        <p:nvSpPr>
+          <p:cNvPr id="8" name="AI agent"/>
           <p:cNvSpPr/>
           <p:nvPr/>
         </p:nvSpPr>
         <p:spPr>
           <a:xfrm>
             <a:off x="457200" y="1371600"/>
-            <a:ext cx="1645920" cy="685800"/>
+            <a:ext cx="1234440" cy="1353312"/>
           </a:xfrm>
           <a:prstGeom prst="roundRect">
             <a:avLst>
-              <a:gd name="adj" fmla="val 13333"/>
+              <a:gd name="adj" fmla="val 5926"/>
             </a:avLst>
           </a:prstGeom>
           <a:solidFill>
-            <a:schemeClr val="bg2"/>
+            <a:schemeClr val="bg1"/>
           </a:solidFill>
-          <a:ln/>
-        </p:spPr>
-      </p:sp>
-      <p:sp>
-        <p:nvSpPr>
-          <p:cNvPr id="5" name="Shape 3"/>
-          <p:cNvSpPr/>
-          <p:nvPr/>
-        </p:nvSpPr>
-        <p:spPr>
-          <a:xfrm>
-            <a:off x="566928" y="1508760"/>
-            <a:ext cx="411480" cy="411480"/>
+          <a:ln w="12700">
+            <a:solidFill>
+              <a:srgbClr val="C9D2DF"/>
+            </a:solidFill>
+            <a:prstDash val="solid"/>
+          </a:ln>
+        </p:spPr>
+      </p:sp>
+      <p:sp>
+        <p:nvSpPr>
+          <p:cNvPr id="9" name="Shape 7"/>
+          <p:cNvSpPr/>
+          <p:nvPr/>
+        </p:nvSpPr>
+        <p:spPr>
+          <a:xfrm>
+            <a:off x="548640" y="1463040"/>
+            <a:ext cx="256032" cy="256032"/>
           </a:xfrm>
           <a:prstGeom prst="ellipse">
             <a:avLst/>
           </a:prstGeom>
           <a:solidFill>
-            <a:schemeClr val="tx2"/>
+            <a:schemeClr val="tx1"/>
           </a:solidFill>
           <a:ln/>
         </p:spPr>
       </p:sp>
       <p:pic>
         <p:nvPicPr>
-          <p:cNvPr id="6" name="Image 0" descr="preencoded.png">    </p:cNvPr>
+          <p:cNvPr id="10" name="Image 0" descr="preencoded.png">    </p:cNvPr>
           <p:cNvPicPr>
             <a:picLocks noChangeAspect="1"/>
           </p:cNvPicPr>
@@ -6505,8 +6962,8 @@
         </p:blipFill>
         <p:spPr>
           <a:xfrm>
-            <a:off x="669798" y="1611630"/>
-            <a:ext cx="205740" cy="205740"/>
+            <a:off x="612648" y="1527048"/>
+            <a:ext cx="128016" cy="128016"/>
           </a:xfrm>
           <a:prstGeom prst="rect">
             <a:avLst/>
@@ -6515,14 +6972,14 @@
       </p:pic>
       <p:sp>
         <p:nvSpPr>
-          <p:cNvPr id="7" name="Text 4"/>
-          <p:cNvSpPr txBox="1"/>
-          <p:nvPr/>
-        </p:nvSpPr>
-        <p:spPr>
-          <a:xfrm>
-            <a:off x="1051560" y="1371600"/>
-            <a:ext cx="1005840" cy="685800"/>
+          <p:cNvPr id="11" name="Text 8"/>
+          <p:cNvSpPr txBox="1"/>
+          <p:nvPr/>
+        </p:nvSpPr>
+        <p:spPr>
+          <a:xfrm>
+            <a:off x="868680" y="1444752"/>
+            <a:ext cx="777240" cy="274320"/>
           </a:xfrm>
           <a:prstGeom prst="rect">
             <a:avLst/>
@@ -6538,27 +6995,1270 @@
               <a:buNone/>
             </a:pPr>
             <a:r>
-              <a:rPr lang="en-US" sz="1400" b="1" dirty="0">
+              <a:rPr lang="en-US" sz="1050" b="1" dirty="0">
                 <a:solidFill>
                   <a:schemeClr val="tx1"/>
                 </a:solidFill>
               </a:rPr>
-              <a:t>Bank agents</a:t>
-            </a:r>
-            <a:endParaRPr lang="en-US" sz="1400" dirty="0"/>
-          </a:p>
-        </p:txBody>
-      </p:sp>
-      <p:sp>
-        <p:nvSpPr>
-          <p:cNvPr id="8" name="Shape 5"/>
-          <p:cNvSpPr/>
-          <p:nvPr/>
-        </p:nvSpPr>
-        <p:spPr>
-          <a:xfrm>
-            <a:off x="2121408" y="1714500"/>
-            <a:ext cx="329184" cy="914"/>
+              <a:t>AI agent</a:t>
+            </a:r>
+            <a:endParaRPr lang="en-US" sz="1050" dirty="0"/>
+          </a:p>
+        </p:txBody>
+      </p:sp>
+      <p:sp>
+        <p:nvSpPr>
+          <p:cNvPr id="12" name="Text 9"/>
+          <p:cNvSpPr txBox="1"/>
+          <p:nvPr/>
+        </p:nvSpPr>
+        <p:spPr>
+          <a:xfrm>
+            <a:off x="548640" y="1810512"/>
+            <a:ext cx="1078992" cy="868680"/>
+          </a:xfrm>
+          <a:prstGeom prst="rect">
+            <a:avLst/>
+          </a:prstGeom>
+          <a:noFill/>
+          <a:ln/>
+        </p:spPr>
+        <p:txBody>
+          <a:bodyPr wrap="square" lIns="0" tIns="0" rIns="0" bIns="0" rtlCol="0" anchor="t"/>
+          <a:lstStyle/>
+          <a:p>
+            <a:pPr indent="0" marL="0">
+              <a:spcAft>
+                <a:spcPts val="400"/>
+              </a:spcAft>
+              <a:buNone/>
+            </a:pPr>
+            <a:r>
+              <a:rPr lang="en-US" sz="900" dirty="0">
+                <a:solidFill>
+                  <a:schemeClr val="tx2"/>
+                </a:solidFill>
+              </a:rPr>
+              <a:t>Claude Code or any OpenAI-style agent</a:t>
+            </a:r>
+            <a:endParaRPr lang="en-US" sz="900" dirty="0"/>
+          </a:p>
+          <a:p>
+            <a:pPr indent="0" marL="0">
+              <a:spcAft>
+                <a:spcPts val="400"/>
+              </a:spcAft>
+              <a:buNone/>
+            </a:pPr>
+            <a:r>
+              <a:rPr lang="en-US" sz="900" dirty="0">
+                <a:solidFill>
+                  <a:schemeClr val="tx2"/>
+                </a:solidFill>
+              </a:rPr>
+              <a:t>One API key per user + agent, with a stated purpose</a:t>
+            </a:r>
+            <a:endParaRPr lang="en-US" sz="900" dirty="0"/>
+          </a:p>
+        </p:txBody>
+      </p:sp>
+      <p:sp>
+        <p:nvSpPr>
+          <p:cNvPr id="13" name="example"/>
+          <p:cNvSpPr/>
+          <p:nvPr/>
+        </p:nvSpPr>
+        <p:spPr>
+          <a:xfrm>
+            <a:off x="457200" y="2807208"/>
+            <a:ext cx="1234440" cy="868680"/>
+          </a:xfrm>
+          <a:prstGeom prst="roundRect">
+            <a:avLst>
+              <a:gd name="adj" fmla="val 8421"/>
+            </a:avLst>
+          </a:prstGeom>
+          <a:solidFill>
+            <a:schemeClr val="bg2"/>
+          </a:solidFill>
+          <a:ln/>
+        </p:spPr>
+      </p:sp>
+      <p:sp>
+        <p:nvSpPr>
+          <p:cNvPr id="14" name="Text 11"/>
+          <p:cNvSpPr txBox="1"/>
+          <p:nvPr/>
+        </p:nvSpPr>
+        <p:spPr>
+          <a:xfrm>
+            <a:off x="548640" y="2852928"/>
+            <a:ext cx="1051560" cy="146304"/>
+          </a:xfrm>
+          <a:prstGeom prst="rect">
+            <a:avLst/>
+          </a:prstGeom>
+          <a:noFill/>
+          <a:ln/>
+        </p:spPr>
+        <p:txBody>
+          <a:bodyPr wrap="square" lIns="0" tIns="0" rIns="0" bIns="0" rtlCol="0" anchor="ctr"/>
+          <a:lstStyle/>
+          <a:p>
+            <a:pPr indent="0" marL="0">
+              <a:buNone/>
+            </a:pPr>
+            <a:r>
+              <a:rPr lang="en-US" sz="800" b="1" spc="200" kern="0" dirty="0">
+                <a:solidFill>
+                  <a:schemeClr val="accent5"/>
+                </a:solidFill>
+              </a:rPr>
+              <a:t>EXAMPLE</a:t>
+            </a:r>
+            <a:endParaRPr lang="en-US" sz="800" dirty="0"/>
+          </a:p>
+        </p:txBody>
+      </p:sp>
+      <p:sp>
+        <p:nvSpPr>
+          <p:cNvPr id="15" name="Text 12"/>
+          <p:cNvSpPr txBox="1"/>
+          <p:nvPr/>
+        </p:nvSpPr>
+        <p:spPr>
+          <a:xfrm>
+            <a:off x="548640" y="3008376"/>
+            <a:ext cx="1078992" cy="438912"/>
+          </a:xfrm>
+          <a:prstGeom prst="rect">
+            <a:avLst/>
+          </a:prstGeom>
+          <a:noFill/>
+          <a:ln/>
+        </p:spPr>
+        <p:txBody>
+          <a:bodyPr wrap="square" lIns="0" tIns="0" rIns="0" bIns="0" rtlCol="0" anchor="t"/>
+          <a:lstStyle/>
+          <a:p>
+            <a:pPr indent="0" marL="0">
+              <a:buNone/>
+            </a:pPr>
+            <a:r>
+              <a:rPr lang="en-US" sz="900" i="1" dirty="0">
+                <a:solidFill>
+                  <a:schemeClr val="tx2"/>
+                </a:solidFill>
+              </a:rPr>
+              <a:t>“Prepare the onboarding file for client NW-2041.”</a:t>
+            </a:r>
+            <a:endParaRPr lang="en-US" sz="900" dirty="0"/>
+          </a:p>
+        </p:txBody>
+      </p:sp>
+      <p:sp>
+        <p:nvSpPr>
+          <p:cNvPr id="16" name="Text 13"/>
+          <p:cNvSpPr txBox="1"/>
+          <p:nvPr/>
+        </p:nvSpPr>
+        <p:spPr>
+          <a:xfrm>
+            <a:off x="548640" y="3447288"/>
+            <a:ext cx="1124712" cy="201168"/>
+          </a:xfrm>
+          <a:prstGeom prst="rect">
+            <a:avLst/>
+          </a:prstGeom>
+          <a:noFill/>
+          <a:ln/>
+        </p:spPr>
+        <p:txBody>
+          <a:bodyPr wrap="square" lIns="0" tIns="0" rIns="0" bIns="0" rtlCol="0" anchor="ctr"/>
+          <a:lstStyle/>
+          <a:p>
+            <a:pPr indent="0" marL="0">
+              <a:buNone/>
+            </a:pPr>
+            <a:r>
+              <a:rPr lang="en-US" sz="800" dirty="0">
+                <a:solidFill>
+                  <a:schemeClr val="accent5"/>
+                </a:solidFill>
+              </a:rPr>
+              <a:t>olivia · onboarding analyst</a:t>
+            </a:r>
+            <a:endParaRPr lang="en-US" sz="800" dirty="0"/>
+          </a:p>
+        </p:txBody>
+      </p:sp>
+      <p:sp>
+        <p:nvSpPr>
+          <p:cNvPr id="17" name="checkpoint 1"/>
+          <p:cNvSpPr/>
+          <p:nvPr/>
+        </p:nvSpPr>
+        <p:spPr>
+          <a:xfrm>
+            <a:off x="1810512" y="1371600"/>
+            <a:ext cx="1920240" cy="2057400"/>
+          </a:xfrm>
+          <a:prstGeom prst="roundRect">
+            <a:avLst>
+              <a:gd name="adj" fmla="val 3810"/>
+            </a:avLst>
+          </a:prstGeom>
+          <a:solidFill>
+            <a:schemeClr val="accent4">
+              <a:alpha val="10000"/>
+            </a:schemeClr>
+          </a:solidFill>
+          <a:ln w="19050">
+            <a:solidFill>
+              <a:schemeClr val="accent4"/>
+            </a:solidFill>
+            <a:prstDash val="solid"/>
+          </a:ln>
+        </p:spPr>
+      </p:sp>
+      <p:sp>
+        <p:nvSpPr>
+          <p:cNvPr id="18" name="Shape 15"/>
+          <p:cNvSpPr/>
+          <p:nvPr/>
+        </p:nvSpPr>
+        <p:spPr>
+          <a:xfrm>
+            <a:off x="1920240" y="1463040"/>
+            <a:ext cx="237744" cy="237744"/>
+          </a:xfrm>
+          <a:prstGeom prst="ellipse">
+            <a:avLst/>
+          </a:prstGeom>
+          <a:solidFill>
+            <a:schemeClr val="accent4"/>
+          </a:solidFill>
+          <a:ln/>
+        </p:spPr>
+      </p:sp>
+      <p:sp>
+        <p:nvSpPr>
+          <p:cNvPr id="19" name="Text 16"/>
+          <p:cNvSpPr txBox="1"/>
+          <p:nvPr/>
+        </p:nvSpPr>
+        <p:spPr>
+          <a:xfrm>
+            <a:off x="1920240" y="1463040"/>
+            <a:ext cx="237744" cy="237744"/>
+          </a:xfrm>
+          <a:prstGeom prst="rect">
+            <a:avLst/>
+          </a:prstGeom>
+          <a:noFill/>
+          <a:ln/>
+        </p:spPr>
+        <p:txBody>
+          <a:bodyPr wrap="square" lIns="0" tIns="0" rIns="0" bIns="0" rtlCol="0" anchor="ctr"/>
+          <a:lstStyle/>
+          <a:p>
+            <a:pPr algn="ctr" indent="0" marL="0">
+              <a:buNone/>
+            </a:pPr>
+            <a:r>
+              <a:rPr lang="en-US" sz="1000" b="1" dirty="0">
+                <a:solidFill>
+                  <a:schemeClr val="bg1"/>
+                </a:solidFill>
+              </a:rPr>
+              <a:t>1</a:t>
+            </a:r>
+            <a:endParaRPr lang="en-US" sz="1000" dirty="0"/>
+          </a:p>
+        </p:txBody>
+      </p:sp>
+      <p:sp>
+        <p:nvSpPr>
+          <p:cNvPr id="20" name="Text 17"/>
+          <p:cNvSpPr txBox="1"/>
+          <p:nvPr/>
+        </p:nvSpPr>
+        <p:spPr>
+          <a:xfrm>
+            <a:off x="2221992" y="1444752"/>
+            <a:ext cx="1435608" cy="274320"/>
+          </a:xfrm>
+          <a:prstGeom prst="rect">
+            <a:avLst/>
+          </a:prstGeom>
+          <a:noFill/>
+          <a:ln/>
+        </p:spPr>
+        <p:txBody>
+          <a:bodyPr wrap="square" lIns="0" tIns="0" rIns="0" bIns="0" rtlCol="0" anchor="ctr"/>
+          <a:lstStyle/>
+          <a:p>
+            <a:pPr indent="0" marL="0">
+              <a:buNone/>
+            </a:pPr>
+            <a:r>
+              <a:rPr lang="en-US" sz="1050" b="1" dirty="0">
+                <a:solidFill>
+                  <a:schemeClr val="tx1"/>
+                </a:solidFill>
+              </a:rPr>
+              <a:t>Before the model</a:t>
+            </a:r>
+            <a:endParaRPr lang="en-US" sz="1050" dirty="0"/>
+          </a:p>
+        </p:txBody>
+      </p:sp>
+      <p:sp>
+        <p:nvSpPr>
+          <p:cNvPr id="21" name="Text 18"/>
+          <p:cNvSpPr txBox="1"/>
+          <p:nvPr/>
+        </p:nvSpPr>
+        <p:spPr>
+          <a:xfrm>
+            <a:off x="1920240" y="1810512"/>
+            <a:ext cx="1719072" cy="960120"/>
+          </a:xfrm>
+          <a:prstGeom prst="rect">
+            <a:avLst/>
+          </a:prstGeom>
+          <a:noFill/>
+          <a:ln/>
+        </p:spPr>
+        <p:txBody>
+          <a:bodyPr wrap="square" lIns="0" tIns="0" rIns="0" bIns="0" rtlCol="0" anchor="t"/>
+          <a:lstStyle/>
+          <a:p>
+            <a:pPr marL="101600" indent="-101600">
+              <a:spcAft>
+                <a:spcPts val="200"/>
+              </a:spcAft>
+              <a:buSzPct val="100000"/>
+              <a:buChar char="•"/>
+            </a:pPr>
+            <a:r>
+              <a:rPr lang="en-US" sz="900" dirty="0">
+                <a:solidFill>
+                  <a:schemeClr val="tx2"/>
+                </a:solidFill>
+              </a:rPr>
+              <a:t>Who is asking, and why</a:t>
+            </a:r>
+            <a:endParaRPr lang="en-US" sz="900" dirty="0"/>
+          </a:p>
+          <a:p>
+            <a:pPr marL="101600" indent="-101600">
+              <a:spcAft>
+                <a:spcPts val="200"/>
+              </a:spcAft>
+              <a:buSzPct val="100000"/>
+              <a:buChar char="•"/>
+            </a:pPr>
+            <a:r>
+              <a:rPr lang="en-US" sz="900" dirty="0">
+                <a:solidFill>
+                  <a:schemeClr val="tx2"/>
+                </a:solidFill>
+              </a:rPr>
+              <a:t>Sensitive values → tokens</a:t>
+            </a:r>
+            <a:endParaRPr lang="en-US" sz="900" dirty="0"/>
+          </a:p>
+          <a:p>
+            <a:pPr marL="101600" indent="-101600">
+              <a:spcAft>
+                <a:spcPts val="200"/>
+              </a:spcAft>
+              <a:buSzPct val="100000"/>
+              <a:buChar char="•"/>
+            </a:pPr>
+            <a:r>
+              <a:rPr lang="en-US" sz="900" dirty="0">
+                <a:solidFill>
+                  <a:schemeClr val="tx2"/>
+                </a:solidFill>
+              </a:rPr>
+              <a:t>Injected text quarantined</a:t>
+            </a:r>
+            <a:endParaRPr lang="en-US" sz="900" dirty="0"/>
+          </a:p>
+          <a:p>
+            <a:pPr marL="101600" indent="-101600">
+              <a:spcAft>
+                <a:spcPts val="200"/>
+              </a:spcAft>
+              <a:buSzPct val="100000"/>
+              <a:buChar char="•"/>
+            </a:pPr>
+            <a:r>
+              <a:rPr lang="en-US" sz="900" dirty="0">
+                <a:solidFill>
+                  <a:schemeClr val="tx2"/>
+                </a:solidFill>
+              </a:rPr>
+              <a:t>Data-class limit per model</a:t>
+            </a:r>
+            <a:endParaRPr lang="en-US" sz="900" dirty="0"/>
+          </a:p>
+        </p:txBody>
+      </p:sp>
+      <p:sp>
+        <p:nvSpPr>
+          <p:cNvPr id="22" name="model sees"/>
+          <p:cNvSpPr/>
+          <p:nvPr/>
+        </p:nvSpPr>
+        <p:spPr>
+          <a:xfrm>
+            <a:off x="1920240" y="2834640"/>
+            <a:ext cx="1700784" cy="475488"/>
+          </a:xfrm>
+          <a:prstGeom prst="roundRect">
+            <a:avLst>
+              <a:gd name="adj" fmla="val 9615"/>
+            </a:avLst>
+          </a:prstGeom>
+          <a:solidFill>
+            <a:schemeClr val="bg1"/>
+          </a:solidFill>
+          <a:ln w="12700">
+            <a:solidFill>
+              <a:schemeClr val="accent4"/>
+            </a:solidFill>
+            <a:prstDash val="dash"/>
+          </a:ln>
+        </p:spPr>
+      </p:sp>
+      <p:sp>
+        <p:nvSpPr>
+          <p:cNvPr id="23" name="Text 20"/>
+          <p:cNvSpPr txBox="1"/>
+          <p:nvPr/>
+        </p:nvSpPr>
+        <p:spPr>
+          <a:xfrm>
+            <a:off x="1993392" y="2862072"/>
+            <a:ext cx="1554480" cy="164592"/>
+          </a:xfrm>
+          <a:prstGeom prst="rect">
+            <a:avLst/>
+          </a:prstGeom>
+          <a:noFill/>
+          <a:ln/>
+        </p:spPr>
+        <p:txBody>
+          <a:bodyPr wrap="square" lIns="0" tIns="0" rIns="0" bIns="0" rtlCol="0" anchor="ctr"/>
+          <a:lstStyle/>
+          <a:p>
+            <a:pPr indent="0" marL="0">
+              <a:buNone/>
+            </a:pPr>
+            <a:r>
+              <a:rPr lang="en-US" sz="800" dirty="0">
+                <a:solidFill>
+                  <a:schemeClr val="accent5"/>
+                </a:solidFill>
+              </a:rPr>
+              <a:t>the model sees</a:t>
+            </a:r>
+            <a:endParaRPr lang="en-US" sz="800" dirty="0"/>
+          </a:p>
+        </p:txBody>
+      </p:sp>
+      <p:sp>
+        <p:nvSpPr>
+          <p:cNvPr id="24" name="Text 21"/>
+          <p:cNvSpPr txBox="1"/>
+          <p:nvPr/>
+        </p:nvSpPr>
+        <p:spPr>
+          <a:xfrm>
+            <a:off x="1938528" y="3035808"/>
+            <a:ext cx="1664208" cy="219456"/>
+          </a:xfrm>
+          <a:prstGeom prst="rect">
+            <a:avLst/>
+          </a:prstGeom>
+          <a:noFill/>
+          <a:ln/>
+        </p:spPr>
+        <p:txBody>
+          <a:bodyPr wrap="square" lIns="0" tIns="0" rIns="0" bIns="0" rtlCol="0" anchor="ctr"/>
+          <a:lstStyle/>
+          <a:p>
+            <a:pPr algn="ctr" indent="0" marL="0">
+              <a:buNone/>
+            </a:pPr>
+            <a:r>
+              <a:rPr lang="en-US" sz="900" b="1" dirty="0">
+                <a:solidFill>
+                  <a:schemeClr val="accent4"/>
+                </a:solidFill>
+                <a:latin typeface="Courier New" pitchFamily="34" charset="0"/>
+                <a:ea typeface="Courier New" pitchFamily="34" charset="-122"/>
+                <a:cs typeface="Courier New" pitchFamily="34" charset="-120"/>
+              </a:rPr>
+              <a:t>[[CARD#3f2a1b ****1111]]</a:t>
+            </a:r>
+            <a:endParaRPr lang="en-US" sz="900" dirty="0"/>
+          </a:p>
+        </p:txBody>
+      </p:sp>
+      <p:sp>
+        <p:nvSpPr>
+          <p:cNvPr id="25" name="approved model"/>
+          <p:cNvSpPr/>
+          <p:nvPr/>
+        </p:nvSpPr>
+        <p:spPr>
+          <a:xfrm>
+            <a:off x="3849624" y="1783080"/>
+            <a:ext cx="960120" cy="1280160"/>
+          </a:xfrm>
+          <a:prstGeom prst="roundRect">
+            <a:avLst>
+              <a:gd name="adj" fmla="val 7619"/>
+            </a:avLst>
+          </a:prstGeom>
+          <a:solidFill>
+            <a:schemeClr val="tx1"/>
+          </a:solidFill>
+          <a:ln/>
+        </p:spPr>
+      </p:sp>
+      <p:sp>
+        <p:nvSpPr>
+          <p:cNvPr id="26" name="Text 23"/>
+          <p:cNvSpPr txBox="1"/>
+          <p:nvPr/>
+        </p:nvSpPr>
+        <p:spPr>
+          <a:xfrm>
+            <a:off x="3922776" y="1847088"/>
+            <a:ext cx="832104" cy="365760"/>
+          </a:xfrm>
+          <a:prstGeom prst="rect">
+            <a:avLst/>
+          </a:prstGeom>
+          <a:noFill/>
+          <a:ln/>
+        </p:spPr>
+        <p:txBody>
+          <a:bodyPr wrap="square" lIns="0" tIns="0" rIns="0" bIns="0" rtlCol="0" anchor="t"/>
+          <a:lstStyle/>
+          <a:p>
+            <a:pPr indent="0" marL="0">
+              <a:buNone/>
+            </a:pPr>
+            <a:r>
+              <a:rPr lang="en-US" sz="1050" b="1" dirty="0">
+                <a:solidFill>
+                  <a:schemeClr val="bg1"/>
+                </a:solidFill>
+              </a:rPr>
+              <a:t>Approved model</a:t>
+            </a:r>
+            <a:endParaRPr lang="en-US" sz="1050" dirty="0"/>
+          </a:p>
+        </p:txBody>
+      </p:sp>
+      <p:sp>
+        <p:nvSpPr>
+          <p:cNvPr id="27" name="Text 24"/>
+          <p:cNvSpPr txBox="1"/>
+          <p:nvPr/>
+        </p:nvSpPr>
+        <p:spPr>
+          <a:xfrm>
+            <a:off x="3922776" y="2231136"/>
+            <a:ext cx="832104" cy="292608"/>
+          </a:xfrm>
+          <a:prstGeom prst="rect">
+            <a:avLst/>
+          </a:prstGeom>
+          <a:noFill/>
+          <a:ln/>
+        </p:spPr>
+        <p:txBody>
+          <a:bodyPr wrap="square" lIns="0" tIns="0" rIns="0" bIns="0" rtlCol="0" anchor="t"/>
+          <a:lstStyle/>
+          <a:p>
+            <a:pPr indent="0" marL="0">
+              <a:buNone/>
+            </a:pPr>
+            <a:r>
+              <a:rPr lang="en-US" sz="800" dirty="0">
+                <a:solidFill>
+                  <a:schemeClr val="bg2"/>
+                </a:solidFill>
+              </a:rPr>
+              <a:t>DeepSeek via OpenRouter</a:t>
+            </a:r>
+            <a:endParaRPr lang="en-US" sz="800" dirty="0"/>
+          </a:p>
+        </p:txBody>
+      </p:sp>
+      <p:sp>
+        <p:nvSpPr>
+          <p:cNvPr id="28" name="Text 25"/>
+          <p:cNvSpPr txBox="1"/>
+          <p:nvPr/>
+        </p:nvSpPr>
+        <p:spPr>
+          <a:xfrm>
+            <a:off x="3922776" y="2560320"/>
+            <a:ext cx="850392" cy="457200"/>
+          </a:xfrm>
+          <a:prstGeom prst="rect">
+            <a:avLst/>
+          </a:prstGeom>
+          <a:noFill/>
+          <a:ln/>
+        </p:spPr>
+        <p:txBody>
+          <a:bodyPr wrap="square" lIns="0" tIns="0" rIns="0" bIns="0" rtlCol="0" anchor="t"/>
+          <a:lstStyle/>
+          <a:p>
+            <a:pPr indent="0" marL="0">
+              <a:buNone/>
+            </a:pPr>
+            <a:r>
+              <a:rPr lang="en-US" sz="900" dirty="0">
+                <a:solidFill>
+                  <a:schemeClr val="bg1"/>
+                </a:solidFill>
+              </a:rPr>
+              <a:t>Sees tokens, never the real values</a:t>
+            </a:r>
+            <a:endParaRPr lang="en-US" sz="900" dirty="0"/>
+          </a:p>
+        </p:txBody>
+      </p:sp>
+      <p:sp>
+        <p:nvSpPr>
+          <p:cNvPr id="29" name="checkpoint 2"/>
+          <p:cNvSpPr/>
+          <p:nvPr/>
+        </p:nvSpPr>
+        <p:spPr>
+          <a:xfrm>
+            <a:off x="4928616" y="1371600"/>
+            <a:ext cx="1920240" cy="2057400"/>
+          </a:xfrm>
+          <a:prstGeom prst="roundRect">
+            <a:avLst>
+              <a:gd name="adj" fmla="val 3810"/>
+            </a:avLst>
+          </a:prstGeom>
+          <a:solidFill>
+            <a:schemeClr val="accent1">
+              <a:alpha val="12000"/>
+            </a:schemeClr>
+          </a:solidFill>
+          <a:ln w="19050">
+            <a:solidFill>
+              <a:schemeClr val="accent1"/>
+            </a:solidFill>
+            <a:prstDash val="solid"/>
+          </a:ln>
+        </p:spPr>
+      </p:sp>
+      <p:sp>
+        <p:nvSpPr>
+          <p:cNvPr id="30" name="Shape 27"/>
+          <p:cNvSpPr/>
+          <p:nvPr/>
+        </p:nvSpPr>
+        <p:spPr>
+          <a:xfrm>
+            <a:off x="5038344" y="1463040"/>
+            <a:ext cx="237744" cy="237744"/>
+          </a:xfrm>
+          <a:prstGeom prst="ellipse">
+            <a:avLst/>
+          </a:prstGeom>
+          <a:solidFill>
+            <a:schemeClr val="accent1"/>
+          </a:solidFill>
+          <a:ln/>
+        </p:spPr>
+      </p:sp>
+      <p:sp>
+        <p:nvSpPr>
+          <p:cNvPr id="31" name="Text 28"/>
+          <p:cNvSpPr txBox="1"/>
+          <p:nvPr/>
+        </p:nvSpPr>
+        <p:spPr>
+          <a:xfrm>
+            <a:off x="5038344" y="1463040"/>
+            <a:ext cx="237744" cy="237744"/>
+          </a:xfrm>
+          <a:prstGeom prst="rect">
+            <a:avLst/>
+          </a:prstGeom>
+          <a:noFill/>
+          <a:ln/>
+        </p:spPr>
+        <p:txBody>
+          <a:bodyPr wrap="square" lIns="0" tIns="0" rIns="0" bIns="0" rtlCol="0" anchor="ctr"/>
+          <a:lstStyle/>
+          <a:p>
+            <a:pPr algn="ctr" indent="0" marL="0">
+              <a:buNone/>
+            </a:pPr>
+            <a:r>
+              <a:rPr lang="en-US" sz="1000" b="1" dirty="0">
+                <a:solidFill>
+                  <a:schemeClr val="bg1"/>
+                </a:solidFill>
+              </a:rPr>
+              <a:t>2</a:t>
+            </a:r>
+            <a:endParaRPr lang="en-US" sz="1000" dirty="0"/>
+          </a:p>
+        </p:txBody>
+      </p:sp>
+      <p:sp>
+        <p:nvSpPr>
+          <p:cNvPr id="32" name="Text 29"/>
+          <p:cNvSpPr txBox="1"/>
+          <p:nvPr/>
+        </p:nvSpPr>
+        <p:spPr>
+          <a:xfrm>
+            <a:off x="5340096" y="1444752"/>
+            <a:ext cx="1435608" cy="274320"/>
+          </a:xfrm>
+          <a:prstGeom prst="rect">
+            <a:avLst/>
+          </a:prstGeom>
+          <a:noFill/>
+          <a:ln/>
+        </p:spPr>
+        <p:txBody>
+          <a:bodyPr wrap="square" lIns="0" tIns="0" rIns="0" bIns="0" rtlCol="0" anchor="ctr"/>
+          <a:lstStyle/>
+          <a:p>
+            <a:pPr indent="0" marL="0">
+              <a:buNone/>
+            </a:pPr>
+            <a:r>
+              <a:rPr lang="en-US" sz="1050" b="1" dirty="0">
+                <a:solidFill>
+                  <a:schemeClr val="tx1"/>
+                </a:solidFill>
+              </a:rPr>
+              <a:t>Before the agent acts</a:t>
+            </a:r>
+            <a:endParaRPr lang="en-US" sz="1050" dirty="0"/>
+          </a:p>
+        </p:txBody>
+      </p:sp>
+      <p:sp>
+        <p:nvSpPr>
+          <p:cNvPr id="33" name="Text 30"/>
+          <p:cNvSpPr txBox="1"/>
+          <p:nvPr/>
+        </p:nvSpPr>
+        <p:spPr>
+          <a:xfrm>
+            <a:off x="5038344" y="1810512"/>
+            <a:ext cx="1719072" cy="1280160"/>
+          </a:xfrm>
+          <a:prstGeom prst="rect">
+            <a:avLst/>
+          </a:prstGeom>
+          <a:noFill/>
+          <a:ln/>
+        </p:spPr>
+        <p:txBody>
+          <a:bodyPr wrap="square" lIns="0" tIns="0" rIns="0" bIns="0" rtlCol="0" anchor="t"/>
+          <a:lstStyle/>
+          <a:p>
+            <a:pPr marL="101600" indent="-101600">
+              <a:spcAft>
+                <a:spcPts val="200"/>
+              </a:spcAft>
+              <a:buSzPct val="100000"/>
+              <a:buChar char="•"/>
+            </a:pPr>
+            <a:r>
+              <a:rPr lang="en-US" sz="900" dirty="0">
+                <a:solidFill>
+                  <a:schemeClr val="tx2"/>
+                </a:solidFill>
+              </a:rPr>
+              <a:t>Role → allowed tools</a:t>
+            </a:r>
+            <a:endParaRPr lang="en-US" sz="900" dirty="0"/>
+          </a:p>
+          <a:p>
+            <a:pPr marL="101600" indent="-101600">
+              <a:spcAft>
+                <a:spcPts val="200"/>
+              </a:spcAft>
+              <a:buSzPct val="100000"/>
+              <a:buChar char="•"/>
+            </a:pPr>
+            <a:r>
+              <a:rPr lang="en-US" sz="900" dirty="0">
+                <a:solidFill>
+                  <a:schemeClr val="tx2"/>
+                </a:solidFill>
+              </a:rPr>
+              <a:t>Only the user's own clients</a:t>
+            </a:r>
+            <a:endParaRPr lang="en-US" sz="900" dirty="0"/>
+          </a:p>
+          <a:p>
+            <a:pPr marL="101600" indent="-101600">
+              <a:spcAft>
+                <a:spcPts val="200"/>
+              </a:spcAft>
+              <a:buSzPct val="100000"/>
+              <a:buChar char="•"/>
+            </a:pPr>
+            <a:r>
+              <a:rPr lang="en-US" sz="900" dirty="0">
+                <a:solidFill>
+                  <a:schemeClr val="tx2"/>
+                </a:solidFill>
+              </a:rPr>
+              <a:t>Information barrier (MNPI)</a:t>
+            </a:r>
+            <a:endParaRPr lang="en-US" sz="900" dirty="0"/>
+          </a:p>
+          <a:p>
+            <a:pPr marL="101600" indent="-101600">
+              <a:spcAft>
+                <a:spcPts val="200"/>
+              </a:spcAft>
+              <a:buSzPct val="100000"/>
+              <a:buChar char="•"/>
+            </a:pPr>
+            <a:r>
+              <a:rPr lang="en-US" sz="900" dirty="0">
+                <a:solidFill>
+                  <a:schemeClr val="tx2"/>
+                </a:solidFill>
+              </a:rPr>
+              <a:t>Budgets stop runaway loops</a:t>
+            </a:r>
+            <a:endParaRPr lang="en-US" sz="900" dirty="0"/>
+          </a:p>
+          <a:p>
+            <a:pPr marL="101600" indent="-101600">
+              <a:spcAft>
+                <a:spcPts val="200"/>
+              </a:spcAft>
+              <a:buSzPct val="100000"/>
+              <a:buChar char="•"/>
+            </a:pPr>
+            <a:r>
+              <a:rPr lang="en-US" sz="900" dirty="0">
+                <a:solidFill>
+                  <a:schemeClr val="tx2"/>
+                </a:solidFill>
+              </a:rPr>
+              <a:t>Known attack signatures</a:t>
+            </a:r>
+            <a:endParaRPr lang="en-US" sz="900" dirty="0"/>
+          </a:p>
+        </p:txBody>
+      </p:sp>
+      <p:sp>
+        <p:nvSpPr>
+          <p:cNvPr id="34" name="Text 31"/>
+          <p:cNvSpPr txBox="1"/>
+          <p:nvPr/>
+        </p:nvSpPr>
+        <p:spPr>
+          <a:xfrm>
+            <a:off x="5038344" y="3154680"/>
+            <a:ext cx="1719072" cy="201168"/>
+          </a:xfrm>
+          <a:prstGeom prst="rect">
+            <a:avLst/>
+          </a:prstGeom>
+          <a:noFill/>
+          <a:ln/>
+        </p:spPr>
+        <p:txBody>
+          <a:bodyPr wrap="square" lIns="0" tIns="0" rIns="0" bIns="0" rtlCol="0" anchor="ctr"/>
+          <a:lstStyle/>
+          <a:p>
+            <a:pPr indent="0" marL="0">
+              <a:buNone/>
+            </a:pPr>
+            <a:r>
+              <a:rPr lang="en-US" sz="800" i="1" dirty="0">
+                <a:solidFill>
+                  <a:schemeClr val="accent5"/>
+                </a:solidFill>
+              </a:rPr>
+              <a:t>Blocked calls never reach the agent</a:t>
+            </a:r>
+            <a:endParaRPr lang="en-US" sz="800" dirty="0"/>
+          </a:p>
+        </p:txBody>
+      </p:sp>
+      <p:sp>
+        <p:nvSpPr>
+          <p:cNvPr id="35" name="bank systems"/>
+          <p:cNvSpPr/>
+          <p:nvPr/>
+        </p:nvSpPr>
+        <p:spPr>
+          <a:xfrm>
+            <a:off x="6967728" y="1371600"/>
+            <a:ext cx="1719072" cy="841248"/>
+          </a:xfrm>
+          <a:prstGeom prst="roundRect">
+            <a:avLst>
+              <a:gd name="adj" fmla="val 8696"/>
+            </a:avLst>
+          </a:prstGeom>
+          <a:solidFill>
+            <a:schemeClr val="bg1"/>
+          </a:solidFill>
+          <a:ln w="12700">
+            <a:solidFill>
+              <a:srgbClr val="C9D2DF"/>
+            </a:solidFill>
+            <a:prstDash val="solid"/>
+          </a:ln>
+        </p:spPr>
+      </p:sp>
+      <p:sp>
+        <p:nvSpPr>
+          <p:cNvPr id="36" name="Text 33"/>
+          <p:cNvSpPr txBox="1"/>
+          <p:nvPr/>
+        </p:nvSpPr>
+        <p:spPr>
+          <a:xfrm>
+            <a:off x="7059168" y="1408176"/>
+            <a:ext cx="1536192" cy="274320"/>
+          </a:xfrm>
+          <a:prstGeom prst="rect">
+            <a:avLst/>
+          </a:prstGeom>
+          <a:noFill/>
+          <a:ln/>
+        </p:spPr>
+        <p:txBody>
+          <a:bodyPr wrap="square" lIns="0" tIns="0" rIns="0" bIns="0" rtlCol="0" anchor="ctr"/>
+          <a:lstStyle/>
+          <a:p>
+            <a:pPr indent="0" marL="0">
+              <a:buNone/>
+            </a:pPr>
+            <a:r>
+              <a:rPr lang="en-US" sz="1050" b="1" dirty="0">
+                <a:solidFill>
+                  <a:schemeClr val="tx1"/>
+                </a:solidFill>
+              </a:rPr>
+              <a:t>Bank systems</a:t>
+            </a:r>
+            <a:endParaRPr lang="en-US" sz="1050" dirty="0"/>
+          </a:p>
+        </p:txBody>
+      </p:sp>
+      <p:sp>
+        <p:nvSpPr>
+          <p:cNvPr id="37" name="Text 34"/>
+          <p:cNvSpPr txBox="1"/>
+          <p:nvPr/>
+        </p:nvSpPr>
+        <p:spPr>
+          <a:xfrm>
+            <a:off x="7059168" y="1700784"/>
+            <a:ext cx="1554480" cy="493776"/>
+          </a:xfrm>
+          <a:prstGeom prst="rect">
+            <a:avLst/>
+          </a:prstGeom>
+          <a:noFill/>
+          <a:ln/>
+        </p:spPr>
+        <p:txBody>
+          <a:bodyPr wrap="square" lIns="0" tIns="0" rIns="0" bIns="0" rtlCol="0" anchor="t"/>
+          <a:lstStyle/>
+          <a:p>
+            <a:pPr indent="0" marL="0">
+              <a:buNone/>
+            </a:pPr>
+            <a:r>
+              <a:rPr lang="en-US" sz="900" dirty="0">
+                <a:solidFill>
+                  <a:schemeClr val="tx2"/>
+                </a:solidFill>
+              </a:rPr>
+              <a:t>Client files · sanctions screening · payments · code repos (tools, MCP)</a:t>
+            </a:r>
+            <a:endParaRPr lang="en-US" sz="900" dirty="0"/>
+          </a:p>
+        </p:txBody>
+      </p:sp>
+      <p:sp>
+        <p:nvSpPr>
+          <p:cNvPr id="38" name="checkpoint 3"/>
+          <p:cNvSpPr/>
+          <p:nvPr/>
+        </p:nvSpPr>
+        <p:spPr>
+          <a:xfrm>
+            <a:off x="6967728" y="2304288"/>
+            <a:ext cx="1719072" cy="1033272"/>
+          </a:xfrm>
+          <a:prstGeom prst="roundRect">
+            <a:avLst>
+              <a:gd name="adj" fmla="val 7080"/>
+            </a:avLst>
+          </a:prstGeom>
+          <a:solidFill>
+            <a:schemeClr val="accent3">
+              <a:alpha val="10000"/>
+            </a:schemeClr>
+          </a:solidFill>
+          <a:ln w="19050">
+            <a:solidFill>
+              <a:schemeClr val="accent3"/>
+            </a:solidFill>
+            <a:prstDash val="solid"/>
+          </a:ln>
+        </p:spPr>
+      </p:sp>
+      <p:sp>
+        <p:nvSpPr>
+          <p:cNvPr id="39" name="Shape 36"/>
+          <p:cNvSpPr/>
+          <p:nvPr/>
+        </p:nvSpPr>
+        <p:spPr>
+          <a:xfrm>
+            <a:off x="7059168" y="2377440"/>
+            <a:ext cx="237744" cy="237744"/>
+          </a:xfrm>
+          <a:prstGeom prst="ellipse">
+            <a:avLst/>
+          </a:prstGeom>
+          <a:solidFill>
+            <a:schemeClr val="accent3"/>
+          </a:solidFill>
+          <a:ln/>
+        </p:spPr>
+      </p:sp>
+      <p:sp>
+        <p:nvSpPr>
+          <p:cNvPr id="40" name="Text 37"/>
+          <p:cNvSpPr txBox="1"/>
+          <p:nvPr/>
+        </p:nvSpPr>
+        <p:spPr>
+          <a:xfrm>
+            <a:off x="7059168" y="2377440"/>
+            <a:ext cx="237744" cy="237744"/>
+          </a:xfrm>
+          <a:prstGeom prst="rect">
+            <a:avLst/>
+          </a:prstGeom>
+          <a:noFill/>
+          <a:ln/>
+        </p:spPr>
+        <p:txBody>
+          <a:bodyPr wrap="square" lIns="0" tIns="0" rIns="0" bIns="0" rtlCol="0" anchor="ctr"/>
+          <a:lstStyle/>
+          <a:p>
+            <a:pPr algn="ctr" indent="0" marL="0">
+              <a:buNone/>
+            </a:pPr>
+            <a:r>
+              <a:rPr lang="en-US" sz="1000" b="1" dirty="0">
+                <a:solidFill>
+                  <a:schemeClr val="bg1"/>
+                </a:solidFill>
+              </a:rPr>
+              <a:t>3</a:t>
+            </a:r>
+            <a:endParaRPr lang="en-US" sz="1000" dirty="0"/>
+          </a:p>
+        </p:txBody>
+      </p:sp>
+      <p:sp>
+        <p:nvSpPr>
+          <p:cNvPr id="41" name="Text 38"/>
+          <p:cNvSpPr txBox="1"/>
+          <p:nvPr/>
+        </p:nvSpPr>
+        <p:spPr>
+          <a:xfrm>
+            <a:off x="7360920" y="2359152"/>
+            <a:ext cx="1252728" cy="274320"/>
+          </a:xfrm>
+          <a:prstGeom prst="rect">
+            <a:avLst/>
+          </a:prstGeom>
+          <a:noFill/>
+          <a:ln/>
+        </p:spPr>
+        <p:txBody>
+          <a:bodyPr wrap="square" lIns="0" tIns="0" rIns="0" bIns="0" rtlCol="0" anchor="ctr"/>
+          <a:lstStyle/>
+          <a:p>
+            <a:pPr indent="0" marL="0">
+              <a:buNone/>
+            </a:pPr>
+            <a:r>
+              <a:rPr lang="en-US" sz="1050" b="1" dirty="0">
+                <a:solidFill>
+                  <a:schemeClr val="tx1"/>
+                </a:solidFill>
+              </a:rPr>
+              <a:t>Before data leaves</a:t>
+            </a:r>
+            <a:endParaRPr lang="en-US" sz="1050" dirty="0"/>
+          </a:p>
+        </p:txBody>
+      </p:sp>
+      <p:sp>
+        <p:nvSpPr>
+          <p:cNvPr id="42" name="Text 39"/>
+          <p:cNvSpPr txBox="1"/>
+          <p:nvPr/>
+        </p:nvSpPr>
+        <p:spPr>
+          <a:xfrm>
+            <a:off x="7059168" y="2688336"/>
+            <a:ext cx="1554480" cy="621792"/>
+          </a:xfrm>
+          <a:prstGeom prst="rect">
+            <a:avLst/>
+          </a:prstGeom>
+          <a:noFill/>
+          <a:ln/>
+        </p:spPr>
+        <p:txBody>
+          <a:bodyPr wrap="square" lIns="0" tIns="0" rIns="0" bIns="0" rtlCol="0" anchor="t"/>
+          <a:lstStyle/>
+          <a:p>
+            <a:pPr marL="101600" indent="-101600">
+              <a:spcAft>
+                <a:spcPts val="200"/>
+              </a:spcAft>
+              <a:buSzPct val="100000"/>
+              <a:buChar char="•"/>
+            </a:pPr>
+            <a:r>
+              <a:rPr lang="en-US" sz="900" dirty="0">
+                <a:solidFill>
+                  <a:schemeClr val="tx2"/>
+                </a:solidFill>
+              </a:rPr>
+              <a:t>Client data never goes to email or web</a:t>
+            </a:r>
+            <a:endParaRPr lang="en-US" sz="900" dirty="0"/>
+          </a:p>
+          <a:p>
+            <a:pPr marL="101600" indent="-101600">
+              <a:spcAft>
+                <a:spcPts val="200"/>
+              </a:spcAft>
+              <a:buSzPct val="100000"/>
+              <a:buChar char="•"/>
+            </a:pPr>
+            <a:r>
+              <a:rPr lang="en-US" sz="900" dirty="0">
+                <a:solidFill>
+                  <a:schemeClr val="tx2"/>
+                </a:solidFill>
+              </a:rPr>
+              <a:t>Real values only to approved tools</a:t>
+            </a:r>
+            <a:endParaRPr lang="en-US" sz="900" dirty="0"/>
+          </a:p>
+        </p:txBody>
+      </p:sp>
+      <p:sp>
+        <p:nvSpPr>
+          <p:cNvPr id="43" name="outside the bank"/>
+          <p:cNvSpPr/>
+          <p:nvPr/>
+        </p:nvSpPr>
+        <p:spPr>
+          <a:xfrm>
+            <a:off x="6967728" y="3410712"/>
+            <a:ext cx="1719072" cy="274320"/>
+          </a:xfrm>
+          <a:prstGeom prst="roundRect">
+            <a:avLst>
+              <a:gd name="adj" fmla="val 16667"/>
+            </a:avLst>
+          </a:prstGeom>
+          <a:solidFill>
+            <a:schemeClr val="bg2"/>
+          </a:solidFill>
+          <a:ln w="12700">
+            <a:solidFill>
+              <a:schemeClr val="accent5"/>
+            </a:solidFill>
+            <a:prstDash val="dash"/>
+          </a:ln>
+        </p:spPr>
+      </p:sp>
+      <p:sp>
+        <p:nvSpPr>
+          <p:cNvPr id="44" name="Text 41"/>
+          <p:cNvSpPr txBox="1"/>
+          <p:nvPr/>
+        </p:nvSpPr>
+        <p:spPr>
+          <a:xfrm>
+            <a:off x="7013448" y="3410712"/>
+            <a:ext cx="1627632" cy="274320"/>
+          </a:xfrm>
+          <a:prstGeom prst="rect">
+            <a:avLst/>
+          </a:prstGeom>
+          <a:noFill/>
+          <a:ln/>
+        </p:spPr>
+        <p:txBody>
+          <a:bodyPr wrap="square" lIns="0" tIns="0" rIns="0" bIns="0" rtlCol="0" anchor="ctr"/>
+          <a:lstStyle/>
+          <a:p>
+            <a:pPr algn="ctr" indent="0" marL="0">
+              <a:buNone/>
+            </a:pPr>
+            <a:r>
+              <a:rPr lang="en-US" sz="800" dirty="0">
+                <a:solidFill>
+                  <a:schemeClr val="tx2"/>
+                </a:solidFill>
+              </a:rPr>
+              <a:t>Outside the bank: email · web · vendors</a:t>
+            </a:r>
+            <a:endParaRPr lang="en-US" sz="800" dirty="0"/>
+          </a:p>
+        </p:txBody>
+      </p:sp>
+      <p:sp>
+        <p:nvSpPr>
+          <p:cNvPr id="45" name="Shape 42"/>
+          <p:cNvSpPr/>
+          <p:nvPr/>
+        </p:nvSpPr>
+        <p:spPr>
+          <a:xfrm>
+            <a:off x="1700784" y="2103120"/>
+            <a:ext cx="100584" cy="914"/>
           </a:xfrm>
           <a:prstGeom prst="line">
             <a:avLst/>
@@ -6575,116 +8275,14 @@
       </p:sp>
       <p:sp>
         <p:nvSpPr>
-          <p:cNvPr id="9" name="agent Claude Code"/>
-          <p:cNvSpPr/>
-          <p:nvPr/>
-        </p:nvSpPr>
-        <p:spPr>
-          <a:xfrm>
-            <a:off x="457200" y="2240280"/>
-            <a:ext cx="1645920" cy="685800"/>
-          </a:xfrm>
-          <a:prstGeom prst="roundRect">
-            <a:avLst>
-              <a:gd name="adj" fmla="val 13333"/>
-            </a:avLst>
-          </a:prstGeom>
-          <a:solidFill>
-            <a:schemeClr val="bg2"/>
-          </a:solidFill>
-          <a:ln/>
-        </p:spPr>
-      </p:sp>
-      <p:sp>
-        <p:nvSpPr>
-          <p:cNvPr id="10" name="Shape 7"/>
-          <p:cNvSpPr/>
-          <p:nvPr/>
-        </p:nvSpPr>
-        <p:spPr>
-          <a:xfrm>
-            <a:off x="566928" y="2377440"/>
-            <a:ext cx="411480" cy="411480"/>
-          </a:xfrm>
-          <a:prstGeom prst="ellipse">
-            <a:avLst/>
-          </a:prstGeom>
-          <a:solidFill>
-            <a:schemeClr val="tx2"/>
-          </a:solidFill>
-          <a:ln/>
-        </p:spPr>
-      </p:sp>
-      <p:pic>
-        <p:nvPicPr>
-          <p:cNvPr id="11" name="Image 1" descr="preencoded.png">    </p:cNvPr>
-          <p:cNvPicPr>
-            <a:picLocks noChangeAspect="1"/>
-          </p:cNvPicPr>
-          <p:nvPr/>
-        </p:nvPicPr>
-        <p:blipFill>
-          <a:blip r:embed="rId2"/>
-          <a:stretch>
-            <a:fillRect/>
-          </a:stretch>
-        </p:blipFill>
-        <p:spPr>
-          <a:xfrm>
-            <a:off x="669798" y="2480310"/>
-            <a:ext cx="205740" cy="205740"/>
-          </a:xfrm>
-          <a:prstGeom prst="rect">
-            <a:avLst/>
-          </a:prstGeom>
-        </p:spPr>
-      </p:pic>
-      <p:sp>
-        <p:nvSpPr>
-          <p:cNvPr id="12" name="Text 8"/>
-          <p:cNvSpPr txBox="1"/>
-          <p:nvPr/>
-        </p:nvSpPr>
-        <p:spPr>
-          <a:xfrm>
-            <a:off x="1051560" y="2240280"/>
-            <a:ext cx="1005840" cy="685800"/>
-          </a:xfrm>
-          <a:prstGeom prst="rect">
-            <a:avLst/>
-          </a:prstGeom>
-          <a:noFill/>
-          <a:ln/>
-        </p:spPr>
-        <p:txBody>
-          <a:bodyPr wrap="square" lIns="0" tIns="0" rIns="0" bIns="0" rtlCol="0" anchor="ctr"/>
-          <a:lstStyle/>
-          <a:p>
-            <a:pPr indent="0" marL="0">
-              <a:buNone/>
-            </a:pPr>
-            <a:r>
-              <a:rPr lang="en-US" sz="1400" b="1" dirty="0">
-                <a:solidFill>
-                  <a:schemeClr val="tx1"/>
-                </a:solidFill>
-              </a:rPr>
-              <a:t>Claude Code</a:t>
-            </a:r>
-            <a:endParaRPr lang="en-US" sz="1400" dirty="0"/>
-          </a:p>
-        </p:txBody>
-      </p:sp>
-      <p:sp>
-        <p:nvSpPr>
-          <p:cNvPr id="13" name="Shape 9"/>
-          <p:cNvSpPr/>
-          <p:nvPr/>
-        </p:nvSpPr>
-        <p:spPr>
-          <a:xfrm>
-            <a:off x="2121408" y="2583180"/>
-            <a:ext cx="329184" cy="914"/>
+          <p:cNvPr id="46" name="Shape 43"/>
+          <p:cNvSpPr/>
+          <p:nvPr/>
+        </p:nvSpPr>
+        <p:spPr>
+          <a:xfrm>
+            <a:off x="3739896" y="2377440"/>
+            <a:ext cx="100584" cy="914"/>
           </a:xfrm>
           <a:prstGeom prst="line">
             <a:avLst/>
@@ -6701,522 +8299,14 @@
       </p:sp>
       <p:sp>
         <p:nvSpPr>
-          <p:cNvPr id="14" name="policy engine"/>
-          <p:cNvSpPr/>
-          <p:nvPr/>
-        </p:nvSpPr>
-        <p:spPr>
-          <a:xfrm>
-            <a:off x="2468880" y="1097280"/>
-            <a:ext cx="4206240" cy="2148840"/>
-          </a:xfrm>
-          <a:prstGeom prst="roundRect">
-            <a:avLst>
-              <a:gd name="adj" fmla="val 5106"/>
-            </a:avLst>
-          </a:prstGeom>
-          <a:solidFill>
-            <a:schemeClr val="tx1"/>
-          </a:solidFill>
-          <a:ln/>
-        </p:spPr>
-      </p:sp>
-      <p:sp>
-        <p:nvSpPr>
-          <p:cNvPr id="15" name="Text 11"/>
-          <p:cNvSpPr txBox="1"/>
-          <p:nvPr/>
-        </p:nvSpPr>
-        <p:spPr>
-          <a:xfrm>
-            <a:off x="2651760" y="1188720"/>
-            <a:ext cx="3840480" cy="228600"/>
-          </a:xfrm>
-          <a:prstGeom prst="rect">
-            <a:avLst/>
-          </a:prstGeom>
-          <a:noFill/>
-          <a:ln/>
-        </p:spPr>
-        <p:txBody>
-          <a:bodyPr wrap="square" lIns="0" tIns="0" rIns="0" bIns="0" rtlCol="0" anchor="ctr"/>
-          <a:lstStyle/>
-          <a:p>
-            <a:pPr algn="l" indent="0" marL="0">
-              <a:buNone/>
-            </a:pPr>
-            <a:r>
-              <a:rPr lang="en-US" sz="1000" b="1" spc="200" kern="0" dirty="0">
-                <a:solidFill>
-                  <a:schemeClr val="accent1"/>
-                </a:solidFill>
-              </a:rPr>
-              <a:t>FLOW GUARD  ·  ONE POLICY ENGINE</a:t>
-            </a:r>
-            <a:endParaRPr lang="en-US" sz="1000" dirty="0"/>
-          </a:p>
-        </p:txBody>
-      </p:sp>
-      <p:sp>
-        <p:nvSpPr>
-          <p:cNvPr id="16" name="pill OpenAI format"/>
-          <p:cNvSpPr/>
-          <p:nvPr/>
-        </p:nvSpPr>
-        <p:spPr>
-          <a:xfrm>
-            <a:off x="2651760" y="1508760"/>
-            <a:ext cx="1828800" cy="347472"/>
-          </a:xfrm>
-          <a:prstGeom prst="roundRect">
-            <a:avLst>
-              <a:gd name="adj" fmla="val 65789"/>
-            </a:avLst>
-          </a:prstGeom>
-          <a:solidFill>
-            <a:schemeClr val="tx1"/>
-          </a:solidFill>
-          <a:ln w="22225">
-            <a:solidFill>
-              <a:schemeClr val="accent2"/>
-            </a:solidFill>
-            <a:prstDash val="solid"/>
-          </a:ln>
-        </p:spPr>
-      </p:sp>
-      <p:sp>
-        <p:nvSpPr>
-          <p:cNvPr id="17" name="Text 13"/>
-          <p:cNvSpPr txBox="1"/>
-          <p:nvPr/>
-        </p:nvSpPr>
-        <p:spPr>
-          <a:xfrm>
-            <a:off x="2651760" y="1508760"/>
-            <a:ext cx="1828800" cy="347472"/>
-          </a:xfrm>
-          <a:prstGeom prst="rect">
-            <a:avLst/>
-          </a:prstGeom>
-          <a:noFill/>
-          <a:ln/>
-        </p:spPr>
-        <p:txBody>
-          <a:bodyPr wrap="square" lIns="0" tIns="0" rIns="0" bIns="0" rtlCol="0" anchor="ctr"/>
-          <a:lstStyle/>
-          <a:p>
-            <a:pPr algn="ctr" indent="0" marL="0">
-              <a:buNone/>
-            </a:pPr>
-            <a:r>
-              <a:rPr lang="en-US" sz="1200" b="1" dirty="0">
-                <a:solidFill>
-                  <a:schemeClr val="bg1"/>
-                </a:solidFill>
-                <a:latin typeface="Calibri" pitchFamily="34" charset="0"/>
-                <a:ea typeface="Calibri" pitchFamily="34" charset="-122"/>
-                <a:cs typeface="Calibri" pitchFamily="34" charset="-120"/>
-              </a:rPr>
-              <a:t>OpenAI format</a:t>
-            </a:r>
-            <a:endParaRPr lang="en-US" sz="1200" dirty="0"/>
-          </a:p>
-        </p:txBody>
-      </p:sp>
-      <p:sp>
-        <p:nvSpPr>
-          <p:cNvPr id="18" name="pill Anthropic format"/>
-          <p:cNvSpPr/>
-          <p:nvPr/>
-        </p:nvSpPr>
-        <p:spPr>
-          <a:xfrm>
-            <a:off x="4663440" y="1508760"/>
-            <a:ext cx="1828800" cy="347472"/>
-          </a:xfrm>
-          <a:prstGeom prst="roundRect">
-            <a:avLst>
-              <a:gd name="adj" fmla="val 65789"/>
-            </a:avLst>
-          </a:prstGeom>
-          <a:solidFill>
-            <a:schemeClr val="tx1"/>
-          </a:solidFill>
-          <a:ln w="22225">
-            <a:solidFill>
-              <a:schemeClr val="accent2"/>
-            </a:solidFill>
-            <a:prstDash val="solid"/>
-          </a:ln>
-        </p:spPr>
-      </p:sp>
-      <p:sp>
-        <p:nvSpPr>
-          <p:cNvPr id="19" name="Text 15"/>
-          <p:cNvSpPr txBox="1"/>
-          <p:nvPr/>
-        </p:nvSpPr>
-        <p:spPr>
-          <a:xfrm>
-            <a:off x="4663440" y="1508760"/>
-            <a:ext cx="1828800" cy="347472"/>
-          </a:xfrm>
-          <a:prstGeom prst="rect">
-            <a:avLst/>
-          </a:prstGeom>
-          <a:noFill/>
-          <a:ln/>
-        </p:spPr>
-        <p:txBody>
-          <a:bodyPr wrap="square" lIns="0" tIns="0" rIns="0" bIns="0" rtlCol="0" anchor="ctr"/>
-          <a:lstStyle/>
-          <a:p>
-            <a:pPr algn="ctr" indent="0" marL="0">
-              <a:buNone/>
-            </a:pPr>
-            <a:r>
-              <a:rPr lang="en-US" sz="1200" b="1" dirty="0">
-                <a:solidFill>
-                  <a:schemeClr val="bg1"/>
-                </a:solidFill>
-                <a:latin typeface="Calibri" pitchFamily="34" charset="0"/>
-                <a:ea typeface="Calibri" pitchFamily="34" charset="-122"/>
-                <a:cs typeface="Calibri" pitchFamily="34" charset="-120"/>
-              </a:rPr>
-              <a:t>Anthropic format</a:t>
-            </a:r>
-            <a:endParaRPr lang="en-US" sz="1200" dirty="0"/>
-          </a:p>
-        </p:txBody>
-      </p:sp>
-      <p:sp>
-        <p:nvSpPr>
-          <p:cNvPr id="20" name="question WHO"/>
-          <p:cNvSpPr/>
-          <p:nvPr/>
-        </p:nvSpPr>
-        <p:spPr>
-          <a:xfrm>
-            <a:off x="2651760" y="2011680"/>
-            <a:ext cx="1225296" cy="1051560"/>
-          </a:xfrm>
-          <a:prstGeom prst="roundRect">
-            <a:avLst>
-              <a:gd name="adj" fmla="val 6957"/>
-            </a:avLst>
-          </a:prstGeom>
-          <a:solidFill>
-            <a:schemeClr val="tx2"/>
-          </a:solidFill>
-          <a:ln/>
-        </p:spPr>
-      </p:sp>
-      <p:sp>
-        <p:nvSpPr>
-          <p:cNvPr id="21" name="Text 17"/>
-          <p:cNvSpPr txBox="1"/>
-          <p:nvPr/>
-        </p:nvSpPr>
-        <p:spPr>
-          <a:xfrm>
-            <a:off x="2724912" y="2075688"/>
-            <a:ext cx="1078992" cy="320040"/>
-          </a:xfrm>
-          <a:prstGeom prst="rect">
-            <a:avLst/>
-          </a:prstGeom>
-          <a:noFill/>
-          <a:ln/>
-        </p:spPr>
-        <p:txBody>
-          <a:bodyPr wrap="square" lIns="0" tIns="0" rIns="0" bIns="0" rtlCol="0" anchor="ctr"/>
-          <a:lstStyle/>
-          <a:p>
-            <a:pPr algn="ctr" indent="0" marL="0">
-              <a:buNone/>
-            </a:pPr>
-            <a:r>
-              <a:rPr lang="en-US" sz="1300" b="1" dirty="0">
-                <a:solidFill>
-                  <a:schemeClr val="accent1"/>
-                </a:solidFill>
-              </a:rPr>
-              <a:t>WHO</a:t>
-            </a:r>
-            <a:endParaRPr lang="en-US" sz="1300" dirty="0"/>
-          </a:p>
-        </p:txBody>
-      </p:sp>
-      <p:sp>
-        <p:nvSpPr>
-          <p:cNvPr id="22" name="Text 18"/>
-          <p:cNvSpPr txBox="1"/>
-          <p:nvPr/>
-        </p:nvSpPr>
-        <p:spPr>
-          <a:xfrm>
-            <a:off x="2724912" y="2395728"/>
-            <a:ext cx="1078992" cy="594360"/>
-          </a:xfrm>
-          <a:prstGeom prst="rect">
-            <a:avLst/>
-          </a:prstGeom>
-          <a:noFill/>
-          <a:ln/>
-        </p:spPr>
-        <p:txBody>
-          <a:bodyPr wrap="square" lIns="0" tIns="0" rIns="0" bIns="0" rtlCol="0" anchor="t"/>
-          <a:lstStyle/>
-          <a:p>
-            <a:pPr algn="ctr" indent="0" marL="0">
-              <a:buNone/>
-            </a:pPr>
-            <a:r>
-              <a:rPr lang="en-US" sz="1000" dirty="0">
-                <a:solidFill>
-                  <a:schemeClr val="bg2"/>
-                </a:solidFill>
-              </a:rPr>
-              <a:t>identity, purpose, scope</a:t>
-            </a:r>
-            <a:endParaRPr lang="en-US" sz="1000" dirty="0"/>
-          </a:p>
-        </p:txBody>
-      </p:sp>
-      <p:sp>
-        <p:nvSpPr>
-          <p:cNvPr id="23" name="question WHAT"/>
-          <p:cNvSpPr/>
-          <p:nvPr/>
-        </p:nvSpPr>
-        <p:spPr>
-          <a:xfrm>
-            <a:off x="3950208" y="2011680"/>
-            <a:ext cx="1225296" cy="1051560"/>
-          </a:xfrm>
-          <a:prstGeom prst="roundRect">
-            <a:avLst>
-              <a:gd name="adj" fmla="val 6957"/>
-            </a:avLst>
-          </a:prstGeom>
-          <a:solidFill>
-            <a:schemeClr val="tx2"/>
-          </a:solidFill>
-          <a:ln/>
-        </p:spPr>
-      </p:sp>
-      <p:sp>
-        <p:nvSpPr>
-          <p:cNvPr id="24" name="Text 20"/>
-          <p:cNvSpPr txBox="1"/>
-          <p:nvPr/>
-        </p:nvSpPr>
-        <p:spPr>
-          <a:xfrm>
-            <a:off x="4023360" y="2075688"/>
-            <a:ext cx="1078992" cy="320040"/>
-          </a:xfrm>
-          <a:prstGeom prst="rect">
-            <a:avLst/>
-          </a:prstGeom>
-          <a:noFill/>
-          <a:ln/>
-        </p:spPr>
-        <p:txBody>
-          <a:bodyPr wrap="square" lIns="0" tIns="0" rIns="0" bIns="0" rtlCol="0" anchor="ctr"/>
-          <a:lstStyle/>
-          <a:p>
-            <a:pPr algn="ctr" indent="0" marL="0">
-              <a:buNone/>
-            </a:pPr>
-            <a:r>
-              <a:rPr lang="en-US" sz="1300" b="1" dirty="0">
-                <a:solidFill>
-                  <a:schemeClr val="accent1"/>
-                </a:solidFill>
-              </a:rPr>
-              <a:t>WHAT</a:t>
-            </a:r>
-            <a:endParaRPr lang="en-US" sz="1300" dirty="0"/>
-          </a:p>
-        </p:txBody>
-      </p:sp>
-      <p:sp>
-        <p:nvSpPr>
-          <p:cNvPr id="25" name="Text 21"/>
-          <p:cNvSpPr txBox="1"/>
-          <p:nvPr/>
-        </p:nvSpPr>
-        <p:spPr>
-          <a:xfrm>
-            <a:off x="4023360" y="2395728"/>
-            <a:ext cx="1078992" cy="594360"/>
-          </a:xfrm>
-          <a:prstGeom prst="rect">
-            <a:avLst/>
-          </a:prstGeom>
-          <a:noFill/>
-          <a:ln/>
-        </p:spPr>
-        <p:txBody>
-          <a:bodyPr wrap="square" lIns="0" tIns="0" rIns="0" bIns="0" rtlCol="0" anchor="t"/>
-          <a:lstStyle/>
-          <a:p>
-            <a:pPr algn="ctr" indent="0" marL="0">
-              <a:buNone/>
-            </a:pPr>
-            <a:r>
-              <a:rPr lang="en-US" sz="1000" dirty="0">
-                <a:solidFill>
-                  <a:schemeClr val="bg2"/>
-                </a:solidFill>
-              </a:rPr>
-              <a:t>tokens, data class, barrier, flow</a:t>
-            </a:r>
-            <a:endParaRPr lang="en-US" sz="1000" dirty="0"/>
-          </a:p>
-        </p:txBody>
-      </p:sp>
-      <p:sp>
-        <p:nvSpPr>
-          <p:cNvPr id="26" name="question HOW MUCH"/>
-          <p:cNvSpPr/>
-          <p:nvPr/>
-        </p:nvSpPr>
-        <p:spPr>
-          <a:xfrm>
-            <a:off x="5248656" y="2011680"/>
-            <a:ext cx="1225296" cy="1051560"/>
-          </a:xfrm>
-          <a:prstGeom prst="roundRect">
-            <a:avLst>
-              <a:gd name="adj" fmla="val 6957"/>
-            </a:avLst>
-          </a:prstGeom>
-          <a:solidFill>
-            <a:schemeClr val="tx2"/>
-          </a:solidFill>
-          <a:ln/>
-        </p:spPr>
-      </p:sp>
-      <p:sp>
-        <p:nvSpPr>
-          <p:cNvPr id="27" name="Text 23"/>
-          <p:cNvSpPr txBox="1"/>
-          <p:nvPr/>
-        </p:nvSpPr>
-        <p:spPr>
-          <a:xfrm>
-            <a:off x="5321808" y="2075688"/>
-            <a:ext cx="1078992" cy="320040"/>
-          </a:xfrm>
-          <a:prstGeom prst="rect">
-            <a:avLst/>
-          </a:prstGeom>
-          <a:noFill/>
-          <a:ln/>
-        </p:spPr>
-        <p:txBody>
-          <a:bodyPr wrap="square" lIns="0" tIns="0" rIns="0" bIns="0" rtlCol="0" anchor="ctr"/>
-          <a:lstStyle/>
-          <a:p>
-            <a:pPr algn="ctr" indent="0" marL="0">
-              <a:buNone/>
-            </a:pPr>
-            <a:r>
-              <a:rPr lang="en-US" sz="1300" b="1" dirty="0">
-                <a:solidFill>
-                  <a:schemeClr val="accent1"/>
-                </a:solidFill>
-              </a:rPr>
-              <a:t>HOW MUCH</a:t>
-            </a:r>
-            <a:endParaRPr lang="en-US" sz="1300" dirty="0"/>
-          </a:p>
-        </p:txBody>
-      </p:sp>
-      <p:sp>
-        <p:nvSpPr>
-          <p:cNvPr id="28" name="Text 24"/>
-          <p:cNvSpPr txBox="1"/>
-          <p:nvPr/>
-        </p:nvSpPr>
-        <p:spPr>
-          <a:xfrm>
-            <a:off x="5321808" y="2395728"/>
-            <a:ext cx="1078992" cy="594360"/>
-          </a:xfrm>
-          <a:prstGeom prst="rect">
-            <a:avLst/>
-          </a:prstGeom>
-          <a:noFill/>
-          <a:ln/>
-        </p:spPr>
-        <p:txBody>
-          <a:bodyPr wrap="square" lIns="0" tIns="0" rIns="0" bIns="0" rtlCol="0" anchor="t"/>
-          <a:lstStyle/>
-          <a:p>
-            <a:pPr algn="ctr" indent="0" marL="0">
-              <a:buNone/>
-            </a:pPr>
-            <a:r>
-              <a:rPr lang="en-US" sz="1000" dirty="0">
-                <a:solidFill>
-                  <a:schemeClr val="bg2"/>
-                </a:solidFill>
-              </a:rPr>
-              <a:t>budgets, signatures, AI judge</a:t>
-            </a:r>
-            <a:endParaRPr lang="en-US" sz="1000" dirty="0"/>
-          </a:p>
-        </p:txBody>
-      </p:sp>
-      <p:sp>
-        <p:nvSpPr>
-          <p:cNvPr id="29" name="Text 25"/>
-          <p:cNvSpPr txBox="1"/>
-          <p:nvPr/>
-        </p:nvSpPr>
-        <p:spPr>
-          <a:xfrm>
-            <a:off x="7040880" y="1097280"/>
-            <a:ext cx="1645920" cy="228600"/>
-          </a:xfrm>
-          <a:prstGeom prst="rect">
-            <a:avLst/>
-          </a:prstGeom>
-          <a:noFill/>
-          <a:ln/>
-        </p:spPr>
-        <p:txBody>
-          <a:bodyPr wrap="square" lIns="0" tIns="0" rIns="0" bIns="0" rtlCol="0" anchor="ctr"/>
-          <a:lstStyle/>
-          <a:p>
-            <a:pPr algn="l" indent="0" marL="0">
-              <a:buNone/>
-            </a:pPr>
-            <a:r>
-              <a:rPr lang="en-US" sz="1000" b="1" spc="200" kern="0" dirty="0">
-                <a:solidFill>
-                  <a:schemeClr val="accent5"/>
-                </a:solidFill>
-              </a:rPr>
-              <a:t>WHAT LEAVES</a:t>
-            </a:r>
-            <a:endParaRPr lang="en-US" sz="1000" dirty="0"/>
-          </a:p>
-        </p:txBody>
-      </p:sp>
-      <p:sp>
-        <p:nvSpPr>
-          <p:cNvPr id="30" name="Shape 26"/>
-          <p:cNvSpPr/>
-          <p:nvPr/>
-        </p:nvSpPr>
-        <p:spPr>
-          <a:xfrm>
-            <a:off x="6693408" y="1714500"/>
-            <a:ext cx="329184" cy="914"/>
+          <p:cNvPr id="47" name="Shape 44"/>
+          <p:cNvSpPr/>
+          <p:nvPr/>
+        </p:nvSpPr>
+        <p:spPr>
+          <a:xfrm>
+            <a:off x="4818888" y="2377440"/>
+            <a:ext cx="100584" cy="914"/>
           </a:xfrm>
           <a:prstGeom prst="line">
             <a:avLst/>
@@ -7233,108 +8323,14 @@
       </p:sp>
       <p:sp>
         <p:nvSpPr>
-          <p:cNvPr id="31" name="sink Model vendors"/>
-          <p:cNvSpPr/>
-          <p:nvPr/>
-        </p:nvSpPr>
-        <p:spPr>
-          <a:xfrm>
-            <a:off x="7040880" y="1371600"/>
-            <a:ext cx="1645920" cy="685800"/>
-          </a:xfrm>
-          <a:prstGeom prst="roundRect">
-            <a:avLst>
-              <a:gd name="adj" fmla="val 13333"/>
-            </a:avLst>
-          </a:prstGeom>
-          <a:solidFill>
-            <a:schemeClr val="bg2"/>
-          </a:solidFill>
-          <a:ln/>
-        </p:spPr>
-      </p:sp>
-      <p:sp>
-        <p:nvSpPr>
-          <p:cNvPr id="32" name="Text 28"/>
-          <p:cNvSpPr txBox="1"/>
-          <p:nvPr/>
-        </p:nvSpPr>
-        <p:spPr>
-          <a:xfrm>
-            <a:off x="7150608" y="1426464"/>
-            <a:ext cx="1508760" cy="301752"/>
-          </a:xfrm>
-          <a:prstGeom prst="rect">
-            <a:avLst/>
-          </a:prstGeom>
-          <a:noFill/>
-          <a:ln/>
-        </p:spPr>
-        <p:txBody>
-          <a:bodyPr wrap="square" lIns="0" tIns="0" rIns="0" bIns="0" rtlCol="0" anchor="ctr"/>
-          <a:lstStyle/>
-          <a:p>
-            <a:pPr indent="0" marL="0">
-              <a:buNone/>
-            </a:pPr>
-            <a:r>
-              <a:rPr lang="en-US" sz="1300" b="1" dirty="0">
-                <a:solidFill>
-                  <a:schemeClr val="tx1"/>
-                </a:solidFill>
-              </a:rPr>
-              <a:t>Model vendors</a:t>
-            </a:r>
-            <a:endParaRPr lang="en-US" sz="1300" dirty="0"/>
-          </a:p>
-        </p:txBody>
-      </p:sp>
-      <p:sp>
-        <p:nvSpPr>
-          <p:cNvPr id="33" name="Text 29"/>
-          <p:cNvSpPr txBox="1"/>
-          <p:nvPr/>
-        </p:nvSpPr>
-        <p:spPr>
-          <a:xfrm>
-            <a:off x="7150608" y="1719072"/>
-            <a:ext cx="1508760" cy="292608"/>
-          </a:xfrm>
-          <a:prstGeom prst="rect">
-            <a:avLst/>
-          </a:prstGeom>
-          <a:noFill/>
-          <a:ln/>
-        </p:spPr>
-        <p:txBody>
-          <a:bodyPr wrap="square" lIns="0" tIns="0" rIns="0" bIns="0" rtlCol="0" anchor="ctr"/>
-          <a:lstStyle/>
-          <a:p>
-            <a:pPr indent="0" marL="0">
-              <a:buNone/>
-            </a:pPr>
-            <a:r>
-              <a:rPr lang="en-US" sz="1000" dirty="0">
-                <a:solidFill>
-                  <a:schemeClr val="tx2"/>
-                </a:solidFill>
-              </a:rPr>
-              <a:t>tokens only</a:t>
-            </a:r>
-            <a:endParaRPr lang="en-US" sz="1000" dirty="0"/>
-          </a:p>
-        </p:txBody>
-      </p:sp>
-      <p:sp>
-        <p:nvSpPr>
-          <p:cNvPr id="34" name="Shape 30"/>
-          <p:cNvSpPr/>
-          <p:nvPr/>
-        </p:nvSpPr>
-        <p:spPr>
-          <a:xfrm>
-            <a:off x="6693408" y="2583180"/>
-            <a:ext cx="329184" cy="914"/>
+          <p:cNvPr id="48" name="Shape 45"/>
+          <p:cNvSpPr/>
+          <p:nvPr/>
+        </p:nvSpPr>
+        <p:spPr>
+          <a:xfrm>
+            <a:off x="6858000" y="1792224"/>
+            <a:ext cx="100584" cy="914"/>
           </a:xfrm>
           <a:prstGeom prst="line">
             <a:avLst/>
@@ -7351,624 +8347,14 @@
       </p:sp>
       <p:sp>
         <p:nvSpPr>
-          <p:cNvPr id="35" name="sink Tools"/>
-          <p:cNvSpPr/>
-          <p:nvPr/>
-        </p:nvSpPr>
-        <p:spPr>
-          <a:xfrm>
-            <a:off x="7040880" y="2240280"/>
-            <a:ext cx="1645920" cy="685800"/>
-          </a:xfrm>
-          <a:prstGeom prst="roundRect">
-            <a:avLst>
-              <a:gd name="adj" fmla="val 13333"/>
-            </a:avLst>
-          </a:prstGeom>
-          <a:solidFill>
-            <a:schemeClr val="bg2"/>
-          </a:solidFill>
-          <a:ln/>
-        </p:spPr>
-      </p:sp>
-      <p:sp>
-        <p:nvSpPr>
-          <p:cNvPr id="36" name="Text 32"/>
-          <p:cNvSpPr txBox="1"/>
-          <p:nvPr/>
-        </p:nvSpPr>
-        <p:spPr>
-          <a:xfrm>
-            <a:off x="7150608" y="2295144"/>
-            <a:ext cx="1508760" cy="301752"/>
-          </a:xfrm>
-          <a:prstGeom prst="rect">
-            <a:avLst/>
-          </a:prstGeom>
-          <a:noFill/>
-          <a:ln/>
-        </p:spPr>
-        <p:txBody>
-          <a:bodyPr wrap="square" lIns="0" tIns="0" rIns="0" bIns="0" rtlCol="0" anchor="ctr"/>
-          <a:lstStyle/>
-          <a:p>
-            <a:pPr indent="0" marL="0">
-              <a:buNone/>
-            </a:pPr>
-            <a:r>
-              <a:rPr lang="en-US" sz="1300" b="1" dirty="0">
-                <a:solidFill>
-                  <a:schemeClr val="tx1"/>
-                </a:solidFill>
-              </a:rPr>
-              <a:t>Tools</a:t>
-            </a:r>
-            <a:endParaRPr lang="en-US" sz="1300" dirty="0"/>
-          </a:p>
-        </p:txBody>
-      </p:sp>
-      <p:sp>
-        <p:nvSpPr>
-          <p:cNvPr id="37" name="Text 33"/>
-          <p:cNvSpPr txBox="1"/>
-          <p:nvPr/>
-        </p:nvSpPr>
-        <p:spPr>
-          <a:xfrm>
-            <a:off x="7150608" y="2587752"/>
-            <a:ext cx="1508760" cy="292608"/>
-          </a:xfrm>
-          <a:prstGeom prst="rect">
-            <a:avLst/>
-          </a:prstGeom>
-          <a:noFill/>
-          <a:ln/>
-        </p:spPr>
-        <p:txBody>
-          <a:bodyPr wrap="square" lIns="0" tIns="0" rIns="0" bIns="0" rtlCol="0" anchor="ctr"/>
-          <a:lstStyle/>
-          <a:p>
-            <a:pPr indent="0" marL="0">
-              <a:buNone/>
-            </a:pPr>
-            <a:r>
-              <a:rPr lang="en-US" sz="1000" dirty="0">
-                <a:solidFill>
-                  <a:schemeClr val="tx2"/>
-                </a:solidFill>
-              </a:rPr>
-              <a:t>real value only where allowed</a:t>
-            </a:r>
-            <a:endParaRPr lang="en-US" sz="1000" dirty="0"/>
-          </a:p>
-        </p:txBody>
-      </p:sp>
-      <p:sp>
-        <p:nvSpPr>
-          <p:cNvPr id="38" name="bottom policy.yaml"/>
-          <p:cNvSpPr/>
-          <p:nvPr/>
-        </p:nvSpPr>
-        <p:spPr>
-          <a:xfrm>
-            <a:off x="457200" y="3566160"/>
-            <a:ext cx="1920240" cy="731520"/>
-          </a:xfrm>
-          <a:prstGeom prst="roundRect">
-            <a:avLst>
-              <a:gd name="adj" fmla="val 12500"/>
-            </a:avLst>
-          </a:prstGeom>
-          <a:solidFill>
-            <a:schemeClr val="bg2"/>
-          </a:solidFill>
-          <a:ln/>
-        </p:spPr>
-      </p:sp>
-      <p:sp>
-        <p:nvSpPr>
-          <p:cNvPr id="39" name="Shape 35"/>
-          <p:cNvSpPr/>
-          <p:nvPr/>
-        </p:nvSpPr>
-        <p:spPr>
-          <a:xfrm>
-            <a:off x="566928" y="3721608"/>
-            <a:ext cx="411480" cy="411480"/>
-          </a:xfrm>
-          <a:prstGeom prst="ellipse">
-            <a:avLst/>
-          </a:prstGeom>
-          <a:solidFill>
-            <a:schemeClr val="tx2"/>
-          </a:solidFill>
-          <a:ln/>
-        </p:spPr>
-      </p:sp>
-      <p:pic>
-        <p:nvPicPr>
-          <p:cNvPr id="40" name="Image 2" descr="preencoded.png">    </p:cNvPr>
-          <p:cNvPicPr>
-            <a:picLocks noChangeAspect="1"/>
-          </p:cNvPicPr>
-          <p:nvPr/>
-        </p:nvPicPr>
-        <p:blipFill>
-          <a:blip r:embed="rId3"/>
-          <a:stretch>
-            <a:fillRect/>
-          </a:stretch>
-        </p:blipFill>
-        <p:spPr>
-          <a:xfrm>
-            <a:off x="669798" y="3824478"/>
-            <a:ext cx="205740" cy="205740"/>
-          </a:xfrm>
-          <a:prstGeom prst="rect">
-            <a:avLst/>
-          </a:prstGeom>
-        </p:spPr>
-      </p:pic>
-      <p:sp>
-        <p:nvSpPr>
-          <p:cNvPr id="41" name="Text 36"/>
-          <p:cNvSpPr txBox="1"/>
-          <p:nvPr/>
-        </p:nvSpPr>
-        <p:spPr>
-          <a:xfrm>
-            <a:off x="1069848" y="3630168"/>
-            <a:ext cx="1216152" cy="274320"/>
-          </a:xfrm>
-          <a:prstGeom prst="rect">
-            <a:avLst/>
-          </a:prstGeom>
-          <a:noFill/>
-          <a:ln/>
-        </p:spPr>
-        <p:txBody>
-          <a:bodyPr wrap="square" lIns="0" tIns="0" rIns="0" bIns="0" rtlCol="0" anchor="ctr"/>
-          <a:lstStyle/>
-          <a:p>
-            <a:pPr indent="0" marL="0">
-              <a:buNone/>
-            </a:pPr>
-            <a:r>
-              <a:rPr lang="en-US" sz="1300" b="1" dirty="0">
-                <a:solidFill>
-                  <a:schemeClr val="tx1"/>
-                </a:solidFill>
-                <a:latin typeface="Courier New" pitchFamily="34" charset="0"/>
-                <a:ea typeface="Courier New" pitchFamily="34" charset="-122"/>
-                <a:cs typeface="Courier New" pitchFamily="34" charset="-120"/>
-              </a:rPr>
-              <a:t>policy.yaml</a:t>
-            </a:r>
-            <a:endParaRPr lang="en-US" sz="1300" dirty="0"/>
-          </a:p>
-        </p:txBody>
-      </p:sp>
-      <p:sp>
-        <p:nvSpPr>
-          <p:cNvPr id="42" name="Text 37"/>
-          <p:cNvSpPr txBox="1"/>
-          <p:nvPr/>
-        </p:nvSpPr>
-        <p:spPr>
-          <a:xfrm>
-            <a:off x="1069848" y="3904488"/>
-            <a:ext cx="1261872" cy="347472"/>
-          </a:xfrm>
-          <a:prstGeom prst="rect">
-            <a:avLst/>
-          </a:prstGeom>
-          <a:noFill/>
-          <a:ln/>
-        </p:spPr>
-        <p:txBody>
-          <a:bodyPr wrap="square" lIns="0" tIns="0" rIns="0" bIns="0" rtlCol="0" anchor="t"/>
-          <a:lstStyle/>
-          <a:p>
-            <a:pPr indent="0" marL="0">
-              <a:buNone/>
-            </a:pPr>
-            <a:r>
-              <a:rPr lang="en-US" sz="1000" dirty="0">
-                <a:solidFill>
-                  <a:schemeClr val="tx2"/>
-                </a:solidFill>
-              </a:rPr>
-              <a:t>edit live, no restart</a:t>
-            </a:r>
-            <a:endParaRPr lang="en-US" sz="1000" dirty="0"/>
-          </a:p>
-        </p:txBody>
-      </p:sp>
-      <p:sp>
-        <p:nvSpPr>
-          <p:cNvPr id="43" name="bottom Audit chain"/>
-          <p:cNvSpPr/>
-          <p:nvPr/>
-        </p:nvSpPr>
-        <p:spPr>
-          <a:xfrm>
-            <a:off x="2560320" y="3566160"/>
-            <a:ext cx="1920240" cy="731520"/>
-          </a:xfrm>
-          <a:prstGeom prst="roundRect">
-            <a:avLst>
-              <a:gd name="adj" fmla="val 12500"/>
-            </a:avLst>
-          </a:prstGeom>
-          <a:solidFill>
-            <a:schemeClr val="bg2"/>
-          </a:solidFill>
-          <a:ln/>
-        </p:spPr>
-      </p:sp>
-      <p:sp>
-        <p:nvSpPr>
-          <p:cNvPr id="44" name="Shape 39"/>
-          <p:cNvSpPr/>
-          <p:nvPr/>
-        </p:nvSpPr>
-        <p:spPr>
-          <a:xfrm>
-            <a:off x="2670048" y="3721608"/>
-            <a:ext cx="411480" cy="411480"/>
-          </a:xfrm>
-          <a:prstGeom prst="ellipse">
-            <a:avLst/>
-          </a:prstGeom>
-          <a:solidFill>
-            <a:schemeClr val="tx2"/>
-          </a:solidFill>
-          <a:ln/>
-        </p:spPr>
-      </p:sp>
-      <p:pic>
-        <p:nvPicPr>
-          <p:cNvPr id="45" name="Image 3" descr="preencoded.png">    </p:cNvPr>
-          <p:cNvPicPr>
-            <a:picLocks noChangeAspect="1"/>
-          </p:cNvPicPr>
-          <p:nvPr/>
-        </p:nvPicPr>
-        <p:blipFill>
-          <a:blip r:embed="rId4"/>
-          <a:stretch>
-            <a:fillRect/>
-          </a:stretch>
-        </p:blipFill>
-        <p:spPr>
-          <a:xfrm>
-            <a:off x="2772918" y="3824478"/>
-            <a:ext cx="205740" cy="205740"/>
-          </a:xfrm>
-          <a:prstGeom prst="rect">
-            <a:avLst/>
-          </a:prstGeom>
-        </p:spPr>
-      </p:pic>
-      <p:sp>
-        <p:nvSpPr>
-          <p:cNvPr id="46" name="Text 40"/>
-          <p:cNvSpPr txBox="1"/>
-          <p:nvPr/>
-        </p:nvSpPr>
-        <p:spPr>
-          <a:xfrm>
-            <a:off x="3172968" y="3630168"/>
-            <a:ext cx="1216152" cy="274320"/>
-          </a:xfrm>
-          <a:prstGeom prst="rect">
-            <a:avLst/>
-          </a:prstGeom>
-          <a:noFill/>
-          <a:ln/>
-        </p:spPr>
-        <p:txBody>
-          <a:bodyPr wrap="square" lIns="0" tIns="0" rIns="0" bIns="0" rtlCol="0" anchor="ctr"/>
-          <a:lstStyle/>
-          <a:p>
-            <a:pPr indent="0" marL="0">
-              <a:buNone/>
-            </a:pPr>
-            <a:r>
-              <a:rPr lang="en-US" sz="1300" b="1" dirty="0">
-                <a:solidFill>
-                  <a:schemeClr val="tx1"/>
-                </a:solidFill>
-              </a:rPr>
-              <a:t>Audit chain</a:t>
-            </a:r>
-            <a:endParaRPr lang="en-US" sz="1300" dirty="0"/>
-          </a:p>
-        </p:txBody>
-      </p:sp>
-      <p:sp>
-        <p:nvSpPr>
-          <p:cNvPr id="47" name="Text 41"/>
-          <p:cNvSpPr txBox="1"/>
-          <p:nvPr/>
-        </p:nvSpPr>
-        <p:spPr>
-          <a:xfrm>
-            <a:off x="3172968" y="3904488"/>
-            <a:ext cx="1261872" cy="347472"/>
-          </a:xfrm>
-          <a:prstGeom prst="rect">
-            <a:avLst/>
-          </a:prstGeom>
-          <a:noFill/>
-          <a:ln/>
-        </p:spPr>
-        <p:txBody>
-          <a:bodyPr wrap="square" lIns="0" tIns="0" rIns="0" bIns="0" rtlCol="0" anchor="t"/>
-          <a:lstStyle/>
-          <a:p>
-            <a:pPr indent="0" marL="0">
-              <a:buNone/>
-            </a:pPr>
-            <a:r>
-              <a:rPr lang="en-US" sz="1000" dirty="0">
-                <a:solidFill>
-                  <a:schemeClr val="tx2"/>
-                </a:solidFill>
-              </a:rPr>
-              <a:t>every decision, hash-chained</a:t>
-            </a:r>
-            <a:endParaRPr lang="en-US" sz="1000" dirty="0"/>
-          </a:p>
-        </p:txBody>
-      </p:sp>
-      <p:sp>
-        <p:nvSpPr>
-          <p:cNvPr id="48" name="bottom Dashboard"/>
-          <p:cNvSpPr/>
-          <p:nvPr/>
-        </p:nvSpPr>
-        <p:spPr>
-          <a:xfrm>
-            <a:off x="4663440" y="3566160"/>
-            <a:ext cx="1920240" cy="731520"/>
-          </a:xfrm>
-          <a:prstGeom prst="roundRect">
-            <a:avLst>
-              <a:gd name="adj" fmla="val 12500"/>
-            </a:avLst>
-          </a:prstGeom>
-          <a:solidFill>
-            <a:schemeClr val="bg2"/>
-          </a:solidFill>
-          <a:ln/>
-        </p:spPr>
-      </p:sp>
-      <p:sp>
-        <p:nvSpPr>
-          <p:cNvPr id="49" name="Shape 43"/>
-          <p:cNvSpPr/>
-          <p:nvPr/>
-        </p:nvSpPr>
-        <p:spPr>
-          <a:xfrm>
-            <a:off x="4773168" y="3721608"/>
-            <a:ext cx="411480" cy="411480"/>
-          </a:xfrm>
-          <a:prstGeom prst="ellipse">
-            <a:avLst/>
-          </a:prstGeom>
-          <a:solidFill>
-            <a:schemeClr val="tx2"/>
-          </a:solidFill>
-          <a:ln/>
-        </p:spPr>
-      </p:sp>
-      <p:pic>
-        <p:nvPicPr>
-          <p:cNvPr id="50" name="Image 4" descr="preencoded.png">    </p:cNvPr>
-          <p:cNvPicPr>
-            <a:picLocks noChangeAspect="1"/>
-          </p:cNvPicPr>
-          <p:nvPr/>
-        </p:nvPicPr>
-        <p:blipFill>
-          <a:blip r:embed="rId5"/>
-          <a:stretch>
-            <a:fillRect/>
-          </a:stretch>
-        </p:blipFill>
-        <p:spPr>
-          <a:xfrm>
-            <a:off x="4876038" y="3824478"/>
-            <a:ext cx="205740" cy="205740"/>
-          </a:xfrm>
-          <a:prstGeom prst="rect">
-            <a:avLst/>
-          </a:prstGeom>
-        </p:spPr>
-      </p:pic>
-      <p:sp>
-        <p:nvSpPr>
-          <p:cNvPr id="51" name="Text 44"/>
-          <p:cNvSpPr txBox="1"/>
-          <p:nvPr/>
-        </p:nvSpPr>
-        <p:spPr>
-          <a:xfrm>
-            <a:off x="5276088" y="3630168"/>
-            <a:ext cx="1216152" cy="274320"/>
-          </a:xfrm>
-          <a:prstGeom prst="rect">
-            <a:avLst/>
-          </a:prstGeom>
-          <a:noFill/>
-          <a:ln/>
-        </p:spPr>
-        <p:txBody>
-          <a:bodyPr wrap="square" lIns="0" tIns="0" rIns="0" bIns="0" rtlCol="0" anchor="ctr"/>
-          <a:lstStyle/>
-          <a:p>
-            <a:pPr indent="0" marL="0">
-              <a:buNone/>
-            </a:pPr>
-            <a:r>
-              <a:rPr lang="en-US" sz="1300" b="1" dirty="0">
-                <a:solidFill>
-                  <a:schemeClr val="tx1"/>
-                </a:solidFill>
-              </a:rPr>
-              <a:t>Dashboard</a:t>
-            </a:r>
-            <a:endParaRPr lang="en-US" sz="1300" dirty="0"/>
-          </a:p>
-        </p:txBody>
-      </p:sp>
-      <p:sp>
-        <p:nvSpPr>
-          <p:cNvPr id="52" name="Text 45"/>
-          <p:cNvSpPr txBox="1"/>
-          <p:nvPr/>
-        </p:nvSpPr>
-        <p:spPr>
-          <a:xfrm>
-            <a:off x="5276088" y="3904488"/>
-            <a:ext cx="1261872" cy="347472"/>
-          </a:xfrm>
-          <a:prstGeom prst="rect">
-            <a:avLst/>
-          </a:prstGeom>
-          <a:noFill/>
-          <a:ln/>
-        </p:spPr>
-        <p:txBody>
-          <a:bodyPr wrap="square" lIns="0" tIns="0" rIns="0" bIns="0" rtlCol="0" anchor="t"/>
-          <a:lstStyle/>
-          <a:p>
-            <a:pPr indent="0" marL="0">
-              <a:buNone/>
-            </a:pPr>
-            <a:r>
-              <a:rPr lang="en-US" sz="1000" dirty="0">
-                <a:solidFill>
-                  <a:schemeClr val="tx2"/>
-                </a:solidFill>
-              </a:rPr>
-              <a:t>Overview · Audit · Policies</a:t>
-            </a:r>
-            <a:endParaRPr lang="en-US" sz="1000" dirty="0"/>
-          </a:p>
-        </p:txBody>
-      </p:sp>
-      <p:sp>
-        <p:nvSpPr>
-          <p:cNvPr id="53" name="bottom Next"/>
-          <p:cNvSpPr/>
-          <p:nvPr/>
-        </p:nvSpPr>
-        <p:spPr>
-          <a:xfrm>
-            <a:off x="6766560" y="3566160"/>
-            <a:ext cx="1920240" cy="731520"/>
-          </a:xfrm>
-          <a:prstGeom prst="roundRect">
-            <a:avLst>
-              <a:gd name="adj" fmla="val 12500"/>
-            </a:avLst>
-          </a:prstGeom>
-          <a:solidFill>
-            <a:schemeClr val="bg1"/>
-          </a:solidFill>
-          <a:ln w="15875">
-            <a:solidFill>
-              <a:schemeClr val="accent5"/>
-            </a:solidFill>
-            <a:prstDash val="dash"/>
-          </a:ln>
-        </p:spPr>
-      </p:sp>
-      <p:sp>
-        <p:nvSpPr>
-          <p:cNvPr id="54" name="Text 47"/>
-          <p:cNvSpPr txBox="1"/>
-          <p:nvPr/>
-        </p:nvSpPr>
-        <p:spPr>
-          <a:xfrm>
-            <a:off x="6903720" y="3630168"/>
-            <a:ext cx="1691640" cy="274320"/>
-          </a:xfrm>
-          <a:prstGeom prst="rect">
-            <a:avLst/>
-          </a:prstGeom>
-          <a:noFill/>
-          <a:ln/>
-        </p:spPr>
-        <p:txBody>
-          <a:bodyPr wrap="square" lIns="0" tIns="0" rIns="0" bIns="0" rtlCol="0" anchor="ctr"/>
-          <a:lstStyle/>
-          <a:p>
-            <a:pPr indent="0" marL="0">
-              <a:buNone/>
-            </a:pPr>
-            <a:r>
-              <a:rPr lang="en-US" sz="1300" b="1" dirty="0">
-                <a:solidFill>
-                  <a:schemeClr val="accent5"/>
-                </a:solidFill>
-              </a:rPr>
-              <a:t>Next</a:t>
-            </a:r>
-            <a:endParaRPr lang="en-US" sz="1300" dirty="0"/>
-          </a:p>
-        </p:txBody>
-      </p:sp>
-      <p:sp>
-        <p:nvSpPr>
-          <p:cNvPr id="55" name="Text 48"/>
-          <p:cNvSpPr txBox="1"/>
-          <p:nvPr/>
-        </p:nvSpPr>
-        <p:spPr>
-          <a:xfrm>
-            <a:off x="6903720" y="3904488"/>
-            <a:ext cx="1737360" cy="347472"/>
-          </a:xfrm>
-          <a:prstGeom prst="rect">
-            <a:avLst/>
-          </a:prstGeom>
-          <a:noFill/>
-          <a:ln/>
-        </p:spPr>
-        <p:txBody>
-          <a:bodyPr wrap="square" lIns="0" tIns="0" rIns="0" bIns="0" rtlCol="0" anchor="t"/>
-          <a:lstStyle/>
-          <a:p>
-            <a:pPr indent="0" marL="0">
-              <a:buNone/>
-            </a:pPr>
-            <a:r>
-              <a:rPr lang="en-US" sz="1000" dirty="0">
-                <a:solidFill>
-                  <a:schemeClr val="tx2"/>
-                </a:solidFill>
-              </a:rPr>
-              <a:t>MCP gateway · four-eyes approval</a:t>
-            </a:r>
-            <a:endParaRPr lang="en-US" sz="1000" dirty="0"/>
-          </a:p>
-        </p:txBody>
-      </p:sp>
-      <p:sp>
-        <p:nvSpPr>
-          <p:cNvPr id="56" name="Shape 49"/>
-          <p:cNvSpPr/>
-          <p:nvPr/>
-        </p:nvSpPr>
-        <p:spPr>
-          <a:xfrm>
-            <a:off x="1417320" y="3108960"/>
-            <a:ext cx="914" cy="438912"/>
+          <p:cNvPr id="49" name="Shape 46"/>
+          <p:cNvSpPr/>
+          <p:nvPr/>
+        </p:nvSpPr>
+        <p:spPr>
+          <a:xfrm>
+            <a:off x="6858000" y="2816352"/>
+            <a:ext cx="100584" cy="914"/>
           </a:xfrm>
           <a:prstGeom prst="line">
             <a:avLst/>
@@ -7976,30 +8362,7 @@
           <a:noFill/>
           <a:ln w="22225">
             <a:solidFill>
-              <a:schemeClr val="accent5"/>
-            </a:solidFill>
-            <a:prstDash val="solid"/>
-          </a:ln>
-        </p:spPr>
-      </p:sp>
-      <p:sp>
-        <p:nvSpPr>
-          <p:cNvPr id="57" name="Shape 50"/>
-          <p:cNvSpPr/>
-          <p:nvPr/>
-        </p:nvSpPr>
-        <p:spPr>
-          <a:xfrm>
-            <a:off x="1417320" y="3108960"/>
-            <a:ext cx="1033272" cy="914"/>
-          </a:xfrm>
-          <a:prstGeom prst="line">
-            <a:avLst/>
-          </a:prstGeom>
-          <a:noFill/>
-          <a:ln w="22225">
-            <a:solidFill>
-              <a:schemeClr val="accent5"/>
+              <a:schemeClr val="accent3"/>
             </a:solidFill>
             <a:prstDash val="solid"/>
             <a:tailEnd type="triangle"/>
@@ -8008,14 +8371,14 @@
       </p:sp>
       <p:sp>
         <p:nvSpPr>
-          <p:cNvPr id="58" name="Shape 51"/>
-          <p:cNvSpPr/>
-          <p:nvPr/>
-        </p:nvSpPr>
-        <p:spPr>
-          <a:xfrm>
-            <a:off x="3520440" y="3264408"/>
-            <a:ext cx="914" cy="283464"/>
+          <p:cNvPr id="50" name="Shape 47"/>
+          <p:cNvSpPr/>
+          <p:nvPr/>
+        </p:nvSpPr>
+        <p:spPr>
+          <a:xfrm>
+            <a:off x="7827264" y="3346704"/>
+            <a:ext cx="914" cy="54864"/>
           </a:xfrm>
           <a:prstGeom prst="line">
             <a:avLst/>
@@ -8023,7 +8386,7 @@
           <a:noFill/>
           <a:ln w="22225">
             <a:solidFill>
-              <a:schemeClr val="accent5"/>
+              <a:schemeClr val="accent3"/>
             </a:solidFill>
             <a:prstDash val="solid"/>
             <a:tailEnd type="triangle"/>
@@ -8032,38 +8395,14 @@
       </p:sp>
       <p:sp>
         <p:nvSpPr>
-          <p:cNvPr id="59" name="Shape 52"/>
-          <p:cNvSpPr/>
-          <p:nvPr/>
-        </p:nvSpPr>
-        <p:spPr>
-          <a:xfrm>
-            <a:off x="4498848" y="3931920"/>
-            <a:ext cx="146304" cy="914"/>
-          </a:xfrm>
-          <a:prstGeom prst="line">
-            <a:avLst/>
-          </a:prstGeom>
-          <a:noFill/>
-          <a:ln w="22225">
-            <a:solidFill>
-              <a:schemeClr val="accent5"/>
-            </a:solidFill>
-            <a:prstDash val="solid"/>
-            <a:tailEnd type="triangle"/>
-          </a:ln>
-        </p:spPr>
-      </p:sp>
-      <p:sp>
-        <p:nvSpPr>
-          <p:cNvPr id="60" name="Text 53"/>
-          <p:cNvSpPr txBox="1"/>
-          <p:nvPr/>
-        </p:nvSpPr>
-        <p:spPr>
-          <a:xfrm>
-            <a:off x="457200" y="4434840"/>
-            <a:ext cx="8229600" cy="274320"/>
+          <p:cNvPr id="51" name="Text 48"/>
+          <p:cNvSpPr txBox="1"/>
+          <p:nvPr/>
+        </p:nvSpPr>
+        <p:spPr>
+          <a:xfrm>
+            <a:off x="457200" y="3730752"/>
+            <a:ext cx="3657600" cy="228600"/>
           </a:xfrm>
           <a:prstGeom prst="rect">
             <a:avLst/>
@@ -8075,18 +8414,474 @@
           <a:bodyPr wrap="square" lIns="0" tIns="0" rIns="0" bIns="0" rtlCol="0" anchor="ctr"/>
           <a:lstStyle/>
           <a:p>
+            <a:pPr algn="l" indent="0" marL="0">
+              <a:buNone/>
+            </a:pPr>
+            <a:r>
+              <a:rPr lang="en-US" sz="1000" b="1" spc="200" kern="0" dirty="0">
+                <a:solidFill>
+                  <a:schemeClr val="accent5"/>
+                </a:solidFill>
+              </a:rPr>
+              <a:t>UNDERNEATH EVERY CHECKPOINT</a:t>
+            </a:r>
+            <a:endParaRPr lang="en-US" sz="1000" dirty="0"/>
+          </a:p>
+        </p:txBody>
+      </p:sp>
+      <p:sp>
+        <p:nvSpPr>
+          <p:cNvPr id="52" name="underneath Policy as code"/>
+          <p:cNvSpPr/>
+          <p:nvPr/>
+        </p:nvSpPr>
+        <p:spPr>
+          <a:xfrm>
+            <a:off x="457200" y="3913632"/>
+            <a:ext cx="1965960" cy="822960"/>
+          </a:xfrm>
+          <a:prstGeom prst="roundRect">
+            <a:avLst>
+              <a:gd name="adj" fmla="val 8889"/>
+            </a:avLst>
+          </a:prstGeom>
+          <a:solidFill>
+            <a:schemeClr val="bg2"/>
+          </a:solidFill>
+          <a:ln/>
+        </p:spPr>
+      </p:sp>
+      <p:sp>
+        <p:nvSpPr>
+          <p:cNvPr id="53" name="Shape 50"/>
+          <p:cNvSpPr/>
+          <p:nvPr/>
+        </p:nvSpPr>
+        <p:spPr>
+          <a:xfrm>
+            <a:off x="548640" y="3986784"/>
+            <a:ext cx="137160" cy="137160"/>
+          </a:xfrm>
+          <a:prstGeom prst="ellipse">
+            <a:avLst/>
+          </a:prstGeom>
+          <a:solidFill>
+            <a:schemeClr val="tx1"/>
+          </a:solidFill>
+          <a:ln/>
+        </p:spPr>
+      </p:sp>
+      <p:sp>
+        <p:nvSpPr>
+          <p:cNvPr id="54" name="Text 51"/>
+          <p:cNvSpPr txBox="1"/>
+          <p:nvPr/>
+        </p:nvSpPr>
+        <p:spPr>
+          <a:xfrm>
+            <a:off x="749808" y="3950208"/>
+            <a:ext cx="1600200" cy="210312"/>
+          </a:xfrm>
+          <a:prstGeom prst="rect">
+            <a:avLst/>
+          </a:prstGeom>
+          <a:noFill/>
+          <a:ln/>
+        </p:spPr>
+        <p:txBody>
+          <a:bodyPr wrap="square" lIns="0" tIns="0" rIns="0" bIns="0" rtlCol="0" anchor="ctr"/>
+          <a:lstStyle/>
+          <a:p>
             <a:pPr indent="0" marL="0">
               <a:buNone/>
             </a:pPr>
             <a:r>
-              <a:rPr lang="en-US" sz="1000" dirty="0">
-                <a:solidFill>
-                  <a:schemeClr val="accent5"/>
-                </a:solidFill>
-              </a:rPr>
-              <a:t>Detector checks take under 0.02 ms per text. The AI judge's latency is reported separately, never averaged in.</a:t>
-            </a:r>
-            <a:endParaRPr lang="en-US" sz="1000" dirty="0"/>
+              <a:rPr lang="en-US" sz="1050" b="1" dirty="0">
+                <a:solidFill>
+                  <a:schemeClr val="tx1"/>
+                </a:solidFill>
+              </a:rPr>
+              <a:t>Policy as code</a:t>
+            </a:r>
+            <a:endParaRPr lang="en-US" sz="1050" dirty="0"/>
+          </a:p>
+        </p:txBody>
+      </p:sp>
+      <p:sp>
+        <p:nvSpPr>
+          <p:cNvPr id="55" name="Text 52"/>
+          <p:cNvSpPr txBox="1"/>
+          <p:nvPr/>
+        </p:nvSpPr>
+        <p:spPr>
+          <a:xfrm>
+            <a:off x="548640" y="4160520"/>
+            <a:ext cx="1810512" cy="566928"/>
+          </a:xfrm>
+          <a:prstGeom prst="rect">
+            <a:avLst/>
+          </a:prstGeom>
+          <a:noFill/>
+          <a:ln/>
+        </p:spPr>
+        <p:txBody>
+          <a:bodyPr wrap="square" lIns="0" tIns="0" rIns="0" bIns="0" rtlCol="0" anchor="t"/>
+          <a:lstStyle/>
+          <a:p>
+            <a:pPr indent="0" marL="0">
+              <a:buNone/>
+            </a:pPr>
+            <a:r>
+              <a:rPr lang="en-US" sz="900" dirty="0">
+                <a:solidFill>
+                  <a:schemeClr val="tx2"/>
+                </a:solidFill>
+              </a:rPr>
+              <a:t>One YAML file, three profiles. Edited live: versioned and audited, last good policy kept on errors.</a:t>
+            </a:r>
+            <a:endParaRPr lang="en-US" sz="900" dirty="0"/>
+          </a:p>
+        </p:txBody>
+      </p:sp>
+      <p:sp>
+        <p:nvSpPr>
+          <p:cNvPr id="56" name="underneath Injection judge"/>
+          <p:cNvSpPr/>
+          <p:nvPr/>
+        </p:nvSpPr>
+        <p:spPr>
+          <a:xfrm>
+            <a:off x="2551176" y="3913632"/>
+            <a:ext cx="1965960" cy="822960"/>
+          </a:xfrm>
+          <a:prstGeom prst="roundRect">
+            <a:avLst>
+              <a:gd name="adj" fmla="val 8889"/>
+            </a:avLst>
+          </a:prstGeom>
+          <a:solidFill>
+            <a:schemeClr val="bg2"/>
+          </a:solidFill>
+          <a:ln/>
+        </p:spPr>
+      </p:sp>
+      <p:sp>
+        <p:nvSpPr>
+          <p:cNvPr id="57" name="Shape 54"/>
+          <p:cNvSpPr/>
+          <p:nvPr/>
+        </p:nvSpPr>
+        <p:spPr>
+          <a:xfrm>
+            <a:off x="2642616" y="3986784"/>
+            <a:ext cx="137160" cy="137160"/>
+          </a:xfrm>
+          <a:prstGeom prst="ellipse">
+            <a:avLst/>
+          </a:prstGeom>
+          <a:solidFill>
+            <a:schemeClr val="accent4"/>
+          </a:solidFill>
+          <a:ln/>
+        </p:spPr>
+      </p:sp>
+      <p:sp>
+        <p:nvSpPr>
+          <p:cNvPr id="58" name="Text 55"/>
+          <p:cNvSpPr txBox="1"/>
+          <p:nvPr/>
+        </p:nvSpPr>
+        <p:spPr>
+          <a:xfrm>
+            <a:off x="2843784" y="3950208"/>
+            <a:ext cx="1600200" cy="210312"/>
+          </a:xfrm>
+          <a:prstGeom prst="rect">
+            <a:avLst/>
+          </a:prstGeom>
+          <a:noFill/>
+          <a:ln/>
+        </p:spPr>
+        <p:txBody>
+          <a:bodyPr wrap="square" lIns="0" tIns="0" rIns="0" bIns="0" rtlCol="0" anchor="ctr"/>
+          <a:lstStyle/>
+          <a:p>
+            <a:pPr indent="0" marL="0">
+              <a:buNone/>
+            </a:pPr>
+            <a:r>
+              <a:rPr lang="en-US" sz="1050" b="1" dirty="0">
+                <a:solidFill>
+                  <a:schemeClr val="tx1"/>
+                </a:solidFill>
+              </a:rPr>
+              <a:t>Injection judge</a:t>
+            </a:r>
+            <a:endParaRPr lang="en-US" sz="1050" dirty="0"/>
+          </a:p>
+        </p:txBody>
+      </p:sp>
+      <p:sp>
+        <p:nvSpPr>
+          <p:cNvPr id="59" name="Text 56"/>
+          <p:cNvSpPr txBox="1"/>
+          <p:nvPr/>
+        </p:nvSpPr>
+        <p:spPr>
+          <a:xfrm>
+            <a:off x="2642616" y="4160520"/>
+            <a:ext cx="1810512" cy="566928"/>
+          </a:xfrm>
+          <a:prstGeom prst="rect">
+            <a:avLst/>
+          </a:prstGeom>
+          <a:noFill/>
+          <a:ln/>
+        </p:spPr>
+        <p:txBody>
+          <a:bodyPr wrap="square" lIns="0" tIns="0" rIns="0" bIns="0" rtlCol="0" anchor="t"/>
+          <a:lstStyle/>
+          <a:p>
+            <a:pPr indent="0" marL="0">
+              <a:buNone/>
+            </a:pPr>
+            <a:r>
+              <a:rPr lang="en-US" sz="900" dirty="0">
+                <a:solidFill>
+                  <a:schemeClr val="tx2"/>
+                </a:solidFill>
+              </a:rPr>
+              <a:t>Jev (TypeSafe) scores only text an outsider could have written. Sees redacted text only.</a:t>
+            </a:r>
+            <a:endParaRPr lang="en-US" sz="900" dirty="0"/>
+          </a:p>
+        </p:txBody>
+      </p:sp>
+      <p:sp>
+        <p:nvSpPr>
+          <p:cNvPr id="60" name="underneath Evidence"/>
+          <p:cNvSpPr/>
+          <p:nvPr/>
+        </p:nvSpPr>
+        <p:spPr>
+          <a:xfrm>
+            <a:off x="4645152" y="3913632"/>
+            <a:ext cx="1965960" cy="822960"/>
+          </a:xfrm>
+          <a:prstGeom prst="roundRect">
+            <a:avLst>
+              <a:gd name="adj" fmla="val 8889"/>
+            </a:avLst>
+          </a:prstGeom>
+          <a:solidFill>
+            <a:schemeClr val="bg2"/>
+          </a:solidFill>
+          <a:ln/>
+        </p:spPr>
+      </p:sp>
+      <p:sp>
+        <p:nvSpPr>
+          <p:cNvPr id="61" name="Shape 58"/>
+          <p:cNvSpPr/>
+          <p:nvPr/>
+        </p:nvSpPr>
+        <p:spPr>
+          <a:xfrm>
+            <a:off x="4736592" y="3986784"/>
+            <a:ext cx="137160" cy="137160"/>
+          </a:xfrm>
+          <a:prstGeom prst="ellipse">
+            <a:avLst/>
+          </a:prstGeom>
+          <a:solidFill>
+            <a:schemeClr val="accent2"/>
+          </a:solidFill>
+          <a:ln/>
+        </p:spPr>
+      </p:sp>
+      <p:sp>
+        <p:nvSpPr>
+          <p:cNvPr id="62" name="Text 59"/>
+          <p:cNvSpPr txBox="1"/>
+          <p:nvPr/>
+        </p:nvSpPr>
+        <p:spPr>
+          <a:xfrm>
+            <a:off x="4937760" y="3950208"/>
+            <a:ext cx="1600200" cy="210312"/>
+          </a:xfrm>
+          <a:prstGeom prst="rect">
+            <a:avLst/>
+          </a:prstGeom>
+          <a:noFill/>
+          <a:ln/>
+        </p:spPr>
+        <p:txBody>
+          <a:bodyPr wrap="square" lIns="0" tIns="0" rIns="0" bIns="0" rtlCol="0" anchor="ctr"/>
+          <a:lstStyle/>
+          <a:p>
+            <a:pPr indent="0" marL="0">
+              <a:buNone/>
+            </a:pPr>
+            <a:r>
+              <a:rPr lang="en-US" sz="1050" b="1" dirty="0">
+                <a:solidFill>
+                  <a:schemeClr val="tx1"/>
+                </a:solidFill>
+              </a:rPr>
+              <a:t>Evidence</a:t>
+            </a:r>
+            <a:endParaRPr lang="en-US" sz="1050" dirty="0"/>
+          </a:p>
+        </p:txBody>
+      </p:sp>
+      <p:sp>
+        <p:nvSpPr>
+          <p:cNvPr id="63" name="Text 60"/>
+          <p:cNvSpPr txBox="1"/>
+          <p:nvPr/>
+        </p:nvSpPr>
+        <p:spPr>
+          <a:xfrm>
+            <a:off x="4736592" y="4160520"/>
+            <a:ext cx="1810512" cy="566928"/>
+          </a:xfrm>
+          <a:prstGeom prst="rect">
+            <a:avLst/>
+          </a:prstGeom>
+          <a:noFill/>
+          <a:ln/>
+        </p:spPr>
+        <p:txBody>
+          <a:bodyPr wrap="square" lIns="0" tIns="0" rIns="0" bIns="0" rtlCol="0" anchor="t"/>
+          <a:lstStyle/>
+          <a:p>
+            <a:pPr indent="0" marL="0">
+              <a:buNone/>
+            </a:pPr>
+            <a:r>
+              <a:rPr lang="en-US" sz="900" dirty="0">
+                <a:solidFill>
+                  <a:schemeClr val="tx2"/>
+                </a:solidFill>
+              </a:rPr>
+              <a:t>Hash-chained audit log: each entry names the policy that decided it. Streams live to the dashboard.</a:t>
+            </a:r>
+            <a:endParaRPr lang="en-US" sz="900" dirty="0"/>
+          </a:p>
+        </p:txBody>
+      </p:sp>
+      <p:sp>
+        <p:nvSpPr>
+          <p:cNvPr id="64" name="underneath Fail closed"/>
+          <p:cNvSpPr/>
+          <p:nvPr/>
+        </p:nvSpPr>
+        <p:spPr>
+          <a:xfrm>
+            <a:off x="6739128" y="3913632"/>
+            <a:ext cx="1965960" cy="822960"/>
+          </a:xfrm>
+          <a:prstGeom prst="roundRect">
+            <a:avLst>
+              <a:gd name="adj" fmla="val 8889"/>
+            </a:avLst>
+          </a:prstGeom>
+          <a:solidFill>
+            <a:schemeClr val="bg2"/>
+          </a:solidFill>
+          <a:ln/>
+        </p:spPr>
+      </p:sp>
+      <p:sp>
+        <p:nvSpPr>
+          <p:cNvPr id="65" name="Shape 62"/>
+          <p:cNvSpPr/>
+          <p:nvPr/>
+        </p:nvSpPr>
+        <p:spPr>
+          <a:xfrm>
+            <a:off x="6830568" y="3986784"/>
+            <a:ext cx="137160" cy="137160"/>
+          </a:xfrm>
+          <a:prstGeom prst="ellipse">
+            <a:avLst/>
+          </a:prstGeom>
+          <a:solidFill>
+            <a:schemeClr val="accent3"/>
+          </a:solidFill>
+          <a:ln/>
+        </p:spPr>
+      </p:sp>
+      <p:sp>
+        <p:nvSpPr>
+          <p:cNvPr id="66" name="Text 63"/>
+          <p:cNvSpPr txBox="1"/>
+          <p:nvPr/>
+        </p:nvSpPr>
+        <p:spPr>
+          <a:xfrm>
+            <a:off x="7031736" y="3950208"/>
+            <a:ext cx="1600200" cy="210312"/>
+          </a:xfrm>
+          <a:prstGeom prst="rect">
+            <a:avLst/>
+          </a:prstGeom>
+          <a:noFill/>
+          <a:ln/>
+        </p:spPr>
+        <p:txBody>
+          <a:bodyPr wrap="square" lIns="0" tIns="0" rIns="0" bIns="0" rtlCol="0" anchor="ctr"/>
+          <a:lstStyle/>
+          <a:p>
+            <a:pPr indent="0" marL="0">
+              <a:buNone/>
+            </a:pPr>
+            <a:r>
+              <a:rPr lang="en-US" sz="1050" b="1" dirty="0">
+                <a:solidFill>
+                  <a:schemeClr val="tx1"/>
+                </a:solidFill>
+              </a:rPr>
+              <a:t>Fail closed</a:t>
+            </a:r>
+            <a:endParaRPr lang="en-US" sz="1050" dirty="0"/>
+          </a:p>
+        </p:txBody>
+      </p:sp>
+      <p:sp>
+        <p:nvSpPr>
+          <p:cNvPr id="67" name="Text 64"/>
+          <p:cNvSpPr txBox="1"/>
+          <p:nvPr/>
+        </p:nvSpPr>
+        <p:spPr>
+          <a:xfrm>
+            <a:off x="6830568" y="4160520"/>
+            <a:ext cx="1810512" cy="566928"/>
+          </a:xfrm>
+          <a:prstGeom prst="rect">
+            <a:avLst/>
+          </a:prstGeom>
+          <a:noFill/>
+          <a:ln/>
+        </p:spPr>
+        <p:txBody>
+          <a:bodyPr wrap="square" lIns="0" tIns="0" rIns="0" bIns="0" rtlCol="0" anchor="t"/>
+          <a:lstStyle/>
+          <a:p>
+            <a:pPr indent="0" marL="0">
+              <a:buNone/>
+            </a:pPr>
+            <a:r>
+              <a:rPr lang="en-US" sz="900" dirty="0">
+                <a:solidFill>
+                  <a:schemeClr val="tx2"/>
+                </a:solidFill>
+              </a:rPr>
+              <a:t>A check that errors blocks. A broken policy edit is rejected. 450+ automated tests, no keys needed.</a:t>
+            </a:r>
+            <a:endParaRPr lang="en-US" sz="900" dirty="0"/>
           </a:p>
         </p:txBody>
       </p:sp>
@@ -8189,13 +8984,13 @@
             <a:r>
               <a:rPr lang="en-US" sz="2800" b="1" dirty="0">
                 <a:solidFill>
-                  <a:schemeClr val="bg1"/>
+                  <a:schemeClr val="tx1"/>
                 </a:solidFill>
                 <a:latin typeface="Cambria" pitchFamily="34" charset="0"/>
                 <a:ea typeface="Cambria" pitchFamily="34" charset="-122"/>
                 <a:cs typeface="Cambria" pitchFamily="34" charset="-120"/>
               </a:rPr>
-              <a:t>Three agents, three attacks</a:t>
+              <a:t>Measured, not claimed</a:t>
             </a:r>
             <a:endParaRPr lang="en-US" sz="2800" dirty="0"/>
           </a:p>
@@ -8203,36 +8998,352 @@
       </p:sp>
       <p:sp>
         <p:nvSpPr>
-          <p:cNvPr id="3" name="agent card Olivia"/>
+          <p:cNvPr id="3" name="hero CAUGHT BY THE AI JUDGE"/>
           <p:cNvSpPr/>
           <p:nvPr/>
         </p:nvSpPr>
         <p:spPr>
           <a:xfrm>
             <a:off x="457200" y="1188720"/>
-            <a:ext cx="2651760" cy="2697480"/>
+            <a:ext cx="4023360" cy="1920240"/>
           </a:xfrm>
           <a:prstGeom prst="roundRect">
             <a:avLst>
-              <a:gd name="adj" fmla="val 4138"/>
+              <a:gd name="adj" fmla="val 5714"/>
             </a:avLst>
           </a:prstGeom>
           <a:solidFill>
-            <a:schemeClr val="tx2"/>
+            <a:schemeClr val="bg2"/>
           </a:solidFill>
           <a:ln/>
         </p:spPr>
       </p:sp>
       <p:sp>
         <p:nvSpPr>
-          <p:cNvPr id="4" name="Shape 2"/>
-          <p:cNvSpPr/>
-          <p:nvPr/>
-        </p:nvSpPr>
-        <p:spPr>
-          <a:xfrm>
-            <a:off x="640080" y="1325880"/>
-            <a:ext cx="502920" cy="502920"/>
+          <p:cNvPr id="4" name="Text 2"/>
+          <p:cNvSpPr txBox="1"/>
+          <p:nvPr/>
+        </p:nvSpPr>
+        <p:spPr>
+          <a:xfrm>
+            <a:off x="731520" y="1325880"/>
+            <a:ext cx="3474720" cy="228600"/>
+          </a:xfrm>
+          <a:prstGeom prst="rect">
+            <a:avLst/>
+          </a:prstGeom>
+          <a:noFill/>
+          <a:ln/>
+        </p:spPr>
+        <p:txBody>
+          <a:bodyPr wrap="square" lIns="0" tIns="0" rIns="0" bIns="0" rtlCol="0" anchor="ctr"/>
+          <a:lstStyle/>
+          <a:p>
+            <a:pPr algn="l" indent="0" marL="0">
+              <a:buNone/>
+            </a:pPr>
+            <a:r>
+              <a:rPr lang="en-US" sz="1000" b="1" spc="200" kern="0" dirty="0">
+                <a:solidFill>
+                  <a:schemeClr val="accent2"/>
+                </a:solidFill>
+              </a:rPr>
+              <a:t>CAUGHT BY THE AI JUDGE</a:t>
+            </a:r>
+            <a:endParaRPr lang="en-US" sz="1000" dirty="0"/>
+          </a:p>
+        </p:txBody>
+      </p:sp>
+      <p:sp>
+        <p:nvSpPr>
+          <p:cNvPr id="5" name="Text 3"/>
+          <p:cNvSpPr txBox="1"/>
+          <p:nvPr/>
+        </p:nvSpPr>
+        <p:spPr>
+          <a:xfrm>
+            <a:off x="731520" y="1554480"/>
+            <a:ext cx="3474720" cy="731520"/>
+          </a:xfrm>
+          <a:prstGeom prst="rect">
+            <a:avLst/>
+          </a:prstGeom>
+          <a:noFill/>
+          <a:ln/>
+        </p:spPr>
+        <p:txBody>
+          <a:bodyPr wrap="square" lIns="0" tIns="0" rIns="0" bIns="0" rtlCol="0" anchor="ctr"/>
+          <a:lstStyle/>
+          <a:p>
+            <a:pPr indent="0" marL="0">
+              <a:buNone/>
+            </a:pPr>
+            <a:r>
+              <a:rPr lang="en-US" sz="5000" b="1" dirty="0">
+                <a:solidFill>
+                  <a:schemeClr val="tx1"/>
+                </a:solidFill>
+                <a:latin typeface="Cambria" pitchFamily="34" charset="0"/>
+                <a:ea typeface="Cambria" pitchFamily="34" charset="-122"/>
+                <a:cs typeface="Cambria" pitchFamily="34" charset="-120"/>
+              </a:rPr>
+              <a:t>97.5%</a:t>
+            </a:r>
+            <a:endParaRPr lang="en-US" sz="5000" dirty="0"/>
+          </a:p>
+        </p:txBody>
+      </p:sp>
+      <p:sp>
+        <p:nvSpPr>
+          <p:cNvPr id="6" name="Text 4"/>
+          <p:cNvSpPr txBox="1"/>
+          <p:nvPr/>
+        </p:nvSpPr>
+        <p:spPr>
+          <a:xfrm>
+            <a:off x="731520" y="2286000"/>
+            <a:ext cx="3520440" cy="292608"/>
+          </a:xfrm>
+          <a:prstGeom prst="rect">
+            <a:avLst/>
+          </a:prstGeom>
+          <a:noFill/>
+          <a:ln/>
+        </p:spPr>
+        <p:txBody>
+          <a:bodyPr wrap="square" lIns="0" tIns="0" rIns="0" bIns="0" rtlCol="0" anchor="ctr"/>
+          <a:lstStyle/>
+          <a:p>
+            <a:pPr indent="0" marL="0">
+              <a:buNone/>
+            </a:pPr>
+            <a:r>
+              <a:rPr lang="en-US" sz="1600" b="1" dirty="0">
+                <a:solidFill>
+                  <a:schemeClr val="tx1"/>
+                </a:solidFill>
+              </a:rPr>
+              <a:t>of real data-stealing attacks</a:t>
+            </a:r>
+            <a:endParaRPr lang="en-US" sz="1600" dirty="0"/>
+          </a:p>
+        </p:txBody>
+      </p:sp>
+      <p:sp>
+        <p:nvSpPr>
+          <p:cNvPr id="7" name="Text 5"/>
+          <p:cNvSpPr txBox="1"/>
+          <p:nvPr/>
+        </p:nvSpPr>
+        <p:spPr>
+          <a:xfrm>
+            <a:off x="731520" y="2615184"/>
+            <a:ext cx="3520440" cy="411480"/>
+          </a:xfrm>
+          <a:prstGeom prst="rect">
+            <a:avLst/>
+          </a:prstGeom>
+          <a:noFill/>
+          <a:ln/>
+        </p:spPr>
+        <p:txBody>
+          <a:bodyPr wrap="square" lIns="0" tIns="0" rIns="0" bIns="0" rtlCol="0" anchor="t"/>
+          <a:lstStyle/>
+          <a:p>
+            <a:pPr indent="0" marL="0">
+              <a:buNone/>
+            </a:pPr>
+            <a:r>
+              <a:rPr lang="en-US" sz="1200" dirty="0">
+                <a:solidFill>
+                  <a:schemeClr val="tx2"/>
+                </a:solidFill>
+              </a:rPr>
+              <a:t>Tested on 519 real attacks that stole data (Microsoft LLMail-Inject)</a:t>
+            </a:r>
+            <a:endParaRPr lang="en-US" sz="1200" dirty="0"/>
+          </a:p>
+        </p:txBody>
+      </p:sp>
+      <p:sp>
+        <p:nvSpPr>
+          <p:cNvPr id="8" name="hero FALSE ALARMS, SAME SETTING"/>
+          <p:cNvSpPr/>
+          <p:nvPr/>
+        </p:nvSpPr>
+        <p:spPr>
+          <a:xfrm>
+            <a:off x="4663440" y="1188720"/>
+            <a:ext cx="4023360" cy="1920240"/>
+          </a:xfrm>
+          <a:prstGeom prst="roundRect">
+            <a:avLst>
+              <a:gd name="adj" fmla="val 5714"/>
+            </a:avLst>
+          </a:prstGeom>
+          <a:solidFill>
+            <a:schemeClr val="bg2"/>
+          </a:solidFill>
+          <a:ln/>
+        </p:spPr>
+      </p:sp>
+      <p:sp>
+        <p:nvSpPr>
+          <p:cNvPr id="9" name="Text 7"/>
+          <p:cNvSpPr txBox="1"/>
+          <p:nvPr/>
+        </p:nvSpPr>
+        <p:spPr>
+          <a:xfrm>
+            <a:off x="4937760" y="1325880"/>
+            <a:ext cx="3474720" cy="228600"/>
+          </a:xfrm>
+          <a:prstGeom prst="rect">
+            <a:avLst/>
+          </a:prstGeom>
+          <a:noFill/>
+          <a:ln/>
+        </p:spPr>
+        <p:txBody>
+          <a:bodyPr wrap="square" lIns="0" tIns="0" rIns="0" bIns="0" rtlCol="0" anchor="ctr"/>
+          <a:lstStyle/>
+          <a:p>
+            <a:pPr algn="l" indent="0" marL="0">
+              <a:buNone/>
+            </a:pPr>
+            <a:r>
+              <a:rPr lang="en-US" sz="1000" b="1" spc="200" kern="0" dirty="0">
+                <a:solidFill>
+                  <a:schemeClr val="accent2"/>
+                </a:solidFill>
+              </a:rPr>
+              <a:t>FALSE ALARMS, SAME SETTING</a:t>
+            </a:r>
+            <a:endParaRPr lang="en-US" sz="1000" dirty="0"/>
+          </a:p>
+        </p:txBody>
+      </p:sp>
+      <p:sp>
+        <p:nvSpPr>
+          <p:cNvPr id="10" name="Text 8"/>
+          <p:cNvSpPr txBox="1"/>
+          <p:nvPr/>
+        </p:nvSpPr>
+        <p:spPr>
+          <a:xfrm>
+            <a:off x="4937760" y="1554480"/>
+            <a:ext cx="3474720" cy="731520"/>
+          </a:xfrm>
+          <a:prstGeom prst="rect">
+            <a:avLst/>
+          </a:prstGeom>
+          <a:noFill/>
+          <a:ln/>
+        </p:spPr>
+        <p:txBody>
+          <a:bodyPr wrap="square" lIns="0" tIns="0" rIns="0" bIns="0" rtlCol="0" anchor="ctr"/>
+          <a:lstStyle/>
+          <a:p>
+            <a:pPr indent="0" marL="0">
+              <a:buNone/>
+            </a:pPr>
+            <a:r>
+              <a:rPr lang="en-US" sz="5000" b="1" dirty="0">
+                <a:solidFill>
+                  <a:schemeClr val="tx1"/>
+                </a:solidFill>
+                <a:latin typeface="Cambria" pitchFamily="34" charset="0"/>
+                <a:ea typeface="Cambria" pitchFamily="34" charset="-122"/>
+                <a:cs typeface="Cambria" pitchFamily="34" charset="-120"/>
+              </a:rPr>
+              <a:t>0%</a:t>
+            </a:r>
+            <a:endParaRPr lang="en-US" sz="5000" dirty="0"/>
+          </a:p>
+        </p:txBody>
+      </p:sp>
+      <p:sp>
+        <p:nvSpPr>
+          <p:cNvPr id="11" name="Text 9"/>
+          <p:cNvSpPr txBox="1"/>
+          <p:nvPr/>
+        </p:nvSpPr>
+        <p:spPr>
+          <a:xfrm>
+            <a:off x="4937760" y="2286000"/>
+            <a:ext cx="3520440" cy="292608"/>
+          </a:xfrm>
+          <a:prstGeom prst="rect">
+            <a:avLst/>
+          </a:prstGeom>
+          <a:noFill/>
+          <a:ln/>
+        </p:spPr>
+        <p:txBody>
+          <a:bodyPr wrap="square" lIns="0" tIns="0" rIns="0" bIns="0" rtlCol="0" anchor="ctr"/>
+          <a:lstStyle/>
+          <a:p>
+            <a:pPr indent="0" marL="0">
+              <a:buNone/>
+            </a:pPr>
+            <a:r>
+              <a:rPr lang="en-US" sz="1600" b="1" dirty="0">
+                <a:solidFill>
+                  <a:schemeClr val="tx1"/>
+                </a:solidFill>
+              </a:rPr>
+              <a:t>of harmless prompts flagged</a:t>
+            </a:r>
+            <a:endParaRPr lang="en-US" sz="1600" dirty="0"/>
+          </a:p>
+        </p:txBody>
+      </p:sp>
+      <p:sp>
+        <p:nvSpPr>
+          <p:cNvPr id="12" name="Text 10"/>
+          <p:cNvSpPr txBox="1"/>
+          <p:nvPr/>
+        </p:nvSpPr>
+        <p:spPr>
+          <a:xfrm>
+            <a:off x="4937760" y="2615184"/>
+            <a:ext cx="3520440" cy="411480"/>
+          </a:xfrm>
+          <a:prstGeom prst="rect">
+            <a:avLst/>
+          </a:prstGeom>
+          <a:noFill/>
+          <a:ln/>
+        </p:spPr>
+        <p:txBody>
+          <a:bodyPr wrap="square" lIns="0" tIns="0" rIns="0" bIns="0" rtlCol="0" anchor="t"/>
+          <a:lstStyle/>
+          <a:p>
+            <a:pPr indent="0" marL="0">
+              <a:buNone/>
+            </a:pPr>
+            <a:r>
+              <a:rPr lang="en-US" sz="1200" dirty="0">
+                <a:solidFill>
+                  <a:schemeClr val="tx2"/>
+                </a:solidFill>
+              </a:rPr>
+              <a:t>0 of 993 real bank customer questions (banking77)</a:t>
+            </a:r>
+            <a:endParaRPr lang="en-US" sz="1200" dirty="0"/>
+          </a:p>
+        </p:txBody>
+      </p:sp>
+      <p:sp>
+        <p:nvSpPr>
+          <p:cNvPr id="13" name="Shape 11"/>
+          <p:cNvSpPr/>
+          <p:nvPr/>
+        </p:nvSpPr>
+        <p:spPr>
+          <a:xfrm>
+            <a:off x="4315968" y="1947672"/>
+            <a:ext cx="512064" cy="512064"/>
           </a:xfrm>
           <a:prstGeom prst="ellipse">
             <a:avLst/>
@@ -8240,43 +9351,24 @@
           <a:solidFill>
             <a:schemeClr val="accent1"/>
           </a:solidFill>
-          <a:ln/>
-        </p:spPr>
-      </p:sp>
-      <p:pic>
-        <p:nvPicPr>
-          <p:cNvPr id="5" name="Image 0" descr="preencoded.png">    </p:cNvPr>
-          <p:cNvPicPr>
-            <a:picLocks noChangeAspect="1"/>
-          </p:cNvPicPr>
-          <p:nvPr/>
-        </p:nvPicPr>
-        <p:blipFill>
-          <a:blip r:embed="rId1"/>
-          <a:stretch>
-            <a:fillRect/>
-          </a:stretch>
-        </p:blipFill>
-        <p:spPr>
-          <a:xfrm>
-            <a:off x="765810" y="1451610"/>
-            <a:ext cx="251460" cy="251460"/>
-          </a:xfrm>
-          <a:prstGeom prst="rect">
-            <a:avLst/>
-          </a:prstGeom>
-        </p:spPr>
-      </p:pic>
-      <p:sp>
-        <p:nvSpPr>
-          <p:cNvPr id="6" name="Text 3"/>
-          <p:cNvSpPr txBox="1"/>
-          <p:nvPr/>
-        </p:nvSpPr>
-        <p:spPr>
-          <a:xfrm>
-            <a:off x="1280160" y="1307592"/>
-            <a:ext cx="1737360" cy="301752"/>
+          <a:ln w="38100">
+            <a:solidFill>
+              <a:schemeClr val="bg1"/>
+            </a:solidFill>
+            <a:prstDash val="solid"/>
+          </a:ln>
+        </p:spPr>
+      </p:sp>
+      <p:sp>
+        <p:nvSpPr>
+          <p:cNvPr id="14" name="Text 12"/>
+          <p:cNvSpPr txBox="1"/>
+          <p:nvPr/>
+        </p:nvSpPr>
+        <p:spPr>
+          <a:xfrm>
+            <a:off x="4315968" y="1947672"/>
+            <a:ext cx="512064" cy="512064"/>
           </a:xfrm>
           <a:prstGeom prst="rect">
             <a:avLst/>
@@ -8288,43 +9380,106 @@
           <a:bodyPr wrap="square" lIns="0" tIns="0" rIns="0" bIns="0" rtlCol="0" anchor="ctr"/>
           <a:lstStyle/>
           <a:p>
+            <a:pPr algn="ctr" indent="0" marL="0">
+              <a:buNone/>
+            </a:pPr>
+            <a:r>
+              <a:rPr lang="en-US" sz="2200" b="1" dirty="0">
+                <a:solidFill>
+                  <a:schemeClr val="tx1"/>
+                </a:solidFill>
+              </a:rPr>
+              <a:t>+</a:t>
+            </a:r>
+            <a:endParaRPr lang="en-US" sz="2200" dirty="0"/>
+          </a:p>
+        </p:txBody>
+      </p:sp>
+      <p:sp>
+        <p:nvSpPr>
+          <p:cNvPr id="15" name="tile 4/4 → 0/4"/>
+          <p:cNvSpPr/>
+          <p:nvPr/>
+        </p:nvSpPr>
+        <p:spPr>
+          <a:xfrm>
+            <a:off x="457200" y="3291840"/>
+            <a:ext cx="2615184" cy="960120"/>
+          </a:xfrm>
+          <a:prstGeom prst="roundRect">
+            <a:avLst>
+              <a:gd name="adj" fmla="val 9524"/>
+            </a:avLst>
+          </a:prstGeom>
+          <a:solidFill>
+            <a:schemeClr val="bg1"/>
+          </a:solidFill>
+          <a:ln w="12700">
+            <a:solidFill>
+              <a:srgbClr val="C9D2DF"/>
+            </a:solidFill>
+            <a:prstDash val="solid"/>
+          </a:ln>
+        </p:spPr>
+      </p:sp>
+      <p:sp>
+        <p:nvSpPr>
+          <p:cNvPr id="16" name="Text 14"/>
+          <p:cNvSpPr txBox="1"/>
+          <p:nvPr/>
+        </p:nvSpPr>
+        <p:spPr>
+          <a:xfrm>
+            <a:off x="640080" y="3364992"/>
+            <a:ext cx="2286000" cy="384048"/>
+          </a:xfrm>
+          <a:prstGeom prst="rect">
+            <a:avLst/>
+          </a:prstGeom>
+          <a:noFill/>
+          <a:ln/>
+        </p:spPr>
+        <p:txBody>
+          <a:bodyPr wrap="square" lIns="0" tIns="0" rIns="0" bIns="0" rtlCol="0" anchor="ctr"/>
+          <a:lstStyle/>
+          <a:p>
             <a:pPr indent="0" marL="0">
               <a:buNone/>
             </a:pPr>
             <a:r>
-              <a:rPr lang="en-US" sz="1800" b="1" dirty="0">
-                <a:solidFill>
-                  <a:schemeClr val="bg1"/>
+              <a:rPr lang="en-US" sz="2200" b="1" dirty="0">
+                <a:solidFill>
+                  <a:schemeClr val="tx1"/>
                 </a:solidFill>
                 <a:latin typeface="Cambria" pitchFamily="34" charset="0"/>
                 <a:ea typeface="Cambria" pitchFamily="34" charset="-122"/>
                 <a:cs typeface="Cambria" pitchFamily="34" charset="-120"/>
               </a:rPr>
-              <a:t>Olivia</a:t>
-            </a:r>
-            <a:endParaRPr lang="en-US" sz="1800" dirty="0"/>
-          </a:p>
-        </p:txBody>
-      </p:sp>
-      <p:sp>
-        <p:nvSpPr>
-          <p:cNvPr id="7" name="Text 4"/>
-          <p:cNvSpPr txBox="1"/>
-          <p:nvPr/>
-        </p:nvSpPr>
-        <p:spPr>
-          <a:xfrm>
-            <a:off x="1280160" y="1609344"/>
-            <a:ext cx="1783080" cy="246888"/>
-          </a:xfrm>
-          <a:prstGeom prst="rect">
-            <a:avLst/>
-          </a:prstGeom>
-          <a:noFill/>
-          <a:ln/>
-        </p:spPr>
-        <p:txBody>
-          <a:bodyPr wrap="square" lIns="0" tIns="0" rIns="0" bIns="0" rtlCol="0" anchor="ctr"/>
+              <a:t>4/4 → 0/4</a:t>
+            </a:r>
+            <a:endParaRPr lang="en-US" sz="2200" dirty="0"/>
+          </a:p>
+        </p:txBody>
+      </p:sp>
+      <p:sp>
+        <p:nvSpPr>
+          <p:cNvPr id="17" name="Text 15"/>
+          <p:cNvSpPr txBox="1"/>
+          <p:nvPr/>
+        </p:nvSpPr>
+        <p:spPr>
+          <a:xfrm>
+            <a:off x="640080" y="3767328"/>
+            <a:ext cx="2286000" cy="438912"/>
+          </a:xfrm>
+          <a:prstGeom prst="rect">
+            <a:avLst/>
+          </a:prstGeom>
+          <a:noFill/>
+          <a:ln/>
+        </p:spPr>
+        <p:txBody>
+          <a:bodyPr wrap="square" lIns="0" tIns="0" rIns="0" bIns="0" rtlCol="0" anchor="t"/>
           <a:lstStyle/>
           <a:p>
             <a:pPr indent="0" marL="0">
@@ -8333,10 +9488,10 @@
             <a:r>
               <a:rPr lang="en-US" sz="1100" dirty="0">
                 <a:solidFill>
-                  <a:schemeClr val="accent5"/>
-                </a:solidFill>
-              </a:rPr>
-              <a:t>Onboarding analyst</a:t>
+                  <a:schemeClr val="tx2"/>
+                </a:solidFill>
+              </a:rPr>
+              <a:t>client-data leaks, even when the judge misses</a:t>
             </a:r>
             <a:endParaRPr lang="en-US" sz="1100" dirty="0"/>
           </a:p>
@@ -8344,224 +9499,41 @@
       </p:sp>
       <p:sp>
         <p:nvSpPr>
-          <p:cNvPr id="8" name="Text 5"/>
-          <p:cNvSpPr txBox="1"/>
-          <p:nvPr/>
-        </p:nvSpPr>
-        <p:spPr>
-          <a:xfrm>
-            <a:off x="640080" y="2011680"/>
-            <a:ext cx="2286000" cy="228600"/>
-          </a:xfrm>
-          <a:prstGeom prst="rect">
-            <a:avLst/>
-          </a:prstGeom>
-          <a:noFill/>
-          <a:ln/>
-        </p:spPr>
-        <p:txBody>
-          <a:bodyPr wrap="square" lIns="0" tIns="0" rIns="0" bIns="0" rtlCol="0" anchor="ctr"/>
-          <a:lstStyle/>
-          <a:p>
-            <a:pPr algn="l" indent="0" marL="0">
-              <a:buNone/>
-            </a:pPr>
-            <a:r>
-              <a:rPr lang="en-US" sz="1000" b="1" spc="200" kern="0" dirty="0">
-                <a:solidFill>
-                  <a:schemeClr val="accent3"/>
-                </a:solidFill>
-              </a:rPr>
-              <a:t>ATTACK</a:t>
-            </a:r>
-            <a:endParaRPr lang="en-US" sz="1000" dirty="0"/>
-          </a:p>
-        </p:txBody>
-      </p:sp>
-      <p:sp>
-        <p:nvSpPr>
-          <p:cNvPr id="9" name="Text 6"/>
-          <p:cNvSpPr txBox="1"/>
-          <p:nvPr/>
-        </p:nvSpPr>
-        <p:spPr>
-          <a:xfrm>
-            <a:off x="640080" y="2240280"/>
-            <a:ext cx="2331720" cy="457200"/>
-          </a:xfrm>
-          <a:prstGeom prst="rect">
-            <a:avLst/>
-          </a:prstGeom>
-          <a:noFill/>
-          <a:ln/>
-        </p:spPr>
-        <p:txBody>
-          <a:bodyPr wrap="square" lIns="0" tIns="0" rIns="0" bIns="0" rtlCol="0" anchor="t"/>
-          <a:lstStyle/>
-          <a:p>
-            <a:pPr indent="0" marL="0">
-              <a:buNone/>
-            </a:pPr>
-            <a:r>
-              <a:rPr lang="en-US" sz="1400" dirty="0">
-                <a:solidFill>
-                  <a:schemeClr val="bg1"/>
-                </a:solidFill>
-              </a:rPr>
-              <a:t>Poisoned client document</a:t>
-            </a:r>
-            <a:endParaRPr lang="en-US" sz="1400" dirty="0"/>
-          </a:p>
-        </p:txBody>
-      </p:sp>
-      <p:sp>
-        <p:nvSpPr>
-          <p:cNvPr id="10" name="Text 7"/>
-          <p:cNvSpPr txBox="1"/>
-          <p:nvPr/>
-        </p:nvSpPr>
-        <p:spPr>
-          <a:xfrm>
-            <a:off x="640080" y="2788920"/>
-            <a:ext cx="2286000" cy="228600"/>
-          </a:xfrm>
-          <a:prstGeom prst="rect">
-            <a:avLst/>
-          </a:prstGeom>
-          <a:noFill/>
-          <a:ln/>
-        </p:spPr>
-        <p:txBody>
-          <a:bodyPr wrap="square" lIns="0" tIns="0" rIns="0" bIns="0" rtlCol="0" anchor="ctr"/>
-          <a:lstStyle/>
-          <a:p>
-            <a:pPr algn="l" indent="0" marL="0">
-              <a:buNone/>
-            </a:pPr>
-            <a:r>
-              <a:rPr lang="en-US" sz="1000" b="1" spc="200" kern="0" dirty="0">
-                <a:solidFill>
-                  <a:schemeClr val="accent2"/>
-                </a:solidFill>
-              </a:rPr>
-              <a:t>RESULT</a:t>
-            </a:r>
-            <a:endParaRPr lang="en-US" sz="1000" dirty="0"/>
-          </a:p>
-        </p:txBody>
-      </p:sp>
-      <p:sp>
-        <p:nvSpPr>
-          <p:cNvPr id="11" name="Text 8"/>
-          <p:cNvSpPr txBox="1"/>
-          <p:nvPr/>
-        </p:nvSpPr>
-        <p:spPr>
-          <a:xfrm>
-            <a:off x="640080" y="3017520"/>
-            <a:ext cx="2331720" cy="777240"/>
-          </a:xfrm>
-          <a:prstGeom prst="rect">
-            <a:avLst/>
-          </a:prstGeom>
-          <a:noFill/>
-          <a:ln/>
-        </p:spPr>
-        <p:txBody>
-          <a:bodyPr wrap="square" lIns="0" tIns="0" rIns="0" bIns="0" rtlCol="0" anchor="t"/>
-          <a:lstStyle/>
-          <a:p>
-            <a:pPr indent="0" marL="0">
-              <a:buNone/>
-            </a:pPr>
-            <a:r>
-              <a:rPr lang="en-US" sz="1400" b="1" dirty="0">
-                <a:solidFill>
-                  <a:schemeClr val="bg1"/>
-                </a:solidFill>
-              </a:rPr>
-              <a:t>Field quarantined. Passport only to the sanctions check.</a:t>
-            </a:r>
-            <a:endParaRPr lang="en-US" sz="1400" dirty="0"/>
-          </a:p>
-        </p:txBody>
-      </p:sp>
-      <p:sp>
-        <p:nvSpPr>
-          <p:cNvPr id="12" name="agent card Marcus"/>
-          <p:cNvSpPr/>
-          <p:nvPr/>
-        </p:nvSpPr>
-        <p:spPr>
-          <a:xfrm>
-            <a:off x="3291840" y="1188720"/>
-            <a:ext cx="2651760" cy="2697480"/>
+          <p:cNvPr id="18" name="tile 450+"/>
+          <p:cNvSpPr/>
+          <p:nvPr/>
+        </p:nvSpPr>
+        <p:spPr>
+          <a:xfrm>
+            <a:off x="3264408" y="3291840"/>
+            <a:ext cx="2615184" cy="960120"/>
           </a:xfrm>
           <a:prstGeom prst="roundRect">
             <a:avLst>
-              <a:gd name="adj" fmla="val 4138"/>
+              <a:gd name="adj" fmla="val 9524"/>
             </a:avLst>
           </a:prstGeom>
           <a:solidFill>
-            <a:schemeClr val="tx2"/>
+            <a:schemeClr val="bg1"/>
           </a:solidFill>
-          <a:ln/>
-        </p:spPr>
-      </p:sp>
-      <p:sp>
-        <p:nvSpPr>
-          <p:cNvPr id="13" name="Shape 10"/>
-          <p:cNvSpPr/>
-          <p:nvPr/>
-        </p:nvSpPr>
-        <p:spPr>
-          <a:xfrm>
-            <a:off x="3474720" y="1325880"/>
-            <a:ext cx="502920" cy="502920"/>
-          </a:xfrm>
-          <a:prstGeom prst="ellipse">
-            <a:avLst/>
-          </a:prstGeom>
-          <a:solidFill>
-            <a:schemeClr val="accent1"/>
-          </a:solidFill>
-          <a:ln/>
-        </p:spPr>
-      </p:sp>
-      <p:pic>
-        <p:nvPicPr>
-          <p:cNvPr id="14" name="Image 1" descr="preencoded.png">    </p:cNvPr>
-          <p:cNvPicPr>
-            <a:picLocks noChangeAspect="1"/>
-          </p:cNvPicPr>
-          <p:nvPr/>
-        </p:nvPicPr>
-        <p:blipFill>
-          <a:blip r:embed="rId2"/>
-          <a:stretch>
-            <a:fillRect/>
-          </a:stretch>
-        </p:blipFill>
-        <p:spPr>
-          <a:xfrm>
-            <a:off x="3600450" y="1451610"/>
-            <a:ext cx="251460" cy="251460"/>
-          </a:xfrm>
-          <a:prstGeom prst="rect">
-            <a:avLst/>
-          </a:prstGeom>
-        </p:spPr>
-      </p:pic>
-      <p:sp>
-        <p:nvSpPr>
-          <p:cNvPr id="15" name="Text 11"/>
-          <p:cNvSpPr txBox="1"/>
-          <p:nvPr/>
-        </p:nvSpPr>
-        <p:spPr>
-          <a:xfrm>
-            <a:off x="4114800" y="1307592"/>
-            <a:ext cx="1737360" cy="301752"/>
+          <a:ln w="12700">
+            <a:solidFill>
+              <a:srgbClr val="C9D2DF"/>
+            </a:solidFill>
+            <a:prstDash val="solid"/>
+          </a:ln>
+        </p:spPr>
+      </p:sp>
+      <p:sp>
+        <p:nvSpPr>
+          <p:cNvPr id="19" name="Text 17"/>
+          <p:cNvSpPr txBox="1"/>
+          <p:nvPr/>
+        </p:nvSpPr>
+        <p:spPr>
+          <a:xfrm>
+            <a:off x="3447288" y="3364992"/>
+            <a:ext cx="2286000" cy="384048"/>
           </a:xfrm>
           <a:prstGeom prst="rect">
             <a:avLst/>
@@ -8577,39 +9549,39 @@
               <a:buNone/>
             </a:pPr>
             <a:r>
-              <a:rPr lang="en-US" sz="1800" b="1" dirty="0">
-                <a:solidFill>
-                  <a:schemeClr val="bg1"/>
+              <a:rPr lang="en-US" sz="2200" b="1" dirty="0">
+                <a:solidFill>
+                  <a:schemeClr val="tx1"/>
                 </a:solidFill>
                 <a:latin typeface="Cambria" pitchFamily="34" charset="0"/>
                 <a:ea typeface="Cambria" pitchFamily="34" charset="-122"/>
                 <a:cs typeface="Cambria" pitchFamily="34" charset="-120"/>
               </a:rPr>
-              <a:t>Marcus</a:t>
-            </a:r>
-            <a:endParaRPr lang="en-US" sz="1800" dirty="0"/>
-          </a:p>
-        </p:txBody>
-      </p:sp>
-      <p:sp>
-        <p:nvSpPr>
-          <p:cNvPr id="16" name="Text 12"/>
-          <p:cNvSpPr txBox="1"/>
-          <p:nvPr/>
-        </p:nvSpPr>
-        <p:spPr>
-          <a:xfrm>
-            <a:off x="4114800" y="1609344"/>
-            <a:ext cx="1783080" cy="246888"/>
-          </a:xfrm>
-          <a:prstGeom prst="rect">
-            <a:avLst/>
-          </a:prstGeom>
-          <a:noFill/>
-          <a:ln/>
-        </p:spPr>
-        <p:txBody>
-          <a:bodyPr wrap="square" lIns="0" tIns="0" rIns="0" bIns="0" rtlCol="0" anchor="ctr"/>
+              <a:t>450+</a:t>
+            </a:r>
+            <a:endParaRPr lang="en-US" sz="2200" dirty="0"/>
+          </a:p>
+        </p:txBody>
+      </p:sp>
+      <p:sp>
+        <p:nvSpPr>
+          <p:cNvPr id="20" name="Text 18"/>
+          <p:cNvSpPr txBox="1"/>
+          <p:nvPr/>
+        </p:nvSpPr>
+        <p:spPr>
+          <a:xfrm>
+            <a:off x="3447288" y="3767328"/>
+            <a:ext cx="2286000" cy="438912"/>
+          </a:xfrm>
+          <a:prstGeom prst="rect">
+            <a:avLst/>
+          </a:prstGeom>
+          <a:noFill/>
+          <a:ln/>
+        </p:spPr>
+        <p:txBody>
+          <a:bodyPr wrap="square" lIns="0" tIns="0" rIns="0" bIns="0" rtlCol="0" anchor="t"/>
           <a:lstStyle/>
           <a:p>
             <a:pPr indent="0" marL="0">
@@ -8618,10 +9590,10 @@
             <a:r>
               <a:rPr lang="en-US" sz="1100" dirty="0">
                 <a:solidFill>
-                  <a:schemeClr val="accent5"/>
-                </a:solidFill>
-              </a:rPr>
-              <a:t>Deal team banker</a:t>
+                  <a:schemeClr val="tx2"/>
+                </a:solidFill>
+              </a:rPr>
+              <a:t>automated tests, offline, no keys, on every push</a:t>
             </a:r>
             <a:endParaRPr lang="en-US" sz="1100" dirty="0"/>
           </a:p>
@@ -8629,224 +9601,41 @@
       </p:sp>
       <p:sp>
         <p:nvSpPr>
-          <p:cNvPr id="17" name="Text 13"/>
-          <p:cNvSpPr txBox="1"/>
-          <p:nvPr/>
-        </p:nvSpPr>
-        <p:spPr>
-          <a:xfrm>
-            <a:off x="3474720" y="2011680"/>
-            <a:ext cx="2286000" cy="228600"/>
-          </a:xfrm>
-          <a:prstGeom prst="rect">
-            <a:avLst/>
-          </a:prstGeom>
-          <a:noFill/>
-          <a:ln/>
-        </p:spPr>
-        <p:txBody>
-          <a:bodyPr wrap="square" lIns="0" tIns="0" rIns="0" bIns="0" rtlCol="0" anchor="ctr"/>
-          <a:lstStyle/>
-          <a:p>
-            <a:pPr algn="l" indent="0" marL="0">
-              <a:buNone/>
-            </a:pPr>
-            <a:r>
-              <a:rPr lang="en-US" sz="1000" b="1" spc="200" kern="0" dirty="0">
-                <a:solidFill>
-                  <a:schemeClr val="accent3"/>
-                </a:solidFill>
-              </a:rPr>
-              <a:t>ATTACK</a:t>
-            </a:r>
-            <a:endParaRPr lang="en-US" sz="1000" dirty="0"/>
-          </a:p>
-        </p:txBody>
-      </p:sp>
-      <p:sp>
-        <p:nvSpPr>
-          <p:cNvPr id="18" name="Text 14"/>
-          <p:cNvSpPr txBox="1"/>
-          <p:nvPr/>
-        </p:nvSpPr>
-        <p:spPr>
-          <a:xfrm>
-            <a:off x="3474720" y="2240280"/>
-            <a:ext cx="2331720" cy="457200"/>
-          </a:xfrm>
-          <a:prstGeom prst="rect">
-            <a:avLst/>
-          </a:prstGeom>
-          <a:noFill/>
-          <a:ln/>
-        </p:spPr>
-        <p:txBody>
-          <a:bodyPr wrap="square" lIns="0" tIns="0" rIns="0" bIns="0" rtlCol="0" anchor="t"/>
-          <a:lstStyle/>
-          <a:p>
-            <a:pPr indent="0" marL="0">
-              <a:buNone/>
-            </a:pPr>
-            <a:r>
-              <a:rPr lang="en-US" sz="1400" dirty="0">
-                <a:solidFill>
-                  <a:schemeClr val="bg1"/>
-                </a:solidFill>
-              </a:rPr>
-              <a:t>Deal memo sent outside</a:t>
-            </a:r>
-            <a:endParaRPr lang="en-US" sz="1400" dirty="0"/>
-          </a:p>
-        </p:txBody>
-      </p:sp>
-      <p:sp>
-        <p:nvSpPr>
-          <p:cNvPr id="19" name="Text 15"/>
-          <p:cNvSpPr txBox="1"/>
-          <p:nvPr/>
-        </p:nvSpPr>
-        <p:spPr>
-          <a:xfrm>
-            <a:off x="3474720" y="2788920"/>
-            <a:ext cx="2286000" cy="228600"/>
-          </a:xfrm>
-          <a:prstGeom prst="rect">
-            <a:avLst/>
-          </a:prstGeom>
-          <a:noFill/>
-          <a:ln/>
-        </p:spPr>
-        <p:txBody>
-          <a:bodyPr wrap="square" lIns="0" tIns="0" rIns="0" bIns="0" rtlCol="0" anchor="ctr"/>
-          <a:lstStyle/>
-          <a:p>
-            <a:pPr algn="l" indent="0" marL="0">
-              <a:buNone/>
-            </a:pPr>
-            <a:r>
-              <a:rPr lang="en-US" sz="1000" b="1" spc="200" kern="0" dirty="0">
-                <a:solidFill>
-                  <a:schemeClr val="accent2"/>
-                </a:solidFill>
-              </a:rPr>
-              <a:t>RESULT</a:t>
-            </a:r>
-            <a:endParaRPr lang="en-US" sz="1000" dirty="0"/>
-          </a:p>
-        </p:txBody>
-      </p:sp>
-      <p:sp>
-        <p:nvSpPr>
-          <p:cNvPr id="20" name="Text 16"/>
-          <p:cNvSpPr txBox="1"/>
-          <p:nvPr/>
-        </p:nvSpPr>
-        <p:spPr>
-          <a:xfrm>
-            <a:off x="3474720" y="3017520"/>
-            <a:ext cx="2331720" cy="777240"/>
-          </a:xfrm>
-          <a:prstGeom prst="rect">
-            <a:avLst/>
-          </a:prstGeom>
-          <a:noFill/>
-          <a:ln/>
-        </p:spPr>
-        <p:txBody>
-          <a:bodyPr wrap="square" lIns="0" tIns="0" rIns="0" bIns="0" rtlCol="0" anchor="t"/>
-          <a:lstStyle/>
-          <a:p>
-            <a:pPr indent="0" marL="0">
-              <a:buNone/>
-            </a:pPr>
-            <a:r>
-              <a:rPr lang="en-US" sz="1400" b="1" dirty="0">
-                <a:solidFill>
-                  <a:schemeClr val="bg1"/>
-                </a:solidFill>
-              </a:rPr>
-              <a:t>Blocked. The public side never learns it exists.</a:t>
-            </a:r>
-            <a:endParaRPr lang="en-US" sz="1400" dirty="0"/>
-          </a:p>
-        </p:txBody>
-      </p:sp>
-      <p:sp>
-        <p:nvSpPr>
-          <p:cNvPr id="21" name="agent card Devon"/>
-          <p:cNvSpPr/>
-          <p:nvPr/>
-        </p:nvSpPr>
-        <p:spPr>
-          <a:xfrm>
-            <a:off x="6126480" y="1188720"/>
-            <a:ext cx="2651760" cy="2697480"/>
+          <p:cNvPr id="21" name="tile &lt;0.02 ms"/>
+          <p:cNvSpPr/>
+          <p:nvPr/>
+        </p:nvSpPr>
+        <p:spPr>
+          <a:xfrm>
+            <a:off x="6071616" y="3291840"/>
+            <a:ext cx="2615184" cy="960120"/>
           </a:xfrm>
           <a:prstGeom prst="roundRect">
             <a:avLst>
-              <a:gd name="adj" fmla="val 4138"/>
+              <a:gd name="adj" fmla="val 9524"/>
             </a:avLst>
           </a:prstGeom>
           <a:solidFill>
-            <a:schemeClr val="tx2"/>
+            <a:schemeClr val="bg1"/>
           </a:solidFill>
-          <a:ln/>
-        </p:spPr>
-      </p:sp>
-      <p:sp>
-        <p:nvSpPr>
-          <p:cNvPr id="22" name="Shape 18"/>
-          <p:cNvSpPr/>
-          <p:nvPr/>
-        </p:nvSpPr>
-        <p:spPr>
-          <a:xfrm>
-            <a:off x="6309360" y="1325880"/>
-            <a:ext cx="502920" cy="502920"/>
-          </a:xfrm>
-          <a:prstGeom prst="ellipse">
-            <a:avLst/>
-          </a:prstGeom>
-          <a:solidFill>
-            <a:schemeClr val="accent1"/>
-          </a:solidFill>
-          <a:ln/>
-        </p:spPr>
-      </p:sp>
-      <p:pic>
-        <p:nvPicPr>
-          <p:cNvPr id="23" name="Image 2" descr="preencoded.png">    </p:cNvPr>
-          <p:cNvPicPr>
-            <a:picLocks noChangeAspect="1"/>
-          </p:cNvPicPr>
-          <p:nvPr/>
-        </p:nvPicPr>
-        <p:blipFill>
-          <a:blip r:embed="rId3"/>
-          <a:stretch>
-            <a:fillRect/>
-          </a:stretch>
-        </p:blipFill>
-        <p:spPr>
-          <a:xfrm>
-            <a:off x="6435090" y="1451610"/>
-            <a:ext cx="251460" cy="251460"/>
-          </a:xfrm>
-          <a:prstGeom prst="rect">
-            <a:avLst/>
-          </a:prstGeom>
-        </p:spPr>
-      </p:pic>
-      <p:sp>
-        <p:nvSpPr>
-          <p:cNvPr id="24" name="Text 19"/>
-          <p:cNvSpPr txBox="1"/>
-          <p:nvPr/>
-        </p:nvSpPr>
-        <p:spPr>
-          <a:xfrm>
-            <a:off x="6949440" y="1307592"/>
-            <a:ext cx="1737360" cy="301752"/>
+          <a:ln w="12700">
+            <a:solidFill>
+              <a:srgbClr val="C9D2DF"/>
+            </a:solidFill>
+            <a:prstDash val="solid"/>
+          </a:ln>
+        </p:spPr>
+      </p:sp>
+      <p:sp>
+        <p:nvSpPr>
+          <p:cNvPr id="22" name="Text 20"/>
+          <p:cNvSpPr txBox="1"/>
+          <p:nvPr/>
+        </p:nvSpPr>
+        <p:spPr>
+          <a:xfrm>
+            <a:off x="6254496" y="3364992"/>
+            <a:ext cx="2286000" cy="384048"/>
           </a:xfrm>
           <a:prstGeom prst="rect">
             <a:avLst/>
@@ -8862,30 +9651,66 @@
               <a:buNone/>
             </a:pPr>
             <a:r>
-              <a:rPr lang="en-US" sz="1800" b="1" dirty="0">
-                <a:solidFill>
-                  <a:schemeClr val="bg1"/>
+              <a:rPr lang="en-US" sz="2200" b="1" dirty="0">
+                <a:solidFill>
+                  <a:schemeClr val="tx1"/>
                 </a:solidFill>
                 <a:latin typeface="Cambria" pitchFamily="34" charset="0"/>
                 <a:ea typeface="Cambria" pitchFamily="34" charset="-122"/>
                 <a:cs typeface="Cambria" pitchFamily="34" charset="-120"/>
               </a:rPr>
-              <a:t>Devon</a:t>
-            </a:r>
-            <a:endParaRPr lang="en-US" sz="1800" dirty="0"/>
-          </a:p>
-        </p:txBody>
-      </p:sp>
-      <p:sp>
-        <p:nvSpPr>
-          <p:cNvPr id="25" name="Text 20"/>
-          <p:cNvSpPr txBox="1"/>
-          <p:nvPr/>
-        </p:nvSpPr>
-        <p:spPr>
-          <a:xfrm>
-            <a:off x="6949440" y="1609344"/>
-            <a:ext cx="1783080" cy="246888"/>
+              <a:t>&lt;0.02 ms</a:t>
+            </a:r>
+            <a:endParaRPr lang="en-US" sz="2200" dirty="0"/>
+          </a:p>
+        </p:txBody>
+      </p:sp>
+      <p:sp>
+        <p:nvSpPr>
+          <p:cNvPr id="23" name="Text 21"/>
+          <p:cNvSpPr txBox="1"/>
+          <p:nvPr/>
+        </p:nvSpPr>
+        <p:spPr>
+          <a:xfrm>
+            <a:off x="6254496" y="3767328"/>
+            <a:ext cx="2286000" cy="438912"/>
+          </a:xfrm>
+          <a:prstGeom prst="rect">
+            <a:avLst/>
+          </a:prstGeom>
+          <a:noFill/>
+          <a:ln/>
+        </p:spPr>
+        <p:txBody>
+          <a:bodyPr wrap="square" lIns="0" tIns="0" rIns="0" bIns="0" rtlCol="0" anchor="t"/>
+          <a:lstStyle/>
+          <a:p>
+            <a:pPr indent="0" marL="0">
+              <a:buNone/>
+            </a:pPr>
+            <a:r>
+              <a:rPr lang="en-US" sz="1100" dirty="0">
+                <a:solidFill>
+                  <a:schemeClr val="tx2"/>
+                </a:solidFill>
+              </a:rPr>
+              <a:t>per detector check: cards, IBAN, PESEL, secrets</a:t>
+            </a:r>
+            <a:endParaRPr lang="en-US" sz="1100" dirty="0"/>
+          </a:p>
+        </p:txBody>
+      </p:sp>
+      <p:sp>
+        <p:nvSpPr>
+          <p:cNvPr id="24" name="Text 22"/>
+          <p:cNvSpPr txBox="1"/>
+          <p:nvPr/>
+        </p:nvSpPr>
+        <p:spPr>
+          <a:xfrm>
+            <a:off x="457200" y="4407408"/>
+            <a:ext cx="8229600" cy="256032"/>
           </a:xfrm>
           <a:prstGeom prst="rect">
             <a:avLst/>
@@ -8901,227 +9726,14 @@
               <a:buNone/>
             </a:pPr>
             <a:r>
-              <a:rPr lang="en-US" sz="1100" dirty="0">
+              <a:rPr lang="en-US" sz="1000" dirty="0">
                 <a:solidFill>
                   <a:schemeClr val="accent5"/>
                 </a:solidFill>
               </a:rPr>
-              <a:t>Developer, Claude Code</a:t>
-            </a:r>
-            <a:endParaRPr lang="en-US" sz="1100" dirty="0"/>
-          </a:p>
-        </p:txBody>
-      </p:sp>
-      <p:sp>
-        <p:nvSpPr>
-          <p:cNvPr id="26" name="Text 21"/>
-          <p:cNvSpPr txBox="1"/>
-          <p:nvPr/>
-        </p:nvSpPr>
-        <p:spPr>
-          <a:xfrm>
-            <a:off x="6309360" y="2011680"/>
-            <a:ext cx="2286000" cy="228600"/>
-          </a:xfrm>
-          <a:prstGeom prst="rect">
-            <a:avLst/>
-          </a:prstGeom>
-          <a:noFill/>
-          <a:ln/>
-        </p:spPr>
-        <p:txBody>
-          <a:bodyPr wrap="square" lIns="0" tIns="0" rIns="0" bIns="0" rtlCol="0" anchor="ctr"/>
-          <a:lstStyle/>
-          <a:p>
-            <a:pPr algn="l" indent="0" marL="0">
-              <a:buNone/>
-            </a:pPr>
-            <a:r>
-              <a:rPr lang="en-US" sz="1000" b="1" spc="200" kern="0" dirty="0">
-                <a:solidFill>
-                  <a:schemeClr val="accent3"/>
-                </a:solidFill>
-              </a:rPr>
-              <a:t>ATTACK</a:t>
+              <a:t>AI judge: Jev at the deployed threshold 0.40. Sources: judge benchmark (Sun 4 Oct); leaks: just bench-e2e; tests: just test.</a:t>
             </a:r>
             <a:endParaRPr lang="en-US" sz="1000" dirty="0"/>
-          </a:p>
-        </p:txBody>
-      </p:sp>
-      <p:sp>
-        <p:nvSpPr>
-          <p:cNvPr id="27" name="Text 22"/>
-          <p:cNvSpPr txBox="1"/>
-          <p:nvPr/>
-        </p:nvSpPr>
-        <p:spPr>
-          <a:xfrm>
-            <a:off x="6309360" y="2240280"/>
-            <a:ext cx="2331720" cy="457200"/>
-          </a:xfrm>
-          <a:prstGeom prst="rect">
-            <a:avLst/>
-          </a:prstGeom>
-          <a:noFill/>
-          <a:ln/>
-        </p:spPr>
-        <p:txBody>
-          <a:bodyPr wrap="square" lIns="0" tIns="0" rIns="0" bIns="0" rtlCol="0" anchor="t"/>
-          <a:lstStyle/>
-          <a:p>
-            <a:pPr indent="0" marL="0">
-              <a:buNone/>
-            </a:pPr>
-            <a:r>
-              <a:rPr lang="en-US" sz="1400" dirty="0">
-                <a:solidFill>
-                  <a:schemeClr val="bg1"/>
-                </a:solidFill>
-              </a:rPr>
-              <a:t>Secret in .env, endless test loop</a:t>
-            </a:r>
-            <a:endParaRPr lang="en-US" sz="1400" dirty="0"/>
-          </a:p>
-        </p:txBody>
-      </p:sp>
-      <p:sp>
-        <p:nvSpPr>
-          <p:cNvPr id="28" name="Text 23"/>
-          <p:cNvSpPr txBox="1"/>
-          <p:nvPr/>
-        </p:nvSpPr>
-        <p:spPr>
-          <a:xfrm>
-            <a:off x="6309360" y="2788920"/>
-            <a:ext cx="2286000" cy="228600"/>
-          </a:xfrm>
-          <a:prstGeom prst="rect">
-            <a:avLst/>
-          </a:prstGeom>
-          <a:noFill/>
-          <a:ln/>
-        </p:spPr>
-        <p:txBody>
-          <a:bodyPr wrap="square" lIns="0" tIns="0" rIns="0" bIns="0" rtlCol="0" anchor="ctr"/>
-          <a:lstStyle/>
-          <a:p>
-            <a:pPr algn="l" indent="0" marL="0">
-              <a:buNone/>
-            </a:pPr>
-            <a:r>
-              <a:rPr lang="en-US" sz="1000" b="1" spc="200" kern="0" dirty="0">
-                <a:solidFill>
-                  <a:schemeClr val="accent2"/>
-                </a:solidFill>
-              </a:rPr>
-              <a:t>RESULT</a:t>
-            </a:r>
-            <a:endParaRPr lang="en-US" sz="1000" dirty="0"/>
-          </a:p>
-        </p:txBody>
-      </p:sp>
-      <p:sp>
-        <p:nvSpPr>
-          <p:cNvPr id="29" name="Text 24"/>
-          <p:cNvSpPr txBox="1"/>
-          <p:nvPr/>
-        </p:nvSpPr>
-        <p:spPr>
-          <a:xfrm>
-            <a:off x="6309360" y="3017520"/>
-            <a:ext cx="2331720" cy="777240"/>
-          </a:xfrm>
-          <a:prstGeom prst="rect">
-            <a:avLst/>
-          </a:prstGeom>
-          <a:noFill/>
-          <a:ln/>
-        </p:spPr>
-        <p:txBody>
-          <a:bodyPr wrap="square" lIns="0" tIns="0" rIns="0" bIns="0" rtlCol="0" anchor="t"/>
-          <a:lstStyle/>
-          <a:p>
-            <a:pPr indent="0" marL="0">
-              <a:buNone/>
-            </a:pPr>
-            <a:r>
-              <a:rPr lang="en-US" sz="1400" b="1" dirty="0">
-                <a:solidFill>
-                  <a:schemeClr val="bg1"/>
-                </a:solidFill>
-              </a:rPr>
-              <a:t>Key hidden. The budget stops the loop.</a:t>
-            </a:r>
-            <a:endParaRPr lang="en-US" sz="1400" dirty="0"/>
-          </a:p>
-        </p:txBody>
-      </p:sp>
-      <p:sp>
-        <p:nvSpPr>
-          <p:cNvPr id="30" name="table demo banner"/>
-          <p:cNvSpPr/>
-          <p:nvPr/>
-        </p:nvSpPr>
-        <p:spPr>
-          <a:xfrm>
-            <a:off x="457200" y="4069080"/>
-            <a:ext cx="8229600" cy="502920"/>
-          </a:xfrm>
-          <a:prstGeom prst="roundRect">
-            <a:avLst>
-              <a:gd name="adj" fmla="val 18182"/>
-            </a:avLst>
-          </a:prstGeom>
-          <a:solidFill>
-            <a:schemeClr val="accent1"/>
-          </a:solidFill>
-          <a:ln/>
-        </p:spPr>
-      </p:sp>
-      <p:sp>
-        <p:nvSpPr>
-          <p:cNvPr id="31" name="Text 26"/>
-          <p:cNvSpPr txBox="1"/>
-          <p:nvPr/>
-        </p:nvSpPr>
-        <p:spPr>
-          <a:xfrm>
-            <a:off x="457200" y="4069080"/>
-            <a:ext cx="8229600" cy="502920"/>
-          </a:xfrm>
-          <a:prstGeom prst="rect">
-            <a:avLst/>
-          </a:prstGeom>
-          <a:noFill/>
-          <a:ln/>
-        </p:spPr>
-        <p:txBody>
-          <a:bodyPr wrap="square" lIns="0" tIns="0" rIns="0" bIns="0" rtlCol="0" anchor="ctr"/>
-          <a:lstStyle/>
-          <a:p>
-            <a:pPr algn="ctr" indent="0" marL="0">
-              <a:buNone/>
-            </a:pPr>
-            <a:r>
-              <a:rPr lang="en-US" sz="1600" b="1" dirty="0">
-                <a:solidFill>
-                  <a:schemeClr val="tx1"/>
-                </a:solidFill>
-              </a:rPr>
-              <a:t>Try all three at our table. </a:t>
-            </a:r>
-            <a:pPr algn="ctr" indent="0" marL="0">
-              <a:buNone/>
-            </a:pPr>
-            <a:r>
-              <a:rPr lang="en-US" sz="1600" dirty="0">
-                <a:solidFill>
-                  <a:schemeClr val="tx1"/>
-                </a:solidFill>
-              </a:rPr>
-              <a:t>Edit policy.yaml while it runs; we touch nothing.</a:t>
-            </a:r>
-            <a:endParaRPr lang="en-US" sz="1600" dirty="0"/>
           </a:p>
         </p:txBody>
       </p:sp>
@@ -9230,78 +9842,836 @@
                 <a:ea typeface="Cambria" pitchFamily="34" charset="-122"/>
                 <a:cs typeface="Cambria" pitchFamily="34" charset="-120"/>
               </a:rPr>
-              <a:t>Measured, not claimed</a:t>
+              <a:t>Every decision on the record</a:t>
             </a:r>
             <a:endParaRPr lang="en-US" sz="2800" dirty="0"/>
           </a:p>
         </p:txBody>
       </p:sp>
-      <p:graphicFrame>
-        <p:nvGraphicFramePr>
-          <p:cNvPr id="3" name="leak chart" descr=""/>
-          <p:cNvGraphicFramePr/>
-          <p:nvPr/>
-        </p:nvGraphicFramePr>
-        <p:xfrm>
-          <a:off x="457200" y="1143000"/>
-          <a:ext cx="4297680" cy="2743200"/>
-        </p:xfrm>
-        <a:graphic xmlns:a="http://schemas.openxmlformats.org/drawingml/2006/main">
-          <a:graphicData uri="http://schemas.openxmlformats.org/drawingml/2006/chart">
-            <c:chart xmlns:c="http://schemas.openxmlformats.org/drawingml/2006/chart" r:id="rId1"/>
-          </a:graphicData>
-        </a:graphic>
-      </p:graphicFrame>
-      <p:sp>
-        <p:nvSpPr>
-          <p:cNvPr id="4" name="Text 1"/>
-          <p:cNvSpPr txBox="1"/>
-          <p:nvPr/>
-        </p:nvSpPr>
-        <p:spPr>
-          <a:xfrm>
-            <a:off x="457200" y="3931920"/>
-            <a:ext cx="4297680" cy="548640"/>
-          </a:xfrm>
-          <a:prstGeom prst="rect">
-            <a:avLst/>
-          </a:prstGeom>
-          <a:noFill/>
-          <a:ln/>
-        </p:spPr>
-        <p:txBody>
-          <a:bodyPr wrap="square" lIns="0" tIns="0" rIns="0" bIns="0" rtlCol="0" anchor="t"/>
-          <a:lstStyle/>
-          <a:p>
-            <a:pPr indent="0" marL="0">
-              <a:buNone/>
-            </a:pPr>
-            <a:r>
-              <a:rPr lang="en-US" sz="1200" dirty="0">
-                <a:solidFill>
-                  <a:schemeClr val="tx2"/>
-                </a:solidFill>
-              </a:rPr>
-              <a:t>Worst case: a model that obeys every hidden instruction. Zero leaks even when the injection detector misses everything.</a:t>
-            </a:r>
-            <a:endParaRPr lang="en-US" sz="1200" dirty="0"/>
-          </a:p>
-        </p:txBody>
-      </p:sp>
-      <p:sp>
-        <p:nvSpPr>
-          <p:cNvPr id="5" name="tile ≥95%"/>
-          <p:cNvSpPr/>
-          <p:nvPr/>
-        </p:nvSpPr>
-        <p:spPr>
-          <a:xfrm>
-            <a:off x="5120640" y="1188720"/>
-            <a:ext cx="3566160" cy="960120"/>
+      <p:sp>
+        <p:nvSpPr>
+          <p:cNvPr id="3" name="audit entry"/>
+          <p:cNvSpPr/>
+          <p:nvPr/>
+        </p:nvSpPr>
+        <p:spPr>
+          <a:xfrm>
+            <a:off x="457200" y="1188720"/>
+            <a:ext cx="4663440" cy="2834640"/>
           </a:xfrm>
           <a:prstGeom prst="roundRect">
             <a:avLst>
-              <a:gd name="adj" fmla="val 9524"/>
+              <a:gd name="adj" fmla="val 3871"/>
+            </a:avLst>
+          </a:prstGeom>
+          <a:solidFill>
+            <a:schemeClr val="tx1"/>
+          </a:solidFill>
+          <a:ln/>
+        </p:spPr>
+      </p:sp>
+      <p:sp>
+        <p:nvSpPr>
+          <p:cNvPr id="4" name="Text 2"/>
+          <p:cNvSpPr txBox="1"/>
+          <p:nvPr/>
+        </p:nvSpPr>
+        <p:spPr>
+          <a:xfrm>
+            <a:off x="640080" y="1325880"/>
+            <a:ext cx="4389120" cy="2560320"/>
+          </a:xfrm>
+          <a:prstGeom prst="rect">
+            <a:avLst/>
+          </a:prstGeom>
+          <a:noFill/>
+          <a:ln/>
+        </p:spPr>
+        <p:txBody>
+          <a:bodyPr wrap="square" lIns="0" tIns="0" rIns="0" bIns="0" rtlCol="0" anchor="t"/>
+          <a:lstStyle/>
+          <a:p>
+            <a:pPr indent="0" marL="0">
+              <a:spcAft>
+                <a:spcPts val="400"/>
+              </a:spcAft>
+              <a:buNone/>
+            </a:pPr>
+            <a:r>
+              <a:rPr lang="en-US" sz="1100" dirty="0">
+                <a:solidFill>
+                  <a:schemeClr val="accent5"/>
+                </a:solidFill>
+                <a:latin typeface="Courier New" pitchFamily="34" charset="0"/>
+                <a:ea typeface="Courier New" pitchFamily="34" charset="-122"/>
+                <a:cs typeface="Courier New" pitchFamily="34" charset="-120"/>
+              </a:rPr>
+              <a:t>{ </a:t>
+            </a:r>
+            <a:pPr indent="0" marL="0">
+              <a:spcAft>
+                <a:spcPts val="400"/>
+              </a:spcAft>
+              <a:buNone/>
+            </a:pPr>
+            <a:r>
+              <a:rPr lang="en-US" sz="1100" dirty="0">
+                <a:solidFill>
+                  <a:schemeClr val="accent5"/>
+                </a:solidFill>
+                <a:latin typeface="Courier New" pitchFamily="34" charset="0"/>
+                <a:ea typeface="Courier New" pitchFamily="34" charset="-122"/>
+                <a:cs typeface="Courier New" pitchFamily="34" charset="-120"/>
+              </a:rPr>
+              <a:t>"user": </a:t>
+            </a:r>
+            <a:pPr indent="0" marL="0">
+              <a:spcAft>
+                <a:spcPts val="400"/>
+              </a:spcAft>
+              <a:buNone/>
+            </a:pPr>
+            <a:r>
+              <a:rPr lang="en-US" sz="1100" dirty="0">
+                <a:solidFill>
+                  <a:schemeClr val="accent1"/>
+                </a:solidFill>
+                <a:latin typeface="Courier New" pitchFamily="34" charset="0"/>
+                <a:ea typeface="Courier New" pitchFamily="34" charset="-122"/>
+                <a:cs typeface="Courier New" pitchFamily="34" charset="-120"/>
+              </a:rPr>
+              <a:t>"olivia"</a:t>
+            </a:r>
+            <a:pPr indent="0" marL="0">
+              <a:spcAft>
+                <a:spcPts val="400"/>
+              </a:spcAft>
+              <a:buNone/>
+            </a:pPr>
+            <a:r>
+              <a:rPr lang="en-US" sz="1100" dirty="0">
+                <a:solidFill>
+                  <a:schemeClr val="accent5"/>
+                </a:solidFill>
+                <a:latin typeface="Courier New" pitchFamily="34" charset="0"/>
+                <a:ea typeface="Courier New" pitchFamily="34" charset="-122"/>
+                <a:cs typeface="Courier New" pitchFamily="34" charset="-120"/>
+              </a:rPr>
+              <a:t>, "agent": </a:t>
+            </a:r>
+            <a:pPr indent="0" marL="0">
+              <a:spcAft>
+                <a:spcPts val="400"/>
+              </a:spcAft>
+              <a:buNone/>
+            </a:pPr>
+            <a:r>
+              <a:rPr lang="en-US" sz="1100" dirty="0">
+                <a:solidFill>
+                  <a:schemeClr val="accent1"/>
+                </a:solidFill>
+                <a:latin typeface="Courier New" pitchFamily="34" charset="0"/>
+                <a:ea typeface="Courier New" pitchFamily="34" charset="-122"/>
+                <a:cs typeface="Courier New" pitchFamily="34" charset="-120"/>
+              </a:rPr>
+              <a:t>"onboarding-assistant"</a:t>
+            </a:r>
+            <a:endParaRPr lang="en-US" sz="1100" dirty="0"/>
+          </a:p>
+          <a:p>
+            <a:pPr indent="0" marL="0">
+              <a:spcAft>
+                <a:spcPts val="400"/>
+              </a:spcAft>
+              <a:buNone/>
+            </a:pPr>
+            <a:r>
+              <a:rPr lang="en-US" sz="1100" dirty="0">
+                <a:solidFill>
+                  <a:schemeClr val="accent5"/>
+                </a:solidFill>
+                <a:latin typeface="Courier New" pitchFamily="34" charset="0"/>
+                <a:ea typeface="Courier New" pitchFamily="34" charset="-122"/>
+                <a:cs typeface="Courier New" pitchFamily="34" charset="-120"/>
+              </a:rPr>
+              <a:t>  "purpose": </a:t>
+            </a:r>
+            <a:pPr indent="0" marL="0">
+              <a:spcAft>
+                <a:spcPts val="400"/>
+              </a:spcAft>
+              <a:buNone/>
+            </a:pPr>
+            <a:r>
+              <a:rPr lang="en-US" sz="1100" dirty="0">
+                <a:solidFill>
+                  <a:schemeClr val="accent1"/>
+                </a:solidFill>
+                <a:latin typeface="Courier New" pitchFamily="34" charset="0"/>
+                <a:ea typeface="Courier New" pitchFamily="34" charset="-122"/>
+                <a:cs typeface="Courier New" pitchFamily="34" charset="-120"/>
+              </a:rPr>
+              <a:t>"client-onboarding"</a:t>
+            </a:r>
+            <a:endParaRPr lang="en-US" sz="1100" dirty="0"/>
+          </a:p>
+          <a:p>
+            <a:pPr indent="0" marL="0">
+              <a:spcAft>
+                <a:spcPts val="400"/>
+              </a:spcAft>
+              <a:buNone/>
+            </a:pPr>
+            <a:r>
+              <a:rPr lang="en-US" sz="1100" dirty="0">
+                <a:solidFill>
+                  <a:schemeClr val="accent5"/>
+                </a:solidFill>
+                <a:latin typeface="Courier New" pitchFamily="34" charset="0"/>
+                <a:ea typeface="Courier New" pitchFamily="34" charset="-122"/>
+                <a:cs typeface="Courier New" pitchFamily="34" charset="-120"/>
+              </a:rPr>
+              <a:t>  "policy_version": </a:t>
+            </a:r>
+            <a:pPr indent="0" marL="0">
+              <a:spcAft>
+                <a:spcPts val="400"/>
+              </a:spcAft>
+              <a:buNone/>
+            </a:pPr>
+            <a:r>
+              <a:rPr lang="en-US" sz="1100" dirty="0">
+                <a:solidFill>
+                  <a:schemeClr val="accent2"/>
+                </a:solidFill>
+                <a:latin typeface="Courier New" pitchFamily="34" charset="0"/>
+                <a:ea typeface="Courier New" pitchFamily="34" charset="-122"/>
+                <a:cs typeface="Courier New" pitchFamily="34" charset="-120"/>
+              </a:rPr>
+              <a:t>"0.2@780fe563"</a:t>
+            </a:r>
+            <a:endParaRPr lang="en-US" sz="1100" dirty="0"/>
+          </a:p>
+          <a:p>
+            <a:pPr indent="0" marL="0">
+              <a:spcAft>
+                <a:spcPts val="400"/>
+              </a:spcAft>
+              <a:buNone/>
+            </a:pPr>
+            <a:r>
+              <a:rPr lang="en-US" sz="1100" dirty="0">
+                <a:solidFill>
+                  <a:schemeClr val="accent5"/>
+                </a:solidFill>
+                <a:latin typeface="Courier New" pitchFamily="34" charset="0"/>
+                <a:ea typeface="Courier New" pitchFamily="34" charset="-122"/>
+                <a:cs typeface="Courier New" pitchFamily="34" charset="-120"/>
+              </a:rPr>
+              <a:t>  "decisions": [{</a:t>
+            </a:r>
+            <a:endParaRPr lang="en-US" sz="1100" dirty="0"/>
+          </a:p>
+          <a:p>
+            <a:pPr indent="0" marL="0">
+              <a:spcAft>
+                <a:spcPts val="400"/>
+              </a:spcAft>
+              <a:buNone/>
+            </a:pPr>
+            <a:r>
+              <a:rPr lang="en-US" sz="1100" dirty="0">
+                <a:solidFill>
+                  <a:schemeClr val="accent5"/>
+                </a:solidFill>
+                <a:latin typeface="Courier New" pitchFamily="34" charset="0"/>
+                <a:ea typeface="Courier New" pitchFamily="34" charset="-122"/>
+                <a:cs typeface="Courier New" pitchFamily="34" charset="-120"/>
+              </a:rPr>
+              <a:t>    "control": </a:t>
+            </a:r>
+            <a:pPr indent="0" marL="0">
+              <a:spcAft>
+                <a:spcPts val="400"/>
+              </a:spcAft>
+              <a:buNone/>
+            </a:pPr>
+            <a:r>
+              <a:rPr lang="en-US" sz="1100" dirty="0">
+                <a:solidFill>
+                  <a:schemeClr val="bg1"/>
+                </a:solidFill>
+                <a:latin typeface="Courier New" pitchFamily="34" charset="0"/>
+                <a:ea typeface="Courier New" pitchFamily="34" charset="-122"/>
+                <a:cs typeface="Courier New" pitchFamily="34" charset="-120"/>
+              </a:rPr>
+              <a:t>"flow.sensitive_to_external"</a:t>
+            </a:r>
+            <a:endParaRPr lang="en-US" sz="1100" dirty="0"/>
+          </a:p>
+          <a:p>
+            <a:pPr indent="0" marL="0">
+              <a:spcAft>
+                <a:spcPts val="400"/>
+              </a:spcAft>
+              <a:buNone/>
+            </a:pPr>
+            <a:r>
+              <a:rPr lang="en-US" sz="1100" dirty="0">
+                <a:solidFill>
+                  <a:schemeClr val="accent5"/>
+                </a:solidFill>
+                <a:latin typeface="Courier New" pitchFamily="34" charset="0"/>
+                <a:ea typeface="Courier New" pitchFamily="34" charset="-122"/>
+                <a:cs typeface="Courier New" pitchFamily="34" charset="-120"/>
+              </a:rPr>
+              <a:t>    "action": </a:t>
+            </a:r>
+            <a:pPr indent="0" marL="0">
+              <a:spcAft>
+                <a:spcPts val="400"/>
+              </a:spcAft>
+              <a:buNone/>
+            </a:pPr>
+            <a:r>
+              <a:rPr lang="en-US" sz="1100" dirty="0">
+                <a:solidFill>
+                  <a:schemeClr val="accent3"/>
+                </a:solidFill>
+                <a:latin typeface="Courier New" pitchFamily="34" charset="0"/>
+                <a:ea typeface="Courier New" pitchFamily="34" charset="-122"/>
+                <a:cs typeface="Courier New" pitchFamily="34" charset="-120"/>
+              </a:rPr>
+              <a:t>"block"</a:t>
+            </a:r>
+            <a:pPr indent="0" marL="0">
+              <a:spcAft>
+                <a:spcPts val="400"/>
+              </a:spcAft>
+              <a:buNone/>
+            </a:pPr>
+            <a:r>
+              <a:rPr lang="en-US" sz="1100" dirty="0">
+                <a:solidFill>
+                  <a:schemeClr val="accent5"/>
+                </a:solidFill>
+                <a:latin typeface="Courier New" pitchFamily="34" charset="0"/>
+                <a:ea typeface="Courier New" pitchFamily="34" charset="-122"/>
+                <a:cs typeface="Courier New" pitchFamily="34" charset="-120"/>
+              </a:rPr>
+              <a:t>,</a:t>
+            </a:r>
+            <a:endParaRPr lang="en-US" sz="1100" dirty="0"/>
+          </a:p>
+          <a:p>
+            <a:pPr indent="0" marL="0">
+              <a:spcAft>
+                <a:spcPts val="400"/>
+              </a:spcAft>
+              <a:buNone/>
+            </a:pPr>
+            <a:r>
+              <a:rPr lang="en-US" sz="1100" dirty="0">
+                <a:solidFill>
+                  <a:schemeClr val="accent5"/>
+                </a:solidFill>
+                <a:latin typeface="Courier New" pitchFamily="34" charset="0"/>
+                <a:ea typeface="Courier New" pitchFamily="34" charset="-122"/>
+                <a:cs typeface="Courier New" pitchFamily="34" charset="-120"/>
+              </a:rPr>
+              <a:t>    "where": </a:t>
+            </a:r>
+            <a:pPr indent="0" marL="0">
+              <a:spcAft>
+                <a:spcPts val="400"/>
+              </a:spcAft>
+              <a:buNone/>
+            </a:pPr>
+            <a:r>
+              <a:rPr lang="en-US" sz="1100" dirty="0">
+                <a:solidFill>
+                  <a:schemeClr val="bg1"/>
+                </a:solidFill>
+                <a:latin typeface="Courier New" pitchFamily="34" charset="0"/>
+                <a:ea typeface="Courier New" pitchFamily="34" charset="-122"/>
+                <a:cs typeface="Courier New" pitchFamily="34" charset="-120"/>
+              </a:rPr>
+              <a:t>"tool_call:send_email"</a:t>
+            </a:r>
+            <a:pPr indent="0" marL="0">
+              <a:spcAft>
+                <a:spcPts val="400"/>
+              </a:spcAft>
+              <a:buNone/>
+            </a:pPr>
+            <a:r>
+              <a:rPr lang="en-US" sz="1100" dirty="0">
+                <a:solidFill>
+                  <a:schemeClr val="accent5"/>
+                </a:solidFill>
+                <a:latin typeface="Courier New" pitchFamily="34" charset="0"/>
+                <a:ea typeface="Courier New" pitchFamily="34" charset="-122"/>
+                <a:cs typeface="Courier New" pitchFamily="34" charset="-120"/>
+              </a:rPr>
+              <a:t> }]</a:t>
+            </a:r>
+            <a:endParaRPr lang="en-US" sz="1100" dirty="0"/>
+          </a:p>
+          <a:p>
+            <a:pPr indent="0" marL="0">
+              <a:spcAft>
+                <a:spcPts val="400"/>
+              </a:spcAft>
+              <a:buNone/>
+            </a:pPr>
+            <a:r>
+              <a:rPr lang="en-US" sz="1100" dirty="0">
+                <a:solidFill>
+                  <a:schemeClr val="accent5"/>
+                </a:solidFill>
+                <a:latin typeface="Courier New" pitchFamily="34" charset="0"/>
+                <a:ea typeface="Courier New" pitchFamily="34" charset="-122"/>
+                <a:cs typeface="Courier New" pitchFamily="34" charset="-120"/>
+              </a:rPr>
+              <a:t>  "prev_hash": </a:t>
+            </a:r>
+            <a:pPr indent="0" marL="0">
+              <a:spcAft>
+                <a:spcPts val="400"/>
+              </a:spcAft>
+              <a:buNone/>
+            </a:pPr>
+            <a:r>
+              <a:rPr lang="en-US" sz="1100" dirty="0">
+                <a:solidFill>
+                  <a:schemeClr val="accent2"/>
+                </a:solidFill>
+                <a:latin typeface="Courier New" pitchFamily="34" charset="0"/>
+                <a:ea typeface="Courier New" pitchFamily="34" charset="-122"/>
+                <a:cs typeface="Courier New" pitchFamily="34" charset="-120"/>
+              </a:rPr>
+              <a:t>"ec60d5f7…"</a:t>
+            </a:r>
+            <a:endParaRPr lang="en-US" sz="1100" dirty="0"/>
+          </a:p>
+          <a:p>
+            <a:pPr indent="0" marL="0">
+              <a:spcAft>
+                <a:spcPts val="400"/>
+              </a:spcAft>
+              <a:buNone/>
+            </a:pPr>
+            <a:r>
+              <a:rPr lang="en-US" sz="1100" dirty="0">
+                <a:solidFill>
+                  <a:schemeClr val="accent5"/>
+                </a:solidFill>
+                <a:latin typeface="Courier New" pitchFamily="34" charset="0"/>
+                <a:ea typeface="Courier New" pitchFamily="34" charset="-122"/>
+                <a:cs typeface="Courier New" pitchFamily="34" charset="-120"/>
+              </a:rPr>
+              <a:t>  "hash": </a:t>
+            </a:r>
+            <a:pPr indent="0" marL="0">
+              <a:spcAft>
+                <a:spcPts val="400"/>
+              </a:spcAft>
+              <a:buNone/>
+            </a:pPr>
+            <a:r>
+              <a:rPr lang="en-US" sz="1100" dirty="0">
+                <a:solidFill>
+                  <a:schemeClr val="accent2"/>
+                </a:solidFill>
+                <a:latin typeface="Courier New" pitchFamily="34" charset="0"/>
+                <a:ea typeface="Courier New" pitchFamily="34" charset="-122"/>
+                <a:cs typeface="Courier New" pitchFamily="34" charset="-120"/>
+              </a:rPr>
+              <a:t>"8edfcb91…"</a:t>
+            </a:r>
+            <a:pPr indent="0" marL="0">
+              <a:spcAft>
+                <a:spcPts val="400"/>
+              </a:spcAft>
+              <a:buNone/>
+            </a:pPr>
+            <a:r>
+              <a:rPr lang="en-US" sz="1100" dirty="0">
+                <a:solidFill>
+                  <a:schemeClr val="accent5"/>
+                </a:solidFill>
+                <a:latin typeface="Courier New" pitchFamily="34" charset="0"/>
+                <a:ea typeface="Courier New" pitchFamily="34" charset="-122"/>
+                <a:cs typeface="Courier New" pitchFamily="34" charset="-120"/>
+              </a:rPr>
+              <a:t> }</a:t>
+            </a:r>
+            <a:endParaRPr lang="en-US" sz="1100" dirty="0"/>
+          </a:p>
+        </p:txBody>
+      </p:sp>
+      <p:sp>
+        <p:nvSpPr>
+          <p:cNvPr id="5" name="Shape 3"/>
+          <p:cNvSpPr/>
+          <p:nvPr/>
+        </p:nvSpPr>
+        <p:spPr>
+          <a:xfrm>
+            <a:off x="5440680" y="1234440"/>
+            <a:ext cx="502920" cy="502920"/>
+          </a:xfrm>
+          <a:prstGeom prst="ellipse">
+            <a:avLst/>
+          </a:prstGeom>
+          <a:solidFill>
+            <a:schemeClr val="accent1"/>
+          </a:solidFill>
+          <a:ln/>
+        </p:spPr>
+      </p:sp>
+      <p:pic>
+        <p:nvPicPr>
+          <p:cNvPr id="6" name="Image 0" descr="preencoded.png">    </p:cNvPr>
+          <p:cNvPicPr>
+            <a:picLocks noChangeAspect="1"/>
+          </p:cNvPicPr>
+          <p:nvPr/>
+        </p:nvPicPr>
+        <p:blipFill>
+          <a:blip r:embed="rId1"/>
+          <a:stretch>
+            <a:fillRect/>
+          </a:stretch>
+        </p:blipFill>
+        <p:spPr>
+          <a:xfrm>
+            <a:off x="5566410" y="1360170"/>
+            <a:ext cx="251460" cy="251460"/>
+          </a:xfrm>
+          <a:prstGeom prst="rect">
+            <a:avLst/>
+          </a:prstGeom>
+        </p:spPr>
+      </p:pic>
+      <p:sp>
+        <p:nvSpPr>
+          <p:cNvPr id="7" name="Text 4"/>
+          <p:cNvSpPr txBox="1"/>
+          <p:nvPr/>
+        </p:nvSpPr>
+        <p:spPr>
+          <a:xfrm>
+            <a:off x="6080760" y="1188720"/>
+            <a:ext cx="2606040" cy="320040"/>
+          </a:xfrm>
+          <a:prstGeom prst="rect">
+            <a:avLst/>
+          </a:prstGeom>
+          <a:noFill/>
+          <a:ln/>
+        </p:spPr>
+        <p:txBody>
+          <a:bodyPr wrap="square" lIns="0" tIns="0" rIns="0" bIns="0" rtlCol="0" anchor="ctr"/>
+          <a:lstStyle/>
+          <a:p>
+            <a:pPr indent="0" marL="0">
+              <a:buNone/>
+            </a:pPr>
+            <a:r>
+              <a:rPr lang="en-US" sz="1500" b="1" dirty="0">
+                <a:solidFill>
+                  <a:schemeClr val="tx1"/>
+                </a:solidFill>
+              </a:rPr>
+              <a:t>Who, which agent, why</a:t>
+            </a:r>
+            <a:endParaRPr lang="en-US" sz="1500" dirty="0"/>
+          </a:p>
+        </p:txBody>
+      </p:sp>
+      <p:sp>
+        <p:nvSpPr>
+          <p:cNvPr id="8" name="Text 5"/>
+          <p:cNvSpPr txBox="1"/>
+          <p:nvPr/>
+        </p:nvSpPr>
+        <p:spPr>
+          <a:xfrm>
+            <a:off x="6080760" y="1508760"/>
+            <a:ext cx="2606040" cy="502920"/>
+          </a:xfrm>
+          <a:prstGeom prst="rect">
+            <a:avLst/>
+          </a:prstGeom>
+          <a:noFill/>
+          <a:ln/>
+        </p:spPr>
+        <p:txBody>
+          <a:bodyPr wrap="square" lIns="0" tIns="0" rIns="0" bIns="0" rtlCol="0" anchor="t"/>
+          <a:lstStyle/>
+          <a:p>
+            <a:pPr indent="0" marL="0">
+              <a:buNone/>
+            </a:pPr>
+            <a:r>
+              <a:rPr lang="en-US" sz="1200" dirty="0">
+                <a:solidFill>
+                  <a:schemeClr val="tx2"/>
+                </a:solidFill>
+              </a:rPr>
+              <a:t>user, agent and purpose on every entry</a:t>
+            </a:r>
+            <a:endParaRPr lang="en-US" sz="1200" dirty="0"/>
+          </a:p>
+        </p:txBody>
+      </p:sp>
+      <p:sp>
+        <p:nvSpPr>
+          <p:cNvPr id="9" name="Shape 6"/>
+          <p:cNvSpPr/>
+          <p:nvPr/>
+        </p:nvSpPr>
+        <p:spPr>
+          <a:xfrm>
+            <a:off x="5440680" y="2194560"/>
+            <a:ext cx="502920" cy="502920"/>
+          </a:xfrm>
+          <a:prstGeom prst="ellipse">
+            <a:avLst/>
+          </a:prstGeom>
+          <a:solidFill>
+            <a:schemeClr val="accent1"/>
+          </a:solidFill>
+          <a:ln/>
+        </p:spPr>
+      </p:sp>
+      <p:pic>
+        <p:nvPicPr>
+          <p:cNvPr id="10" name="Image 1" descr="preencoded.png">    </p:cNvPr>
+          <p:cNvPicPr>
+            <a:picLocks noChangeAspect="1"/>
+          </p:cNvPicPr>
+          <p:nvPr/>
+        </p:nvPicPr>
+        <p:blipFill>
+          <a:blip r:embed="rId2"/>
+          <a:stretch>
+            <a:fillRect/>
+          </a:stretch>
+        </p:blipFill>
+        <p:spPr>
+          <a:xfrm>
+            <a:off x="5566410" y="2320290"/>
+            <a:ext cx="251460" cy="251460"/>
+          </a:xfrm>
+          <a:prstGeom prst="rect">
+            <a:avLst/>
+          </a:prstGeom>
+        </p:spPr>
+      </p:pic>
+      <p:sp>
+        <p:nvSpPr>
+          <p:cNvPr id="11" name="Text 7"/>
+          <p:cNvSpPr txBox="1"/>
+          <p:nvPr/>
+        </p:nvSpPr>
+        <p:spPr>
+          <a:xfrm>
+            <a:off x="6080760" y="2148840"/>
+            <a:ext cx="2606040" cy="320040"/>
+          </a:xfrm>
+          <a:prstGeom prst="rect">
+            <a:avLst/>
+          </a:prstGeom>
+          <a:noFill/>
+          <a:ln/>
+        </p:spPr>
+        <p:txBody>
+          <a:bodyPr wrap="square" lIns="0" tIns="0" rIns="0" bIns="0" rtlCol="0" anchor="ctr"/>
+          <a:lstStyle/>
+          <a:p>
+            <a:pPr indent="0" marL="0">
+              <a:buNone/>
+            </a:pPr>
+            <a:r>
+              <a:rPr lang="en-US" sz="1500" b="1" dirty="0">
+                <a:solidFill>
+                  <a:schemeClr val="tx1"/>
+                </a:solidFill>
+              </a:rPr>
+              <a:t>Which policy decided</a:t>
+            </a:r>
+            <a:endParaRPr lang="en-US" sz="1500" dirty="0"/>
+          </a:p>
+        </p:txBody>
+      </p:sp>
+      <p:sp>
+        <p:nvSpPr>
+          <p:cNvPr id="12" name="Text 8"/>
+          <p:cNvSpPr txBox="1"/>
+          <p:nvPr/>
+        </p:nvSpPr>
+        <p:spPr>
+          <a:xfrm>
+            <a:off x="6080760" y="2468880"/>
+            <a:ext cx="2606040" cy="502920"/>
+          </a:xfrm>
+          <a:prstGeom prst="rect">
+            <a:avLst/>
+          </a:prstGeom>
+          <a:noFill/>
+          <a:ln/>
+        </p:spPr>
+        <p:txBody>
+          <a:bodyPr wrap="square" lIns="0" tIns="0" rIns="0" bIns="0" rtlCol="0" anchor="t"/>
+          <a:lstStyle/>
+          <a:p>
+            <a:pPr indent="0" marL="0">
+              <a:buNone/>
+            </a:pPr>
+            <a:r>
+              <a:rPr lang="en-US" sz="1200" dirty="0">
+                <a:solidFill>
+                  <a:schemeClr val="tx2"/>
+                </a:solidFill>
+              </a:rPr>
+              <a:t>the policy version, even after a live edit</a:t>
+            </a:r>
+            <a:endParaRPr lang="en-US" sz="1200" dirty="0"/>
+          </a:p>
+        </p:txBody>
+      </p:sp>
+      <p:sp>
+        <p:nvSpPr>
+          <p:cNvPr id="13" name="Shape 9"/>
+          <p:cNvSpPr/>
+          <p:nvPr/>
+        </p:nvSpPr>
+        <p:spPr>
+          <a:xfrm>
+            <a:off x="5440680" y="3154680"/>
+            <a:ext cx="502920" cy="502920"/>
+          </a:xfrm>
+          <a:prstGeom prst="ellipse">
+            <a:avLst/>
+          </a:prstGeom>
+          <a:solidFill>
+            <a:schemeClr val="accent1"/>
+          </a:solidFill>
+          <a:ln/>
+        </p:spPr>
+      </p:sp>
+      <p:pic>
+        <p:nvPicPr>
+          <p:cNvPr id="14" name="Image 2" descr="preencoded.png">    </p:cNvPr>
+          <p:cNvPicPr>
+            <a:picLocks noChangeAspect="1"/>
+          </p:cNvPicPr>
+          <p:nvPr/>
+        </p:nvPicPr>
+        <p:blipFill>
+          <a:blip r:embed="rId3"/>
+          <a:stretch>
+            <a:fillRect/>
+          </a:stretch>
+        </p:blipFill>
+        <p:spPr>
+          <a:xfrm>
+            <a:off x="5566410" y="3280410"/>
+            <a:ext cx="251460" cy="251460"/>
+          </a:xfrm>
+          <a:prstGeom prst="rect">
+            <a:avLst/>
+          </a:prstGeom>
+        </p:spPr>
+      </p:pic>
+      <p:sp>
+        <p:nvSpPr>
+          <p:cNvPr id="15" name="Text 10"/>
+          <p:cNvSpPr txBox="1"/>
+          <p:nvPr/>
+        </p:nvSpPr>
+        <p:spPr>
+          <a:xfrm>
+            <a:off x="6080760" y="3108960"/>
+            <a:ext cx="2606040" cy="320040"/>
+          </a:xfrm>
+          <a:prstGeom prst="rect">
+            <a:avLst/>
+          </a:prstGeom>
+          <a:noFill/>
+          <a:ln/>
+        </p:spPr>
+        <p:txBody>
+          <a:bodyPr wrap="square" lIns="0" tIns="0" rIns="0" bIns="0" rtlCol="0" anchor="ctr"/>
+          <a:lstStyle/>
+          <a:p>
+            <a:pPr indent="0" marL="0">
+              <a:buNone/>
+            </a:pPr>
+            <a:r>
+              <a:rPr lang="en-US" sz="1500" b="1" dirty="0">
+                <a:solidFill>
+                  <a:schemeClr val="tx1"/>
+                </a:solidFill>
+              </a:rPr>
+              <a:t>Tamper-evident</a:t>
+            </a:r>
+            <a:endParaRPr lang="en-US" sz="1500" dirty="0"/>
+          </a:p>
+        </p:txBody>
+      </p:sp>
+      <p:sp>
+        <p:nvSpPr>
+          <p:cNvPr id="16" name="Text 11"/>
+          <p:cNvSpPr txBox="1"/>
+          <p:nvPr/>
+        </p:nvSpPr>
+        <p:spPr>
+          <a:xfrm>
+            <a:off x="6080760" y="3429000"/>
+            <a:ext cx="2606040" cy="502920"/>
+          </a:xfrm>
+          <a:prstGeom prst="rect">
+            <a:avLst/>
+          </a:prstGeom>
+          <a:noFill/>
+          <a:ln/>
+        </p:spPr>
+        <p:txBody>
+          <a:bodyPr wrap="square" lIns="0" tIns="0" rIns="0" bIns="0" rtlCol="0" anchor="t"/>
+          <a:lstStyle/>
+          <a:p>
+            <a:pPr indent="0" marL="0">
+              <a:buNone/>
+            </a:pPr>
+            <a:r>
+              <a:rPr lang="en-US" sz="1200" dirty="0">
+                <a:solidFill>
+                  <a:schemeClr val="tx2"/>
+                </a:solidFill>
+              </a:rPr>
+              <a:t>one changed line breaks the chain; /audit/verify says where</a:t>
+            </a:r>
+            <a:endParaRPr lang="en-US" sz="1200" dirty="0"/>
+          </a:p>
+        </p:txBody>
+      </p:sp>
+      <p:sp>
+        <p:nvSpPr>
+          <p:cNvPr id="17" name="reg FINRA 3110"/>
+          <p:cNvSpPr/>
+          <p:nvPr/>
+        </p:nvSpPr>
+        <p:spPr>
+          <a:xfrm>
+            <a:off x="457200" y="4160520"/>
+            <a:ext cx="1920240" cy="457200"/>
+          </a:xfrm>
+          <a:prstGeom prst="roundRect">
+            <a:avLst>
+              <a:gd name="adj" fmla="val 50000"/>
             </a:avLst>
           </a:prstGeom>
           <a:solidFill>
@@ -9312,14 +10682,14 @@
       </p:sp>
       <p:sp>
         <p:nvSpPr>
-          <p:cNvPr id="6" name="Text 3"/>
-          <p:cNvSpPr txBox="1"/>
-          <p:nvPr/>
-        </p:nvSpPr>
-        <p:spPr>
-          <a:xfrm>
-            <a:off x="5257800" y="1188720"/>
-            <a:ext cx="1737360" cy="960120"/>
+          <p:cNvPr id="18" name="Text 13"/>
+          <p:cNvSpPr txBox="1"/>
+          <p:nvPr/>
+        </p:nvSpPr>
+        <p:spPr>
+          <a:xfrm>
+            <a:off x="457200" y="4160520"/>
+            <a:ext cx="1920240" cy="457200"/>
           </a:xfrm>
           <a:prstGeom prst="rect">
             <a:avLst/>
@@ -9331,74 +10701,46 @@
           <a:bodyPr wrap="square" lIns="0" tIns="0" rIns="0" bIns="0" rtlCol="0" anchor="ctr"/>
           <a:lstStyle/>
           <a:p>
-            <a:pPr indent="0" marL="0">
-              <a:buNone/>
-            </a:pPr>
-            <a:r>
-              <a:rPr lang="en-US" sz="2400" b="1" dirty="0">
+            <a:pPr algn="ctr" indent="0" marL="0">
+              <a:buNone/>
+            </a:pPr>
+            <a:r>
+              <a:rPr lang="en-US" sz="1000" b="1" dirty="0">
                 <a:solidFill>
                   <a:schemeClr val="tx1"/>
                 </a:solidFill>
-                <a:latin typeface="Cambria" pitchFamily="34" charset="0"/>
-                <a:ea typeface="Cambria" pitchFamily="34" charset="-122"/>
-                <a:cs typeface="Cambria" pitchFamily="34" charset="-120"/>
-              </a:rPr>
-              <a:t>≥95%</a:t>
-            </a:r>
-            <a:endParaRPr lang="en-US" sz="2400" dirty="0"/>
-          </a:p>
-        </p:txBody>
-      </p:sp>
-      <p:sp>
-        <p:nvSpPr>
-          <p:cNvPr id="7" name="Text 4"/>
-          <p:cNvSpPr txBox="1"/>
-          <p:nvPr/>
-        </p:nvSpPr>
-        <p:spPr>
-          <a:xfrm>
-            <a:off x="7040880" y="1234440"/>
-            <a:ext cx="1554480" cy="868680"/>
-          </a:xfrm>
-          <a:prstGeom prst="rect">
-            <a:avLst/>
-          </a:prstGeom>
-          <a:noFill/>
-          <a:ln/>
-        </p:spPr>
-        <p:txBody>
-          <a:bodyPr wrap="square" lIns="0" tIns="0" rIns="0" bIns="0" rtlCol="0" anchor="ctr"/>
-          <a:lstStyle/>
-          <a:p>
-            <a:pPr indent="0" marL="0">
-              <a:buNone/>
-            </a:pPr>
-            <a:r>
-              <a:rPr lang="en-US" sz="1100" dirty="0">
-                <a:solidFill>
-                  <a:schemeClr val="tx2"/>
-                </a:solidFill>
-              </a:rPr>
-              <a:t>of real data-stealing attacks caught by the AI judge</a:t>
-            </a:r>
-            <a:endParaRPr lang="en-US" sz="1100" dirty="0"/>
-          </a:p>
-        </p:txBody>
-      </p:sp>
-      <p:sp>
-        <p:nvSpPr>
-          <p:cNvPr id="8" name="tile 365"/>
-          <p:cNvSpPr/>
-          <p:nvPr/>
-        </p:nvSpPr>
-        <p:spPr>
-          <a:xfrm>
-            <a:off x="5120640" y="2286000"/>
-            <a:ext cx="3566160" cy="960120"/>
+              </a:rPr>
+              <a:t>FINRA 3110</a:t>
+            </a:r>
+            <a:pPr algn="ctr" indent="0" marL="0">
+              <a:buNone/>
+            </a:pPr>
+            <a:r>
+              <a:rPr lang="en-US" sz="1000" dirty="0">
+                <a:solidFill>
+                  <a:schemeClr val="accent5"/>
+                </a:solidFill>
+              </a:rPr>
+              <a:t>  barriers</a:t>
+            </a:r>
+            <a:endParaRPr lang="en-US" sz="1000" dirty="0"/>
+          </a:p>
+        </p:txBody>
+      </p:sp>
+      <p:sp>
+        <p:nvSpPr>
+          <p:cNvPr id="19" name="reg SEC 17a-4"/>
+          <p:cNvSpPr/>
+          <p:nvPr/>
+        </p:nvSpPr>
+        <p:spPr>
+          <a:xfrm>
+            <a:off x="2560320" y="4160520"/>
+            <a:ext cx="1920240" cy="457200"/>
           </a:xfrm>
           <a:prstGeom prst="roundRect">
             <a:avLst>
-              <a:gd name="adj" fmla="val 9524"/>
+              <a:gd name="adj" fmla="val 50000"/>
             </a:avLst>
           </a:prstGeom>
           <a:solidFill>
@@ -9409,14 +10751,14 @@
       </p:sp>
       <p:sp>
         <p:nvSpPr>
-          <p:cNvPr id="9" name="Text 6"/>
-          <p:cNvSpPr txBox="1"/>
-          <p:nvPr/>
-        </p:nvSpPr>
-        <p:spPr>
-          <a:xfrm>
-            <a:off x="5257800" y="2286000"/>
-            <a:ext cx="1737360" cy="960120"/>
+          <p:cNvPr id="20" name="Text 15"/>
+          <p:cNvSpPr txBox="1"/>
+          <p:nvPr/>
+        </p:nvSpPr>
+        <p:spPr>
+          <a:xfrm>
+            <a:off x="2560320" y="4160520"/>
+            <a:ext cx="1920240" cy="457200"/>
           </a:xfrm>
           <a:prstGeom prst="rect">
             <a:avLst/>
@@ -9428,74 +10770,46 @@
           <a:bodyPr wrap="square" lIns="0" tIns="0" rIns="0" bIns="0" rtlCol="0" anchor="ctr"/>
           <a:lstStyle/>
           <a:p>
-            <a:pPr indent="0" marL="0">
-              <a:buNone/>
-            </a:pPr>
-            <a:r>
-              <a:rPr lang="en-US" sz="2400" b="1" dirty="0">
+            <a:pPr algn="ctr" indent="0" marL="0">
+              <a:buNone/>
+            </a:pPr>
+            <a:r>
+              <a:rPr lang="en-US" sz="1000" b="1" dirty="0">
                 <a:solidFill>
                   <a:schemeClr val="tx1"/>
                 </a:solidFill>
-                <a:latin typeface="Cambria" pitchFamily="34" charset="0"/>
-                <a:ea typeface="Cambria" pitchFamily="34" charset="-122"/>
-                <a:cs typeface="Cambria" pitchFamily="34" charset="-120"/>
-              </a:rPr>
-              <a:t>365</a:t>
-            </a:r>
-            <a:endParaRPr lang="en-US" sz="2400" dirty="0"/>
-          </a:p>
-        </p:txBody>
-      </p:sp>
-      <p:sp>
-        <p:nvSpPr>
-          <p:cNvPr id="10" name="Text 7"/>
-          <p:cNvSpPr txBox="1"/>
-          <p:nvPr/>
-        </p:nvSpPr>
-        <p:spPr>
-          <a:xfrm>
-            <a:off x="7040880" y="2331720"/>
-            <a:ext cx="1554480" cy="868680"/>
-          </a:xfrm>
-          <a:prstGeom prst="rect">
-            <a:avLst/>
-          </a:prstGeom>
-          <a:noFill/>
-          <a:ln/>
-        </p:spPr>
-        <p:txBody>
-          <a:bodyPr wrap="square" lIns="0" tIns="0" rIns="0" bIns="0" rtlCol="0" anchor="ctr"/>
-          <a:lstStyle/>
-          <a:p>
-            <a:pPr indent="0" marL="0">
-              <a:buNone/>
-            </a:pPr>
-            <a:r>
-              <a:rPr lang="en-US" sz="1100" dirty="0">
-                <a:solidFill>
-                  <a:schemeClr val="tx2"/>
-                </a:solidFill>
-              </a:rPr>
-              <a:t>tests, offline, under a minute, on every push</a:t>
-            </a:r>
-            <a:endParaRPr lang="en-US" sz="1100" dirty="0"/>
-          </a:p>
-        </p:txBody>
-      </p:sp>
-      <p:sp>
-        <p:nvSpPr>
-          <p:cNvPr id="11" name="tile &lt;0.02 ms"/>
-          <p:cNvSpPr/>
-          <p:nvPr/>
-        </p:nvSpPr>
-        <p:spPr>
-          <a:xfrm>
-            <a:off x="5120640" y="3383280"/>
-            <a:ext cx="3566160" cy="960120"/>
+              </a:rPr>
+              <a:t>SEC 17a-4</a:t>
+            </a:r>
+            <a:pPr algn="ctr" indent="0" marL="0">
+              <a:buNone/>
+            </a:pPr>
+            <a:r>
+              <a:rPr lang="en-US" sz="1000" dirty="0">
+                <a:solidFill>
+                  <a:schemeClr val="accent5"/>
+                </a:solidFill>
+              </a:rPr>
+              <a:t>  audit trail</a:t>
+            </a:r>
+            <a:endParaRPr lang="en-US" sz="1000" dirty="0"/>
+          </a:p>
+        </p:txBody>
+      </p:sp>
+      <p:sp>
+        <p:nvSpPr>
+          <p:cNvPr id="21" name="reg EU AI Act Art. 12"/>
+          <p:cNvSpPr/>
+          <p:nvPr/>
+        </p:nvSpPr>
+        <p:spPr>
+          <a:xfrm>
+            <a:off x="4663440" y="4160520"/>
+            <a:ext cx="1920240" cy="457200"/>
           </a:xfrm>
           <a:prstGeom prst="roundRect">
             <a:avLst>
-              <a:gd name="adj" fmla="val 9524"/>
+              <a:gd name="adj" fmla="val 50000"/>
             </a:avLst>
           </a:prstGeom>
           <a:solidFill>
@@ -9506,14 +10820,14 @@
       </p:sp>
       <p:sp>
         <p:nvSpPr>
-          <p:cNvPr id="12" name="Text 9"/>
-          <p:cNvSpPr txBox="1"/>
-          <p:nvPr/>
-        </p:nvSpPr>
-        <p:spPr>
-          <a:xfrm>
-            <a:off x="5257800" y="3383280"/>
-            <a:ext cx="1737360" cy="960120"/>
+          <p:cNvPr id="22" name="Text 17"/>
+          <p:cNvSpPr txBox="1"/>
+          <p:nvPr/>
+        </p:nvSpPr>
+        <p:spPr>
+          <a:xfrm>
+            <a:off x="4663440" y="4160520"/>
+            <a:ext cx="1920240" cy="457200"/>
           </a:xfrm>
           <a:prstGeom prst="rect">
             <a:avLst/>
@@ -9525,34 +10839,64 @@
           <a:bodyPr wrap="square" lIns="0" tIns="0" rIns="0" bIns="0" rtlCol="0" anchor="ctr"/>
           <a:lstStyle/>
           <a:p>
-            <a:pPr indent="0" marL="0">
-              <a:buNone/>
-            </a:pPr>
-            <a:r>
-              <a:rPr lang="en-US" sz="2400" b="1" dirty="0">
+            <a:pPr algn="ctr" indent="0" marL="0">
+              <a:buNone/>
+            </a:pPr>
+            <a:r>
+              <a:rPr lang="en-US" sz="1000" b="1" dirty="0">
                 <a:solidFill>
                   <a:schemeClr val="tx1"/>
                 </a:solidFill>
-                <a:latin typeface="Cambria" pitchFamily="34" charset="0"/>
-                <a:ea typeface="Cambria" pitchFamily="34" charset="-122"/>
-                <a:cs typeface="Cambria" pitchFamily="34" charset="-120"/>
-              </a:rPr>
-              <a:t>&lt;0.02 ms</a:t>
-            </a:r>
-            <a:endParaRPr lang="en-US" sz="2400" dirty="0"/>
-          </a:p>
-        </p:txBody>
-      </p:sp>
-      <p:sp>
-        <p:nvSpPr>
-          <p:cNvPr id="13" name="Text 10"/>
-          <p:cNvSpPr txBox="1"/>
-          <p:nvPr/>
-        </p:nvSpPr>
-        <p:spPr>
-          <a:xfrm>
-            <a:off x="7040880" y="3429000"/>
-            <a:ext cx="1554480" cy="868680"/>
+              </a:rPr>
+              <a:t>EU AI Act Art. 12</a:t>
+            </a:r>
+            <a:pPr algn="ctr" indent="0" marL="0">
+              <a:buNone/>
+            </a:pPr>
+            <a:r>
+              <a:rPr lang="en-US" sz="1000" dirty="0">
+                <a:solidFill>
+                  <a:schemeClr val="accent5"/>
+                </a:solidFill>
+              </a:rPr>
+              <a:t>  logging</a:t>
+            </a:r>
+            <a:endParaRPr lang="en-US" sz="1000" dirty="0"/>
+          </a:p>
+        </p:txBody>
+      </p:sp>
+      <p:sp>
+        <p:nvSpPr>
+          <p:cNvPr id="23" name="reg DORA"/>
+          <p:cNvSpPr/>
+          <p:nvPr/>
+        </p:nvSpPr>
+        <p:spPr>
+          <a:xfrm>
+            <a:off x="6766560" y="4160520"/>
+            <a:ext cx="1920240" cy="457200"/>
+          </a:xfrm>
+          <a:prstGeom prst="roundRect">
+            <a:avLst>
+              <a:gd name="adj" fmla="val 50000"/>
+            </a:avLst>
+          </a:prstGeom>
+          <a:solidFill>
+            <a:schemeClr val="bg2"/>
+          </a:solidFill>
+          <a:ln/>
+        </p:spPr>
+      </p:sp>
+      <p:sp>
+        <p:nvSpPr>
+          <p:cNvPr id="24" name="Text 19"/>
+          <p:cNvSpPr txBox="1"/>
+          <p:nvPr/>
+        </p:nvSpPr>
+        <p:spPr>
+          <a:xfrm>
+            <a:off x="6766560" y="4160520"/>
+            <a:ext cx="1920240" cy="457200"/>
           </a:xfrm>
           <a:prstGeom prst="rect">
             <a:avLst/>
@@ -9564,43 +10908,18 @@
           <a:bodyPr wrap="square" lIns="0" tIns="0" rIns="0" bIns="0" rtlCol="0" anchor="ctr"/>
           <a:lstStyle/>
           <a:p>
-            <a:pPr indent="0" marL="0">
-              <a:buNone/>
-            </a:pPr>
-            <a:r>
-              <a:rPr lang="en-US" sz="1100" dirty="0">
-                <a:solidFill>
-                  <a:schemeClr val="tx2"/>
-                </a:solidFill>
-              </a:rPr>
-              <a:t>per check: cards, IBAN, PESEL, secrets</a:t>
-            </a:r>
-            <a:endParaRPr lang="en-US" sz="1100" dirty="0"/>
-          </a:p>
-        </p:txBody>
-      </p:sp>
-      <p:sp>
-        <p:nvSpPr>
-          <p:cNvPr id="14" name="Text 11"/>
-          <p:cNvSpPr txBox="1"/>
-          <p:nvPr/>
-        </p:nvSpPr>
-        <p:spPr>
-          <a:xfrm>
-            <a:off x="5120640" y="4434840"/>
-            <a:ext cx="3566160" cy="274320"/>
-          </a:xfrm>
-          <a:prstGeom prst="rect">
-            <a:avLst/>
-          </a:prstGeom>
-          <a:noFill/>
-          <a:ln/>
-        </p:spPr>
-        <p:txBody>
-          <a:bodyPr wrap="square" lIns="0" tIns="0" rIns="0" bIns="0" rtlCol="0" anchor="ctr"/>
-          <a:lstStyle/>
-          <a:p>
-            <a:pPr indent="0" marL="0">
+            <a:pPr algn="ctr" indent="0" marL="0">
+              <a:buNone/>
+            </a:pPr>
+            <a:r>
+              <a:rPr lang="en-US" sz="1000" b="1" dirty="0">
+                <a:solidFill>
+                  <a:schemeClr val="tx1"/>
+                </a:solidFill>
+              </a:rPr>
+              <a:t>DORA</a:t>
+            </a:r>
+            <a:pPr algn="ctr" indent="0" marL="0">
               <a:buNone/>
             </a:pPr>
             <a:r>
@@ -9609,7 +10928,7 @@
                   <a:schemeClr val="accent5"/>
                 </a:solidFill>
               </a:rPr>
-              <a:t>Source: docs/benchmarks.md (LLMail, bench-e2e)</a:t>
+              <a:t>  multi-vendor</a:t>
             </a:r>
             <a:endParaRPr lang="en-US" sz="1000" dirty="0"/>
           </a:p>
@@ -9714,13 +11033,13 @@
             <a:r>
               <a:rPr lang="en-US" sz="2800" b="1" dirty="0">
                 <a:solidFill>
-                  <a:schemeClr val="tx1"/>
+                  <a:schemeClr val="bg1"/>
                 </a:solidFill>
                 <a:latin typeface="Cambria" pitchFamily="34" charset="0"/>
                 <a:ea typeface="Cambria" pitchFamily="34" charset="-122"/>
                 <a:cs typeface="Cambria" pitchFamily="34" charset="-120"/>
               </a:rPr>
-              <a:t>Every decision on the record</a:t>
+              <a:t>Monday, 09:04. Again</a:t>
             </a:r>
             <a:endParaRPr lang="en-US" sz="2800" dirty="0"/>
           </a:p>
@@ -9728,489 +11047,49 @@
       </p:sp>
       <p:sp>
         <p:nvSpPr>
-          <p:cNvPr id="3" name="audit entry"/>
-          <p:cNvSpPr/>
-          <p:nvPr/>
-        </p:nvSpPr>
-        <p:spPr>
-          <a:xfrm>
-            <a:off x="457200" y="1188720"/>
-            <a:ext cx="4663440" cy="2834640"/>
+          <p:cNvPr id="3" name="outcome 1"/>
+          <p:cNvSpPr/>
+          <p:nvPr/>
+        </p:nvSpPr>
+        <p:spPr>
+          <a:xfrm>
+            <a:off x="457200" y="1234440"/>
+            <a:ext cx="1920240" cy="1920240"/>
           </a:xfrm>
           <a:prstGeom prst="roundRect">
             <a:avLst>
-              <a:gd name="adj" fmla="val 3871"/>
+              <a:gd name="adj" fmla="val 5714"/>
             </a:avLst>
           </a:prstGeom>
           <a:solidFill>
-            <a:schemeClr val="tx1"/>
+            <a:schemeClr val="tx2"/>
           </a:solidFill>
           <a:ln/>
         </p:spPr>
       </p:sp>
       <p:sp>
         <p:nvSpPr>
-          <p:cNvPr id="4" name="Text 2"/>
-          <p:cNvSpPr txBox="1"/>
-          <p:nvPr/>
-        </p:nvSpPr>
-        <p:spPr>
-          <a:xfrm>
-            <a:off x="640080" y="1325880"/>
-            <a:ext cx="4389120" cy="2560320"/>
-          </a:xfrm>
-          <a:prstGeom prst="rect">
-            <a:avLst/>
-          </a:prstGeom>
-          <a:noFill/>
-          <a:ln/>
-        </p:spPr>
-        <p:txBody>
-          <a:bodyPr wrap="square" lIns="0" tIns="0" rIns="0" bIns="0" rtlCol="0" anchor="t"/>
-          <a:lstStyle/>
-          <a:p>
-            <a:pPr indent="0" marL="0">
-              <a:spcAft>
-                <a:spcPts val="400"/>
-              </a:spcAft>
-              <a:buNone/>
-            </a:pPr>
-            <a:r>
-              <a:rPr lang="en-US" sz="1100" dirty="0">
-                <a:solidFill>
-                  <a:schemeClr val="accent5"/>
-                </a:solidFill>
-                <a:latin typeface="Courier New" pitchFamily="34" charset="0"/>
-                <a:ea typeface="Courier New" pitchFamily="34" charset="-122"/>
-                <a:cs typeface="Courier New" pitchFamily="34" charset="-120"/>
-              </a:rPr>
-              <a:t>{ </a:t>
-            </a:r>
-            <a:pPr indent="0" marL="0">
-              <a:spcAft>
-                <a:spcPts val="400"/>
-              </a:spcAft>
-              <a:buNone/>
-            </a:pPr>
-            <a:r>
-              <a:rPr lang="en-US" sz="1100" dirty="0">
-                <a:solidFill>
-                  <a:schemeClr val="accent5"/>
-                </a:solidFill>
-                <a:latin typeface="Courier New" pitchFamily="34" charset="0"/>
-                <a:ea typeface="Courier New" pitchFamily="34" charset="-122"/>
-                <a:cs typeface="Courier New" pitchFamily="34" charset="-120"/>
-              </a:rPr>
-              <a:t>"user": </a:t>
-            </a:r>
-            <a:pPr indent="0" marL="0">
-              <a:spcAft>
-                <a:spcPts val="400"/>
-              </a:spcAft>
-              <a:buNone/>
-            </a:pPr>
-            <a:r>
-              <a:rPr lang="en-US" sz="1100" dirty="0">
-                <a:solidFill>
-                  <a:schemeClr val="accent1"/>
-                </a:solidFill>
-                <a:latin typeface="Courier New" pitchFamily="34" charset="0"/>
-                <a:ea typeface="Courier New" pitchFamily="34" charset="-122"/>
-                <a:cs typeface="Courier New" pitchFamily="34" charset="-120"/>
-              </a:rPr>
-              <a:t>"olivia"</a:t>
-            </a:r>
-            <a:pPr indent="0" marL="0">
-              <a:spcAft>
-                <a:spcPts val="400"/>
-              </a:spcAft>
-              <a:buNone/>
-            </a:pPr>
-            <a:r>
-              <a:rPr lang="en-US" sz="1100" dirty="0">
-                <a:solidFill>
-                  <a:schemeClr val="accent5"/>
-                </a:solidFill>
-                <a:latin typeface="Courier New" pitchFamily="34" charset="0"/>
-                <a:ea typeface="Courier New" pitchFamily="34" charset="-122"/>
-                <a:cs typeface="Courier New" pitchFamily="34" charset="-120"/>
-              </a:rPr>
-              <a:t>, "agent": </a:t>
-            </a:r>
-            <a:pPr indent="0" marL="0">
-              <a:spcAft>
-                <a:spcPts val="400"/>
-              </a:spcAft>
-              <a:buNone/>
-            </a:pPr>
-            <a:r>
-              <a:rPr lang="en-US" sz="1100" dirty="0">
-                <a:solidFill>
-                  <a:schemeClr val="accent1"/>
-                </a:solidFill>
-                <a:latin typeface="Courier New" pitchFamily="34" charset="0"/>
-                <a:ea typeface="Courier New" pitchFamily="34" charset="-122"/>
-                <a:cs typeface="Courier New" pitchFamily="34" charset="-120"/>
-              </a:rPr>
-              <a:t>"onboarding-assistant"</a:t>
-            </a:r>
-            <a:endParaRPr lang="en-US" sz="1100" dirty="0"/>
-          </a:p>
-          <a:p>
-            <a:pPr indent="0" marL="0">
-              <a:spcAft>
-                <a:spcPts val="400"/>
-              </a:spcAft>
-              <a:buNone/>
-            </a:pPr>
-            <a:r>
-              <a:rPr lang="en-US" sz="1100" dirty="0">
-                <a:solidFill>
-                  <a:schemeClr val="accent5"/>
-                </a:solidFill>
-                <a:latin typeface="Courier New" pitchFamily="34" charset="0"/>
-                <a:ea typeface="Courier New" pitchFamily="34" charset="-122"/>
-                <a:cs typeface="Courier New" pitchFamily="34" charset="-120"/>
-              </a:rPr>
-              <a:t>  "purpose": </a:t>
-            </a:r>
-            <a:pPr indent="0" marL="0">
-              <a:spcAft>
-                <a:spcPts val="400"/>
-              </a:spcAft>
-              <a:buNone/>
-            </a:pPr>
-            <a:r>
-              <a:rPr lang="en-US" sz="1100" dirty="0">
-                <a:solidFill>
-                  <a:schemeClr val="accent1"/>
-                </a:solidFill>
-                <a:latin typeface="Courier New" pitchFamily="34" charset="0"/>
-                <a:ea typeface="Courier New" pitchFamily="34" charset="-122"/>
-                <a:cs typeface="Courier New" pitchFamily="34" charset="-120"/>
-              </a:rPr>
-              <a:t>"client-onboarding"</a:t>
-            </a:r>
-            <a:endParaRPr lang="en-US" sz="1100" dirty="0"/>
-          </a:p>
-          <a:p>
-            <a:pPr indent="0" marL="0">
-              <a:spcAft>
-                <a:spcPts val="400"/>
-              </a:spcAft>
-              <a:buNone/>
-            </a:pPr>
-            <a:r>
-              <a:rPr lang="en-US" sz="1100" dirty="0">
-                <a:solidFill>
-                  <a:schemeClr val="accent5"/>
-                </a:solidFill>
-                <a:latin typeface="Courier New" pitchFamily="34" charset="0"/>
-                <a:ea typeface="Courier New" pitchFamily="34" charset="-122"/>
-                <a:cs typeface="Courier New" pitchFamily="34" charset="-120"/>
-              </a:rPr>
-              <a:t>  "policy_version": </a:t>
-            </a:r>
-            <a:pPr indent="0" marL="0">
-              <a:spcAft>
-                <a:spcPts val="400"/>
-              </a:spcAft>
-              <a:buNone/>
-            </a:pPr>
-            <a:r>
-              <a:rPr lang="en-US" sz="1100" dirty="0">
-                <a:solidFill>
-                  <a:schemeClr val="accent2"/>
-                </a:solidFill>
-                <a:latin typeface="Courier New" pitchFamily="34" charset="0"/>
-                <a:ea typeface="Courier New" pitchFamily="34" charset="-122"/>
-                <a:cs typeface="Courier New" pitchFamily="34" charset="-120"/>
-              </a:rPr>
-              <a:t>"0.2@780fe563"</a:t>
-            </a:r>
-            <a:endParaRPr lang="en-US" sz="1100" dirty="0"/>
-          </a:p>
-          <a:p>
-            <a:pPr indent="0" marL="0">
-              <a:spcAft>
-                <a:spcPts val="400"/>
-              </a:spcAft>
-              <a:buNone/>
-            </a:pPr>
-            <a:r>
-              <a:rPr lang="en-US" sz="1100" dirty="0">
-                <a:solidFill>
-                  <a:schemeClr val="accent5"/>
-                </a:solidFill>
-                <a:latin typeface="Courier New" pitchFamily="34" charset="0"/>
-                <a:ea typeface="Courier New" pitchFamily="34" charset="-122"/>
-                <a:cs typeface="Courier New" pitchFamily="34" charset="-120"/>
-              </a:rPr>
-              <a:t>  "decisions": [{</a:t>
-            </a:r>
-            <a:endParaRPr lang="en-US" sz="1100" dirty="0"/>
-          </a:p>
-          <a:p>
-            <a:pPr indent="0" marL="0">
-              <a:spcAft>
-                <a:spcPts val="400"/>
-              </a:spcAft>
-              <a:buNone/>
-            </a:pPr>
-            <a:r>
-              <a:rPr lang="en-US" sz="1100" dirty="0">
-                <a:solidFill>
-                  <a:schemeClr val="accent5"/>
-                </a:solidFill>
-                <a:latin typeface="Courier New" pitchFamily="34" charset="0"/>
-                <a:ea typeface="Courier New" pitchFamily="34" charset="-122"/>
-                <a:cs typeface="Courier New" pitchFamily="34" charset="-120"/>
-              </a:rPr>
-              <a:t>    "control": </a:t>
-            </a:r>
-            <a:pPr indent="0" marL="0">
-              <a:spcAft>
-                <a:spcPts val="400"/>
-              </a:spcAft>
-              <a:buNone/>
-            </a:pPr>
-            <a:r>
-              <a:rPr lang="en-US" sz="1100" dirty="0">
-                <a:solidFill>
-                  <a:schemeClr val="bg1"/>
-                </a:solidFill>
-                <a:latin typeface="Courier New" pitchFamily="34" charset="0"/>
-                <a:ea typeface="Courier New" pitchFamily="34" charset="-122"/>
-                <a:cs typeface="Courier New" pitchFamily="34" charset="-120"/>
-              </a:rPr>
-              <a:t>"flow.sensitive_to_external"</a:t>
-            </a:r>
-            <a:endParaRPr lang="en-US" sz="1100" dirty="0"/>
-          </a:p>
-          <a:p>
-            <a:pPr indent="0" marL="0">
-              <a:spcAft>
-                <a:spcPts val="400"/>
-              </a:spcAft>
-              <a:buNone/>
-            </a:pPr>
-            <a:r>
-              <a:rPr lang="en-US" sz="1100" dirty="0">
-                <a:solidFill>
-                  <a:schemeClr val="accent5"/>
-                </a:solidFill>
-                <a:latin typeface="Courier New" pitchFamily="34" charset="0"/>
-                <a:ea typeface="Courier New" pitchFamily="34" charset="-122"/>
-                <a:cs typeface="Courier New" pitchFamily="34" charset="-120"/>
-              </a:rPr>
-              <a:t>    "action": </a:t>
-            </a:r>
-            <a:pPr indent="0" marL="0">
-              <a:spcAft>
-                <a:spcPts val="400"/>
-              </a:spcAft>
-              <a:buNone/>
-            </a:pPr>
-            <a:r>
-              <a:rPr lang="en-US" sz="1100" dirty="0">
-                <a:solidFill>
-                  <a:schemeClr val="accent3"/>
-                </a:solidFill>
-                <a:latin typeface="Courier New" pitchFamily="34" charset="0"/>
-                <a:ea typeface="Courier New" pitchFamily="34" charset="-122"/>
-                <a:cs typeface="Courier New" pitchFamily="34" charset="-120"/>
-              </a:rPr>
-              <a:t>"block"</a:t>
-            </a:r>
-            <a:pPr indent="0" marL="0">
-              <a:spcAft>
-                <a:spcPts val="400"/>
-              </a:spcAft>
-              <a:buNone/>
-            </a:pPr>
-            <a:r>
-              <a:rPr lang="en-US" sz="1100" dirty="0">
-                <a:solidFill>
-                  <a:schemeClr val="accent5"/>
-                </a:solidFill>
-                <a:latin typeface="Courier New" pitchFamily="34" charset="0"/>
-                <a:ea typeface="Courier New" pitchFamily="34" charset="-122"/>
-                <a:cs typeface="Courier New" pitchFamily="34" charset="-120"/>
-              </a:rPr>
-              <a:t>,</a:t>
-            </a:r>
-            <a:endParaRPr lang="en-US" sz="1100" dirty="0"/>
-          </a:p>
-          <a:p>
-            <a:pPr indent="0" marL="0">
-              <a:spcAft>
-                <a:spcPts val="400"/>
-              </a:spcAft>
-              <a:buNone/>
-            </a:pPr>
-            <a:r>
-              <a:rPr lang="en-US" sz="1100" dirty="0">
-                <a:solidFill>
-                  <a:schemeClr val="accent5"/>
-                </a:solidFill>
-                <a:latin typeface="Courier New" pitchFamily="34" charset="0"/>
-                <a:ea typeface="Courier New" pitchFamily="34" charset="-122"/>
-                <a:cs typeface="Courier New" pitchFamily="34" charset="-120"/>
-              </a:rPr>
-              <a:t>    "where": </a:t>
-            </a:r>
-            <a:pPr indent="0" marL="0">
-              <a:spcAft>
-                <a:spcPts val="400"/>
-              </a:spcAft>
-              <a:buNone/>
-            </a:pPr>
-            <a:r>
-              <a:rPr lang="en-US" sz="1100" dirty="0">
-                <a:solidFill>
-                  <a:schemeClr val="bg1"/>
-                </a:solidFill>
-                <a:latin typeface="Courier New" pitchFamily="34" charset="0"/>
-                <a:ea typeface="Courier New" pitchFamily="34" charset="-122"/>
-                <a:cs typeface="Courier New" pitchFamily="34" charset="-120"/>
-              </a:rPr>
-              <a:t>"tool_call:send_email"</a:t>
-            </a:r>
-            <a:pPr indent="0" marL="0">
-              <a:spcAft>
-                <a:spcPts val="400"/>
-              </a:spcAft>
-              <a:buNone/>
-            </a:pPr>
-            <a:r>
-              <a:rPr lang="en-US" sz="1100" dirty="0">
-                <a:solidFill>
-                  <a:schemeClr val="accent5"/>
-                </a:solidFill>
-                <a:latin typeface="Courier New" pitchFamily="34" charset="0"/>
-                <a:ea typeface="Courier New" pitchFamily="34" charset="-122"/>
-                <a:cs typeface="Courier New" pitchFamily="34" charset="-120"/>
-              </a:rPr>
-              <a:t> }]</a:t>
-            </a:r>
-            <a:endParaRPr lang="en-US" sz="1100" dirty="0"/>
-          </a:p>
-          <a:p>
-            <a:pPr indent="0" marL="0">
-              <a:spcAft>
-                <a:spcPts val="400"/>
-              </a:spcAft>
-              <a:buNone/>
-            </a:pPr>
-            <a:r>
-              <a:rPr lang="en-US" sz="1100" dirty="0">
-                <a:solidFill>
-                  <a:schemeClr val="accent5"/>
-                </a:solidFill>
-                <a:latin typeface="Courier New" pitchFamily="34" charset="0"/>
-                <a:ea typeface="Courier New" pitchFamily="34" charset="-122"/>
-                <a:cs typeface="Courier New" pitchFamily="34" charset="-120"/>
-              </a:rPr>
-              <a:t>  "prev_hash": </a:t>
-            </a:r>
-            <a:pPr indent="0" marL="0">
-              <a:spcAft>
-                <a:spcPts val="400"/>
-              </a:spcAft>
-              <a:buNone/>
-            </a:pPr>
-            <a:r>
-              <a:rPr lang="en-US" sz="1100" dirty="0">
-                <a:solidFill>
-                  <a:schemeClr val="accent2"/>
-                </a:solidFill>
-                <a:latin typeface="Courier New" pitchFamily="34" charset="0"/>
-                <a:ea typeface="Courier New" pitchFamily="34" charset="-122"/>
-                <a:cs typeface="Courier New" pitchFamily="34" charset="-120"/>
-              </a:rPr>
-              <a:t>"ec60d5f7…"</a:t>
-            </a:r>
-            <a:endParaRPr lang="en-US" sz="1100" dirty="0"/>
-          </a:p>
-          <a:p>
-            <a:pPr indent="0" marL="0">
-              <a:spcAft>
-                <a:spcPts val="400"/>
-              </a:spcAft>
-              <a:buNone/>
-            </a:pPr>
-            <a:r>
-              <a:rPr lang="en-US" sz="1100" dirty="0">
-                <a:solidFill>
-                  <a:schemeClr val="accent5"/>
-                </a:solidFill>
-                <a:latin typeface="Courier New" pitchFamily="34" charset="0"/>
-                <a:ea typeface="Courier New" pitchFamily="34" charset="-122"/>
-                <a:cs typeface="Courier New" pitchFamily="34" charset="-120"/>
-              </a:rPr>
-              <a:t>  "hash": </a:t>
-            </a:r>
-            <a:pPr indent="0" marL="0">
-              <a:spcAft>
-                <a:spcPts val="400"/>
-              </a:spcAft>
-              <a:buNone/>
-            </a:pPr>
-            <a:r>
-              <a:rPr lang="en-US" sz="1100" dirty="0">
-                <a:solidFill>
-                  <a:schemeClr val="accent2"/>
-                </a:solidFill>
-                <a:latin typeface="Courier New" pitchFamily="34" charset="0"/>
-                <a:ea typeface="Courier New" pitchFamily="34" charset="-122"/>
-                <a:cs typeface="Courier New" pitchFamily="34" charset="-120"/>
-              </a:rPr>
-              <a:t>"8edfcb91…"</a:t>
-            </a:r>
-            <a:pPr indent="0" marL="0">
-              <a:spcAft>
-                <a:spcPts val="400"/>
-              </a:spcAft>
-              <a:buNone/>
-            </a:pPr>
-            <a:r>
-              <a:rPr lang="en-US" sz="1100" dirty="0">
-                <a:solidFill>
-                  <a:schemeClr val="accent5"/>
-                </a:solidFill>
-                <a:latin typeface="Courier New" pitchFamily="34" charset="0"/>
-                <a:ea typeface="Courier New" pitchFamily="34" charset="-122"/>
-                <a:cs typeface="Courier New" pitchFamily="34" charset="-120"/>
-              </a:rPr>
-              <a:t> }</a:t>
-            </a:r>
-            <a:endParaRPr lang="en-US" sz="1100" dirty="0"/>
-          </a:p>
-        </p:txBody>
-      </p:sp>
-      <p:sp>
-        <p:nvSpPr>
-          <p:cNvPr id="5" name="Shape 3"/>
-          <p:cNvSpPr/>
-          <p:nvPr/>
-        </p:nvSpPr>
-        <p:spPr>
-          <a:xfrm>
-            <a:off x="5440680" y="1234440"/>
-            <a:ext cx="502920" cy="502920"/>
+          <p:cNvPr id="4" name="Shape 2"/>
+          <p:cNvSpPr/>
+          <p:nvPr/>
+        </p:nvSpPr>
+        <p:spPr>
+          <a:xfrm>
+            <a:off x="640080" y="1417320"/>
+            <a:ext cx="548640" cy="548640"/>
           </a:xfrm>
           <a:prstGeom prst="ellipse">
             <a:avLst/>
           </a:prstGeom>
           <a:solidFill>
-            <a:schemeClr val="accent1"/>
+            <a:schemeClr val="accent2"/>
           </a:solidFill>
           <a:ln/>
         </p:spPr>
       </p:sp>
       <p:pic>
         <p:nvPicPr>
-          <p:cNvPr id="6" name="Image 0" descr="preencoded.png">    </p:cNvPr>
+          <p:cNvPr id="5" name="Image 0" descr="preencoded.png">    </p:cNvPr>
           <p:cNvPicPr>
             <a:picLocks noChangeAspect="1"/>
           </p:cNvPicPr>
@@ -10224,8 +11103,8 @@
         </p:blipFill>
         <p:spPr>
           <a:xfrm>
-            <a:off x="5566410" y="1360170"/>
-            <a:ext cx="251460" cy="251460"/>
+            <a:off x="777240" y="1554480"/>
+            <a:ext cx="274320" cy="274320"/>
           </a:xfrm>
           <a:prstGeom prst="rect">
             <a:avLst/>
@@ -10234,35 +11113,35 @@
       </p:pic>
       <p:sp>
         <p:nvSpPr>
-          <p:cNvPr id="7" name="Text 4"/>
-          <p:cNvSpPr txBox="1"/>
-          <p:nvPr/>
-        </p:nvSpPr>
-        <p:spPr>
-          <a:xfrm>
-            <a:off x="6080760" y="1188720"/>
-            <a:ext cx="2606040" cy="320040"/>
-          </a:xfrm>
-          <a:prstGeom prst="rect">
-            <a:avLst/>
-          </a:prstGeom>
-          <a:noFill/>
-          <a:ln/>
-        </p:spPr>
-        <p:txBody>
-          <a:bodyPr wrap="square" lIns="0" tIns="0" rIns="0" bIns="0" rtlCol="0" anchor="ctr"/>
+          <p:cNvPr id="6" name="Text 3"/>
+          <p:cNvSpPr txBox="1"/>
+          <p:nvPr/>
+        </p:nvSpPr>
+        <p:spPr>
+          <a:xfrm>
+            <a:off x="640080" y="2103120"/>
+            <a:ext cx="1600200" cy="960120"/>
+          </a:xfrm>
+          <a:prstGeom prst="rect">
+            <a:avLst/>
+          </a:prstGeom>
+          <a:noFill/>
+          <a:ln/>
+        </p:spPr>
+        <p:txBody>
+          <a:bodyPr wrap="square" lIns="0" tIns="0" rIns="0" bIns="0" rtlCol="0" anchor="t"/>
           <a:lstStyle/>
           <a:p>
             <a:pPr indent="0" marL="0">
               <a:buNone/>
             </a:pPr>
             <a:r>
-              <a:rPr lang="en-US" sz="1500" b="1" dirty="0">
-                <a:solidFill>
-                  <a:schemeClr val="tx1"/>
-                </a:solidFill>
-              </a:rPr>
-              <a:t>Who, which agent, why</a:t>
+              <a:rPr lang="en-US" sz="1500" dirty="0">
+                <a:solidFill>
+                  <a:schemeClr val="bg1"/>
+                </a:solidFill>
+              </a:rPr>
+              <a:t>The passport reached the sanctions check. Nowhere else.</a:t>
             </a:r>
             <a:endParaRPr lang="en-US" sz="1500" dirty="0"/>
           </a:p>
@@ -10270,63 +11149,49 @@
       </p:sp>
       <p:sp>
         <p:nvSpPr>
-          <p:cNvPr id="8" name="Text 5"/>
-          <p:cNvSpPr txBox="1"/>
-          <p:nvPr/>
-        </p:nvSpPr>
-        <p:spPr>
-          <a:xfrm>
-            <a:off x="6080760" y="1508760"/>
-            <a:ext cx="2606040" cy="502920"/>
-          </a:xfrm>
-          <a:prstGeom prst="rect">
-            <a:avLst/>
-          </a:prstGeom>
-          <a:noFill/>
-          <a:ln/>
-        </p:spPr>
-        <p:txBody>
-          <a:bodyPr wrap="square" lIns="0" tIns="0" rIns="0" bIns="0" rtlCol="0" anchor="t"/>
-          <a:lstStyle/>
-          <a:p>
-            <a:pPr indent="0" marL="0">
-              <a:buNone/>
-            </a:pPr>
-            <a:r>
-              <a:rPr lang="en-US" sz="1200" dirty="0">
-                <a:solidFill>
-                  <a:schemeClr val="tx2"/>
-                </a:solidFill>
-              </a:rPr>
-              <a:t>user, agent and purpose on every entry</a:t>
-            </a:r>
-            <a:endParaRPr lang="en-US" sz="1200" dirty="0"/>
-          </a:p>
-        </p:txBody>
-      </p:sp>
-      <p:sp>
-        <p:nvSpPr>
-          <p:cNvPr id="9" name="Shape 6"/>
-          <p:cNvSpPr/>
-          <p:nvPr/>
-        </p:nvSpPr>
-        <p:spPr>
-          <a:xfrm>
-            <a:off x="5440680" y="2194560"/>
-            <a:ext cx="502920" cy="502920"/>
+          <p:cNvPr id="7" name="outcome 2"/>
+          <p:cNvSpPr/>
+          <p:nvPr/>
+        </p:nvSpPr>
+        <p:spPr>
+          <a:xfrm>
+            <a:off x="2560320" y="1234440"/>
+            <a:ext cx="1920240" cy="1920240"/>
+          </a:xfrm>
+          <a:prstGeom prst="roundRect">
+            <a:avLst>
+              <a:gd name="adj" fmla="val 5714"/>
+            </a:avLst>
+          </a:prstGeom>
+          <a:solidFill>
+            <a:schemeClr val="tx2"/>
+          </a:solidFill>
+          <a:ln/>
+        </p:spPr>
+      </p:sp>
+      <p:sp>
+        <p:nvSpPr>
+          <p:cNvPr id="8" name="Shape 5"/>
+          <p:cNvSpPr/>
+          <p:nvPr/>
+        </p:nvSpPr>
+        <p:spPr>
+          <a:xfrm>
+            <a:off x="2743200" y="1417320"/>
+            <a:ext cx="548640" cy="548640"/>
           </a:xfrm>
           <a:prstGeom prst="ellipse">
             <a:avLst/>
           </a:prstGeom>
           <a:solidFill>
-            <a:schemeClr val="accent1"/>
+            <a:schemeClr val="accent3"/>
           </a:solidFill>
           <a:ln/>
         </p:spPr>
       </p:sp>
       <p:pic>
         <p:nvPicPr>
-          <p:cNvPr id="10" name="Image 1" descr="preencoded.png">    </p:cNvPr>
+          <p:cNvPr id="9" name="Image 1" descr="preencoded.png">    </p:cNvPr>
           <p:cNvPicPr>
             <a:picLocks noChangeAspect="1"/>
           </p:cNvPicPr>
@@ -10340,8 +11205,8 @@
         </p:blipFill>
         <p:spPr>
           <a:xfrm>
-            <a:off x="5566410" y="2320290"/>
-            <a:ext cx="251460" cy="251460"/>
+            <a:off x="2880360" y="1554480"/>
+            <a:ext cx="274320" cy="274320"/>
           </a:xfrm>
           <a:prstGeom prst="rect">
             <a:avLst/>
@@ -10350,35 +11215,35 @@
       </p:pic>
       <p:sp>
         <p:nvSpPr>
-          <p:cNvPr id="11" name="Text 7"/>
-          <p:cNvSpPr txBox="1"/>
-          <p:nvPr/>
-        </p:nvSpPr>
-        <p:spPr>
-          <a:xfrm>
-            <a:off x="6080760" y="2148840"/>
-            <a:ext cx="2606040" cy="320040"/>
-          </a:xfrm>
-          <a:prstGeom prst="rect">
-            <a:avLst/>
-          </a:prstGeom>
-          <a:noFill/>
-          <a:ln/>
-        </p:spPr>
-        <p:txBody>
-          <a:bodyPr wrap="square" lIns="0" tIns="0" rIns="0" bIns="0" rtlCol="0" anchor="ctr"/>
+          <p:cNvPr id="10" name="Text 6"/>
+          <p:cNvSpPr txBox="1"/>
+          <p:nvPr/>
+        </p:nvSpPr>
+        <p:spPr>
+          <a:xfrm>
+            <a:off x="2743200" y="2103120"/>
+            <a:ext cx="1600200" cy="960120"/>
+          </a:xfrm>
+          <a:prstGeom prst="rect">
+            <a:avLst/>
+          </a:prstGeom>
+          <a:noFill/>
+          <a:ln/>
+        </p:spPr>
+        <p:txBody>
+          <a:bodyPr wrap="square" lIns="0" tIns="0" rIns="0" bIns="0" rtlCol="0" anchor="t"/>
           <a:lstStyle/>
           <a:p>
             <a:pPr indent="0" marL="0">
               <a:buNone/>
             </a:pPr>
             <a:r>
-              <a:rPr lang="en-US" sz="1500" b="1" dirty="0">
-                <a:solidFill>
-                  <a:schemeClr val="tx1"/>
-                </a:solidFill>
-              </a:rPr>
-              <a:t>Which policy decided</a:t>
+              <a:rPr lang="en-US" sz="1500" dirty="0">
+                <a:solidFill>
+                  <a:schemeClr val="bg1"/>
+                </a:solidFill>
+              </a:rPr>
+              <a:t>The hidden sentence was quarantined, not obeyed.</a:t>
             </a:r>
             <a:endParaRPr lang="en-US" sz="1500" dirty="0"/>
           </a:p>
@@ -10386,63 +11251,49 @@
       </p:sp>
       <p:sp>
         <p:nvSpPr>
-          <p:cNvPr id="12" name="Text 8"/>
-          <p:cNvSpPr txBox="1"/>
-          <p:nvPr/>
-        </p:nvSpPr>
-        <p:spPr>
-          <a:xfrm>
-            <a:off x="6080760" y="2468880"/>
-            <a:ext cx="2606040" cy="502920"/>
-          </a:xfrm>
-          <a:prstGeom prst="rect">
-            <a:avLst/>
-          </a:prstGeom>
-          <a:noFill/>
-          <a:ln/>
-        </p:spPr>
-        <p:txBody>
-          <a:bodyPr wrap="square" lIns="0" tIns="0" rIns="0" bIns="0" rtlCol="0" anchor="t"/>
-          <a:lstStyle/>
-          <a:p>
-            <a:pPr indent="0" marL="0">
-              <a:buNone/>
-            </a:pPr>
-            <a:r>
-              <a:rPr lang="en-US" sz="1200" dirty="0">
-                <a:solidFill>
-                  <a:schemeClr val="tx2"/>
-                </a:solidFill>
-              </a:rPr>
-              <a:t>the policy version, even after a live edit</a:t>
-            </a:r>
-            <a:endParaRPr lang="en-US" sz="1200" dirty="0"/>
-          </a:p>
-        </p:txBody>
-      </p:sp>
-      <p:sp>
-        <p:nvSpPr>
-          <p:cNvPr id="13" name="Shape 9"/>
-          <p:cNvSpPr/>
-          <p:nvPr/>
-        </p:nvSpPr>
-        <p:spPr>
-          <a:xfrm>
-            <a:off x="5440680" y="3154680"/>
-            <a:ext cx="502920" cy="502920"/>
+          <p:cNvPr id="11" name="outcome 3"/>
+          <p:cNvSpPr/>
+          <p:nvPr/>
+        </p:nvSpPr>
+        <p:spPr>
+          <a:xfrm>
+            <a:off x="4663440" y="1234440"/>
+            <a:ext cx="1920240" cy="1920240"/>
+          </a:xfrm>
+          <a:prstGeom prst="roundRect">
+            <a:avLst>
+              <a:gd name="adj" fmla="val 5714"/>
+            </a:avLst>
+          </a:prstGeom>
+          <a:solidFill>
+            <a:schemeClr val="tx2"/>
+          </a:solidFill>
+          <a:ln/>
+        </p:spPr>
+      </p:sp>
+      <p:sp>
+        <p:nvSpPr>
+          <p:cNvPr id="12" name="Shape 8"/>
+          <p:cNvSpPr/>
+          <p:nvPr/>
+        </p:nvSpPr>
+        <p:spPr>
+          <a:xfrm>
+            <a:off x="4846320" y="1417320"/>
+            <a:ext cx="548640" cy="548640"/>
           </a:xfrm>
           <a:prstGeom prst="ellipse">
             <a:avLst/>
           </a:prstGeom>
           <a:solidFill>
-            <a:schemeClr val="accent1"/>
+            <a:schemeClr val="accent2"/>
           </a:solidFill>
           <a:ln/>
         </p:spPr>
       </p:sp>
       <p:pic>
         <p:nvPicPr>
-          <p:cNvPr id="14" name="Image 2" descr="preencoded.png">    </p:cNvPr>
+          <p:cNvPr id="13" name="Image 2" descr="preencoded.png">    </p:cNvPr>
           <p:cNvPicPr>
             <a:picLocks noChangeAspect="1"/>
           </p:cNvPicPr>
@@ -10456,8 +11307,8 @@
         </p:blipFill>
         <p:spPr>
           <a:xfrm>
-            <a:off x="5566410" y="3280410"/>
-            <a:ext cx="251460" cy="251460"/>
+            <a:off x="4983480" y="1554480"/>
+            <a:ext cx="274320" cy="274320"/>
           </a:xfrm>
           <a:prstGeom prst="rect">
             <a:avLst/>
@@ -10466,35 +11317,35 @@
       </p:pic>
       <p:sp>
         <p:nvSpPr>
-          <p:cNvPr id="15" name="Text 10"/>
-          <p:cNvSpPr txBox="1"/>
-          <p:nvPr/>
-        </p:nvSpPr>
-        <p:spPr>
-          <a:xfrm>
-            <a:off x="6080760" y="3108960"/>
-            <a:ext cx="2606040" cy="320040"/>
-          </a:xfrm>
-          <a:prstGeom prst="rect">
-            <a:avLst/>
-          </a:prstGeom>
-          <a:noFill/>
-          <a:ln/>
-        </p:spPr>
-        <p:txBody>
-          <a:bodyPr wrap="square" lIns="0" tIns="0" rIns="0" bIns="0" rtlCol="0" anchor="ctr"/>
+          <p:cNvPr id="14" name="Text 9"/>
+          <p:cNvSpPr txBox="1"/>
+          <p:nvPr/>
+        </p:nvSpPr>
+        <p:spPr>
+          <a:xfrm>
+            <a:off x="4846320" y="2103120"/>
+            <a:ext cx="1600200" cy="960120"/>
+          </a:xfrm>
+          <a:prstGeom prst="rect">
+            <a:avLst/>
+          </a:prstGeom>
+          <a:noFill/>
+          <a:ln/>
+        </p:spPr>
+        <p:txBody>
+          <a:bodyPr wrap="square" lIns="0" tIns="0" rIns="0" bIns="0" rtlCol="0" anchor="t"/>
           <a:lstStyle/>
           <a:p>
             <a:pPr indent="0" marL="0">
               <a:buNone/>
             </a:pPr>
             <a:r>
-              <a:rPr lang="en-US" sz="1500" b="1" dirty="0">
-                <a:solidFill>
-                  <a:schemeClr val="tx1"/>
-                </a:solidFill>
-              </a:rPr>
-              <a:t>Tamper-evident</a:t>
+              <a:rPr lang="en-US" sz="1500" dirty="0">
+                <a:solidFill>
+                  <a:schemeClr val="bg1"/>
+                </a:solidFill>
+              </a:rPr>
+              <a:t>Project Falcon stayed behind the wall.</a:t>
             </a:r>
             <a:endParaRPr lang="en-US" sz="1500" dirty="0"/>
           </a:p>
@@ -10502,72 +11353,116 @@
       </p:sp>
       <p:sp>
         <p:nvSpPr>
-          <p:cNvPr id="16" name="Text 11"/>
-          <p:cNvSpPr txBox="1"/>
-          <p:nvPr/>
-        </p:nvSpPr>
-        <p:spPr>
-          <a:xfrm>
-            <a:off x="6080760" y="3429000"/>
-            <a:ext cx="2606040" cy="502920"/>
-          </a:xfrm>
-          <a:prstGeom prst="rect">
-            <a:avLst/>
-          </a:prstGeom>
-          <a:noFill/>
-          <a:ln/>
-        </p:spPr>
-        <p:txBody>
-          <a:bodyPr wrap="square" lIns="0" tIns="0" rIns="0" bIns="0" rtlCol="0" anchor="t"/>
-          <a:lstStyle/>
-          <a:p>
-            <a:pPr indent="0" marL="0">
-              <a:buNone/>
-            </a:pPr>
-            <a:r>
-              <a:rPr lang="en-US" sz="1200" dirty="0">
-                <a:solidFill>
-                  <a:schemeClr val="tx2"/>
-                </a:solidFill>
-              </a:rPr>
-              <a:t>one changed line breaks the chain; /audit/verify says where</a:t>
-            </a:r>
-            <a:endParaRPr lang="en-US" sz="1200" dirty="0"/>
-          </a:p>
-        </p:txBody>
-      </p:sp>
-      <p:sp>
-        <p:nvSpPr>
-          <p:cNvPr id="17" name="reg FINRA 3110"/>
-          <p:cNvSpPr/>
-          <p:nvPr/>
-        </p:nvSpPr>
-        <p:spPr>
-          <a:xfrm>
-            <a:off x="457200" y="4160520"/>
-            <a:ext cx="1920240" cy="457200"/>
+          <p:cNvPr id="15" name="outcome 4"/>
+          <p:cNvSpPr/>
+          <p:nvPr/>
+        </p:nvSpPr>
+        <p:spPr>
+          <a:xfrm>
+            <a:off x="6766560" y="1234440"/>
+            <a:ext cx="1920240" cy="1920240"/>
           </a:xfrm>
           <a:prstGeom prst="roundRect">
             <a:avLst>
-              <a:gd name="adj" fmla="val 50000"/>
+              <a:gd name="adj" fmla="val 5714"/>
             </a:avLst>
           </a:prstGeom>
           <a:solidFill>
-            <a:schemeClr val="bg2"/>
+            <a:schemeClr val="tx2"/>
           </a:solidFill>
           <a:ln/>
         </p:spPr>
       </p:sp>
       <p:sp>
         <p:nvSpPr>
-          <p:cNvPr id="18" name="Text 13"/>
-          <p:cNvSpPr txBox="1"/>
-          <p:nvPr/>
-        </p:nvSpPr>
-        <p:spPr>
-          <a:xfrm>
-            <a:off x="457200" y="4160520"/>
-            <a:ext cx="1920240" cy="457200"/>
+          <p:cNvPr id="16" name="Shape 11"/>
+          <p:cNvSpPr/>
+          <p:nvPr/>
+        </p:nvSpPr>
+        <p:spPr>
+          <a:xfrm>
+            <a:off x="6949440" y="1417320"/>
+            <a:ext cx="548640" cy="548640"/>
+          </a:xfrm>
+          <a:prstGeom prst="ellipse">
+            <a:avLst/>
+          </a:prstGeom>
+          <a:solidFill>
+            <a:schemeClr val="accent2"/>
+          </a:solidFill>
+          <a:ln/>
+        </p:spPr>
+      </p:sp>
+      <p:pic>
+        <p:nvPicPr>
+          <p:cNvPr id="17" name="Image 3" descr="preencoded.png">    </p:cNvPr>
+          <p:cNvPicPr>
+            <a:picLocks noChangeAspect="1"/>
+          </p:cNvPicPr>
+          <p:nvPr/>
+        </p:nvPicPr>
+        <p:blipFill>
+          <a:blip r:embed="rId4"/>
+          <a:stretch>
+            <a:fillRect/>
+          </a:stretch>
+        </p:blipFill>
+        <p:spPr>
+          <a:xfrm>
+            <a:off x="7086600" y="1554480"/>
+            <a:ext cx="274320" cy="274320"/>
+          </a:xfrm>
+          <a:prstGeom prst="rect">
+            <a:avLst/>
+          </a:prstGeom>
+        </p:spPr>
+      </p:pic>
+      <p:sp>
+        <p:nvSpPr>
+          <p:cNvPr id="18" name="Text 12"/>
+          <p:cNvSpPr txBox="1"/>
+          <p:nvPr/>
+        </p:nvSpPr>
+        <p:spPr>
+          <a:xfrm>
+            <a:off x="6949440" y="2103120"/>
+            <a:ext cx="1600200" cy="960120"/>
+          </a:xfrm>
+          <a:prstGeom prst="rect">
+            <a:avLst/>
+          </a:prstGeom>
+          <a:noFill/>
+          <a:ln/>
+        </p:spPr>
+        <p:txBody>
+          <a:bodyPr wrap="square" lIns="0" tIns="0" rIns="0" bIns="0" rtlCol="0" anchor="t"/>
+          <a:lstStyle/>
+          <a:p>
+            <a:pPr indent="0" marL="0">
+              <a:buNone/>
+            </a:pPr>
+            <a:r>
+              <a:rPr lang="en-US" sz="1500" dirty="0">
+                <a:solidFill>
+                  <a:schemeClr val="bg1"/>
+                </a:solidFill>
+              </a:rPr>
+              <a:t>Every step sits in a tamper-evident log.</a:t>
+            </a:r>
+            <a:endParaRPr lang="en-US" sz="1500" dirty="0"/>
+          </a:p>
+        </p:txBody>
+      </p:sp>
+      <p:sp>
+        <p:nvSpPr>
+          <p:cNvPr id="19" name="Text 13"/>
+          <p:cNvSpPr txBox="1"/>
+          <p:nvPr/>
+        </p:nvSpPr>
+        <p:spPr>
+          <a:xfrm>
+            <a:off x="457200" y="3337560"/>
+            <a:ext cx="8229600" cy="594360"/>
           </a:xfrm>
           <a:prstGeom prst="rect">
             <a:avLst/>
@@ -10583,232 +11478,53 @@
               <a:buNone/>
             </a:pPr>
             <a:r>
-              <a:rPr lang="en-US" sz="1000" b="1" dirty="0">
-                <a:solidFill>
-                  <a:schemeClr val="tx1"/>
-                </a:solidFill>
-              </a:rPr>
-              <a:t>FINRA 3110</a:t>
-            </a:r>
+              <a:rPr lang="en-US" sz="2800" b="1" dirty="0">
+                <a:solidFill>
+                  <a:schemeClr val="accent1"/>
+                </a:solidFill>
+                <a:latin typeface="Cambria" pitchFamily="34" charset="0"/>
+                <a:ea typeface="Cambria" pitchFamily="34" charset="-122"/>
+                <a:cs typeface="Cambria" pitchFamily="34" charset="-120"/>
+              </a:rPr>
+              <a:t>Don't trust the agent. Trust the flow.</a:t>
+            </a:r>
+            <a:endParaRPr lang="en-US" sz="2800" dirty="0"/>
+          </a:p>
+        </p:txBody>
+      </p:sp>
+      <p:sp>
+        <p:nvSpPr>
+          <p:cNvPr id="20" name="Text 14"/>
+          <p:cNvSpPr txBox="1"/>
+          <p:nvPr/>
+        </p:nvSpPr>
+        <p:spPr>
+          <a:xfrm>
+            <a:off x="457200" y="4023360"/>
+            <a:ext cx="8229600" cy="365760"/>
+          </a:xfrm>
+          <a:prstGeom prst="rect">
+            <a:avLst/>
+          </a:prstGeom>
+          <a:noFill/>
+          <a:ln/>
+        </p:spPr>
+        <p:txBody>
+          <a:bodyPr wrap="square" lIns="0" tIns="0" rIns="0" bIns="0" rtlCol="0" anchor="ctr"/>
+          <a:lstStyle/>
+          <a:p>
             <a:pPr algn="ctr" indent="0" marL="0">
               <a:buNone/>
             </a:pPr>
             <a:r>
-              <a:rPr lang="en-US" sz="1000" dirty="0">
-                <a:solidFill>
-                  <a:schemeClr val="accent5"/>
-                </a:solidFill>
-              </a:rPr>
-              <a:t>  barriers</a:t>
-            </a:r>
-            <a:endParaRPr lang="en-US" sz="1000" dirty="0"/>
-          </a:p>
-        </p:txBody>
-      </p:sp>
-      <p:sp>
-        <p:nvSpPr>
-          <p:cNvPr id="19" name="reg SEC 17a-4"/>
-          <p:cNvSpPr/>
-          <p:nvPr/>
-        </p:nvSpPr>
-        <p:spPr>
-          <a:xfrm>
-            <a:off x="2560320" y="4160520"/>
-            <a:ext cx="1920240" cy="457200"/>
-          </a:xfrm>
-          <a:prstGeom prst="roundRect">
-            <a:avLst>
-              <a:gd name="adj" fmla="val 50000"/>
-            </a:avLst>
-          </a:prstGeom>
-          <a:solidFill>
-            <a:schemeClr val="bg2"/>
-          </a:solidFill>
-          <a:ln/>
-        </p:spPr>
-      </p:sp>
-      <p:sp>
-        <p:nvSpPr>
-          <p:cNvPr id="20" name="Text 15"/>
-          <p:cNvSpPr txBox="1"/>
-          <p:nvPr/>
-        </p:nvSpPr>
-        <p:spPr>
-          <a:xfrm>
-            <a:off x="2560320" y="4160520"/>
-            <a:ext cx="1920240" cy="457200"/>
-          </a:xfrm>
-          <a:prstGeom prst="rect">
-            <a:avLst/>
-          </a:prstGeom>
-          <a:noFill/>
-          <a:ln/>
-        </p:spPr>
-        <p:txBody>
-          <a:bodyPr wrap="square" lIns="0" tIns="0" rIns="0" bIns="0" rtlCol="0" anchor="ctr"/>
-          <a:lstStyle/>
-          <a:p>
-            <a:pPr algn="ctr" indent="0" marL="0">
-              <a:buNone/>
-            </a:pPr>
-            <a:r>
-              <a:rPr lang="en-US" sz="1000" b="1" dirty="0">
-                <a:solidFill>
-                  <a:schemeClr val="tx1"/>
-                </a:solidFill>
-              </a:rPr>
-              <a:t>SEC 17a-4</a:t>
-            </a:r>
-            <a:pPr algn="ctr" indent="0" marL="0">
-              <a:buNone/>
-            </a:pPr>
-            <a:r>
-              <a:rPr lang="en-US" sz="1000" dirty="0">
-                <a:solidFill>
-                  <a:schemeClr val="accent5"/>
-                </a:solidFill>
-              </a:rPr>
-              <a:t>  audit trail</a:t>
-            </a:r>
-            <a:endParaRPr lang="en-US" sz="1000" dirty="0"/>
-          </a:p>
-        </p:txBody>
-      </p:sp>
-      <p:sp>
-        <p:nvSpPr>
-          <p:cNvPr id="21" name="reg EU AI Act Art. 12"/>
-          <p:cNvSpPr/>
-          <p:nvPr/>
-        </p:nvSpPr>
-        <p:spPr>
-          <a:xfrm>
-            <a:off x="4663440" y="4160520"/>
-            <a:ext cx="1920240" cy="457200"/>
-          </a:xfrm>
-          <a:prstGeom prst="roundRect">
-            <a:avLst>
-              <a:gd name="adj" fmla="val 50000"/>
-            </a:avLst>
-          </a:prstGeom>
-          <a:solidFill>
-            <a:schemeClr val="bg2"/>
-          </a:solidFill>
-          <a:ln/>
-        </p:spPr>
-      </p:sp>
-      <p:sp>
-        <p:nvSpPr>
-          <p:cNvPr id="22" name="Text 17"/>
-          <p:cNvSpPr txBox="1"/>
-          <p:nvPr/>
-        </p:nvSpPr>
-        <p:spPr>
-          <a:xfrm>
-            <a:off x="4663440" y="4160520"/>
-            <a:ext cx="1920240" cy="457200"/>
-          </a:xfrm>
-          <a:prstGeom prst="rect">
-            <a:avLst/>
-          </a:prstGeom>
-          <a:noFill/>
-          <a:ln/>
-        </p:spPr>
-        <p:txBody>
-          <a:bodyPr wrap="square" lIns="0" tIns="0" rIns="0" bIns="0" rtlCol="0" anchor="ctr"/>
-          <a:lstStyle/>
-          <a:p>
-            <a:pPr algn="ctr" indent="0" marL="0">
-              <a:buNone/>
-            </a:pPr>
-            <a:r>
-              <a:rPr lang="en-US" sz="1000" b="1" dirty="0">
-                <a:solidFill>
-                  <a:schemeClr val="tx1"/>
-                </a:solidFill>
-              </a:rPr>
-              <a:t>EU AI Act Art. 12</a:t>
-            </a:r>
-            <a:pPr algn="ctr" indent="0" marL="0">
-              <a:buNone/>
-            </a:pPr>
-            <a:r>
-              <a:rPr lang="en-US" sz="1000" dirty="0">
-                <a:solidFill>
-                  <a:schemeClr val="accent5"/>
-                </a:solidFill>
-              </a:rPr>
-              <a:t>  logging</a:t>
-            </a:r>
-            <a:endParaRPr lang="en-US" sz="1000" dirty="0"/>
-          </a:p>
-        </p:txBody>
-      </p:sp>
-      <p:sp>
-        <p:nvSpPr>
-          <p:cNvPr id="23" name="reg DORA"/>
-          <p:cNvSpPr/>
-          <p:nvPr/>
-        </p:nvSpPr>
-        <p:spPr>
-          <a:xfrm>
-            <a:off x="6766560" y="4160520"/>
-            <a:ext cx="1920240" cy="457200"/>
-          </a:xfrm>
-          <a:prstGeom prst="roundRect">
-            <a:avLst>
-              <a:gd name="adj" fmla="val 50000"/>
-            </a:avLst>
-          </a:prstGeom>
-          <a:solidFill>
-            <a:schemeClr val="bg2"/>
-          </a:solidFill>
-          <a:ln/>
-        </p:spPr>
-      </p:sp>
-      <p:sp>
-        <p:nvSpPr>
-          <p:cNvPr id="24" name="Text 19"/>
-          <p:cNvSpPr txBox="1"/>
-          <p:nvPr/>
-        </p:nvSpPr>
-        <p:spPr>
-          <a:xfrm>
-            <a:off x="6766560" y="4160520"/>
-            <a:ext cx="1920240" cy="457200"/>
-          </a:xfrm>
-          <a:prstGeom prst="rect">
-            <a:avLst/>
-          </a:prstGeom>
-          <a:noFill/>
-          <a:ln/>
-        </p:spPr>
-        <p:txBody>
-          <a:bodyPr wrap="square" lIns="0" tIns="0" rIns="0" bIns="0" rtlCol="0" anchor="ctr"/>
-          <a:lstStyle/>
-          <a:p>
-            <a:pPr algn="ctr" indent="0" marL="0">
-              <a:buNone/>
-            </a:pPr>
-            <a:r>
-              <a:rPr lang="en-US" sz="1000" b="1" dirty="0">
-                <a:solidFill>
-                  <a:schemeClr val="tx1"/>
-                </a:solidFill>
-              </a:rPr>
-              <a:t>DORA</a:t>
-            </a:r>
-            <a:pPr algn="ctr" indent="0" marL="0">
-              <a:buNone/>
-            </a:pPr>
-            <a:r>
-              <a:rPr lang="en-US" sz="1000" dirty="0">
-                <a:solidFill>
-                  <a:schemeClr val="accent5"/>
-                </a:solidFill>
-              </a:rPr>
-              <a:t>  multi-vendor</a:t>
-            </a:r>
-            <a:endParaRPr lang="en-US" sz="1000" dirty="0"/>
+              <a:rPr lang="en-US" sz="1600" dirty="0">
+                <a:solidFill>
+                  <a:schemeClr val="bg2"/>
+                </a:solidFill>
+              </a:rPr>
+              <a:t>The policy file is open. Try to break it.</a:t>
+            </a:r>
+            <a:endParaRPr lang="en-US" sz="1600" dirty="0"/>
           </a:p>
         </p:txBody>
       </p:sp>
